--- a/44_心理学/24_浥尘伙伴社团原创：浥尘智慧家长课堂/AI时代高智慧家长私教课/父母公开课/父母公开课.pptx
+++ b/44_心理学/24_浥尘伙伴社团原创：浥尘智慧家长课堂/AI时代高智慧家长私教课/父母公开课/父母公开课.pptx
@@ -19,35 +19,45 @@
     <p:sldId id="302" r:id="rId13"/>
     <p:sldId id="303" r:id="rId14"/>
     <p:sldId id="304" r:id="rId15"/>
-    <p:sldId id="261" r:id="rId16"/>
-    <p:sldId id="264" r:id="rId17"/>
-    <p:sldId id="262" r:id="rId18"/>
-    <p:sldId id="269" r:id="rId19"/>
-    <p:sldId id="288" r:id="rId20"/>
-    <p:sldId id="258" r:id="rId21"/>
-    <p:sldId id="265" r:id="rId22"/>
-    <p:sldId id="266" r:id="rId23"/>
-    <p:sldId id="267" r:id="rId24"/>
-    <p:sldId id="268" r:id="rId25"/>
-    <p:sldId id="285" r:id="rId26"/>
-    <p:sldId id="270" r:id="rId27"/>
-    <p:sldId id="259" r:id="rId28"/>
-    <p:sldId id="271" r:id="rId29"/>
-    <p:sldId id="272" r:id="rId30"/>
-    <p:sldId id="273" r:id="rId31"/>
-    <p:sldId id="274" r:id="rId32"/>
-    <p:sldId id="260" r:id="rId33"/>
-    <p:sldId id="289" r:id="rId34"/>
-    <p:sldId id="278" r:id="rId35"/>
-    <p:sldId id="286" r:id="rId36"/>
-    <p:sldId id="287" r:id="rId37"/>
-    <p:sldId id="291" r:id="rId38"/>
-    <p:sldId id="290" r:id="rId39"/>
-    <p:sldId id="279" r:id="rId40"/>
-    <p:sldId id="280" r:id="rId41"/>
-    <p:sldId id="281" r:id="rId42"/>
-    <p:sldId id="282" r:id="rId43"/>
-    <p:sldId id="292" r:id="rId44"/>
+    <p:sldId id="307" r:id="rId16"/>
+    <p:sldId id="308" r:id="rId17"/>
+    <p:sldId id="309" r:id="rId18"/>
+    <p:sldId id="310" r:id="rId19"/>
+    <p:sldId id="311" r:id="rId20"/>
+    <p:sldId id="312" r:id="rId21"/>
+    <p:sldId id="313" r:id="rId22"/>
+    <p:sldId id="314" r:id="rId23"/>
+    <p:sldId id="315" r:id="rId24"/>
+    <p:sldId id="306" r:id="rId25"/>
+    <p:sldId id="261" r:id="rId26"/>
+    <p:sldId id="264" r:id="rId27"/>
+    <p:sldId id="262" r:id="rId28"/>
+    <p:sldId id="269" r:id="rId29"/>
+    <p:sldId id="288" r:id="rId30"/>
+    <p:sldId id="258" r:id="rId31"/>
+    <p:sldId id="265" r:id="rId32"/>
+    <p:sldId id="266" r:id="rId33"/>
+    <p:sldId id="267" r:id="rId34"/>
+    <p:sldId id="268" r:id="rId35"/>
+    <p:sldId id="285" r:id="rId36"/>
+    <p:sldId id="270" r:id="rId37"/>
+    <p:sldId id="259" r:id="rId38"/>
+    <p:sldId id="271" r:id="rId39"/>
+    <p:sldId id="272" r:id="rId40"/>
+    <p:sldId id="273" r:id="rId41"/>
+    <p:sldId id="274" r:id="rId42"/>
+    <p:sldId id="260" r:id="rId43"/>
+    <p:sldId id="289" r:id="rId44"/>
+    <p:sldId id="278" r:id="rId45"/>
+    <p:sldId id="286" r:id="rId46"/>
+    <p:sldId id="287" r:id="rId47"/>
+    <p:sldId id="291" r:id="rId48"/>
+    <p:sldId id="290" r:id="rId49"/>
+    <p:sldId id="279" r:id="rId50"/>
+    <p:sldId id="280" r:id="rId51"/>
+    <p:sldId id="281" r:id="rId52"/>
+    <p:sldId id="282" r:id="rId53"/>
+    <p:sldId id="292" r:id="rId54"/>
   </p:sldIdLst>
   <p:sldSz cx="12192000" cy="6858000"/>
   <p:notesSz cx="6858000" cy="9144000"/>
@@ -4628,16 +4638,13 @@
           <a:p>
             <a:r>
               <a:rPr lang="zh-CN" altLang="en-US" sz="4400" dirty="0"/>
-              <a:t>第三代儿童教育就是面向未来的教育（</a:t>
+              <a:t>躺平问题</a:t>
             </a:r>
             <a:r>
               <a:rPr lang="en-US" altLang="zh-CN" sz="4400" dirty="0"/>
-              <a:t>12</a:t>
-            </a:r>
-            <a:r>
-              <a:rPr lang="zh-CN" altLang="en-US" sz="4400" dirty="0"/>
-              <a:t>）</a:t>
-            </a:r>
+              <a:t>1</a:t>
+            </a:r>
+            <a:endParaRPr lang="zh-CN" altLang="en-US" sz="4400" dirty="0"/>
           </a:p>
         </p:txBody>
       </p:sp>
@@ -4667,75 +4674,34 @@
             </a:pPr>
             <a:r>
               <a:rPr lang="zh-CN" altLang="en-US" dirty="0"/>
-              <a:t>第三代儿童教育模式。</a:t>
-            </a:r>
-          </a:p>
-          <a:p>
-            <a:pPr marL="0" indent="0">
-              <a:buNone/>
-            </a:pPr>
-            <a:r>
-              <a:rPr lang="zh-CN" altLang="en-US" dirty="0"/>
-              <a:t>这种模式是面向互联网</a:t>
-            </a:r>
-            <a:r>
-              <a:rPr lang="en-US" altLang="zh-CN" dirty="0"/>
-              <a:t>AI</a:t>
-            </a:r>
-            <a:r>
-              <a:rPr lang="zh-CN" altLang="en-US" dirty="0"/>
-              <a:t>时代的、能够具备独特创意和思维的，还有可以提供情绪价值的。</a:t>
-            </a:r>
-          </a:p>
-          <a:p>
-            <a:pPr marL="0" indent="0">
-              <a:buNone/>
-            </a:pPr>
-            <a:r>
-              <a:rPr lang="zh-CN" altLang="en-US" dirty="0"/>
-              <a:t>全世界能够从事研究</a:t>
-            </a:r>
-            <a:r>
-              <a:rPr lang="en-US" altLang="zh-CN" dirty="0"/>
-              <a:t>AI</a:t>
-            </a:r>
-            <a:r>
-              <a:rPr lang="zh-CN" altLang="en-US" dirty="0"/>
-              <a:t>工作的顶尖的人才，不会超过</a:t>
-            </a:r>
-            <a:r>
-              <a:rPr lang="en-US" altLang="zh-CN" dirty="0"/>
-              <a:t>100</a:t>
-            </a:r>
-            <a:r>
-              <a:rPr lang="zh-CN" altLang="en-US" dirty="0"/>
-              <a:t>个人。</a:t>
-            </a:r>
-          </a:p>
-          <a:p>
-            <a:pPr marL="0" indent="0">
-              <a:buNone/>
-            </a:pPr>
-            <a:r>
-              <a:rPr lang="zh-CN" altLang="en-US"/>
-              <a:t>现在</a:t>
-            </a:r>
-            <a:r>
-              <a:rPr lang="zh-CN" altLang="en-US" dirty="0"/>
-              <a:t>大家能够感受到，国家对于教育的改革力度很大，政策出台非常密集。</a:t>
-            </a:r>
-          </a:p>
-          <a:p>
-            <a:pPr marL="0" indent="0">
-              <a:buNone/>
-            </a:pPr>
-            <a:r>
-              <a:rPr lang="zh-CN" altLang="en-US"/>
-              <a:t>我们</a:t>
-            </a:r>
-            <a:r>
-              <a:rPr lang="zh-CN" altLang="en-US" dirty="0"/>
-              <a:t>说一件事情如果上升到国家层面，也就是说国家开始重视了，就说明这件事已经非常严重了！</a:t>
+              <a:t>现在有一个非常严重的问题，但是很多家长却没有引起高度重视。</a:t>
+            </a:r>
+          </a:p>
+          <a:p>
+            <a:pPr marL="0" indent="0">
+              <a:buNone/>
+            </a:pPr>
+            <a:r>
+              <a:rPr lang="zh-CN" altLang="en-US" dirty="0"/>
+              <a:t>就是很多孩子可以完成高考，并且可以上完大学，但是他们进入不了职场。</a:t>
+            </a:r>
+          </a:p>
+          <a:p>
+            <a:pPr marL="0" indent="0">
+              <a:buNone/>
+            </a:pPr>
+            <a:r>
+              <a:rPr lang="zh-CN" altLang="en-US" dirty="0"/>
+              <a:t>什么意思呢？</a:t>
+            </a:r>
+          </a:p>
+          <a:p>
+            <a:pPr marL="0" indent="0">
+              <a:buNone/>
+            </a:pPr>
+            <a:r>
+              <a:rPr lang="zh-CN" altLang="en-US" dirty="0"/>
+              <a:t>就是在家躺平，不找工作、不结婚，什么也不干，天天打游戏，要么就是考研考公。</a:t>
             </a:r>
           </a:p>
         </p:txBody>
@@ -4754,6 +4720,1528 @@
 </file>
 
 <file path=ppt/slides/slide15.xml><?xml version="1.0" encoding="utf-8"?>
+<p:sld xmlns:a="http://schemas.openxmlformats.org/drawingml/2006/main" xmlns:r="http://schemas.openxmlformats.org/officeDocument/2006/relationships" xmlns:p="http://schemas.openxmlformats.org/presentationml/2006/main">
+  <p:cSld>
+    <p:spTree>
+      <p:nvGrpSpPr>
+        <p:cNvPr id="1" name="">
+          <a:extLst>
+            <a:ext uri="{FF2B5EF4-FFF2-40B4-BE49-F238E27FC236}">
+              <a16:creationId xmlns:a16="http://schemas.microsoft.com/office/drawing/2014/main" id="{2942E572-A4AC-2A09-00FA-C37AD9208197}"/>
+            </a:ext>
+          </a:extLst>
+        </p:cNvPr>
+        <p:cNvGrpSpPr/>
+        <p:nvPr/>
+      </p:nvGrpSpPr>
+      <p:grpSpPr>
+        <a:xfrm>
+          <a:off x="0" y="0"/>
+          <a:ext cx="0" cy="0"/>
+          <a:chOff x="0" y="0"/>
+          <a:chExt cx="0" cy="0"/>
+        </a:xfrm>
+      </p:grpSpPr>
+      <p:sp>
+        <p:nvSpPr>
+          <p:cNvPr id="2" name="标题 1">
+            <a:extLst>
+              <a:ext uri="{FF2B5EF4-FFF2-40B4-BE49-F238E27FC236}">
+                <a16:creationId xmlns:a16="http://schemas.microsoft.com/office/drawing/2014/main" id="{F5C965E8-FB04-D493-C8F8-01C3272AEE78}"/>
+              </a:ext>
+            </a:extLst>
+          </p:cNvPr>
+          <p:cNvSpPr>
+            <a:spLocks noGrp="1"/>
+          </p:cNvSpPr>
+          <p:nvPr>
+            <p:ph type="title"/>
+          </p:nvPr>
+        </p:nvSpPr>
+        <p:spPr/>
+        <p:txBody>
+          <a:bodyPr/>
+          <a:lstStyle/>
+          <a:p>
+            <a:r>
+              <a:rPr lang="zh-CN" altLang="en-US" sz="4400" dirty="0"/>
+              <a:t>躺平问题</a:t>
+            </a:r>
+            <a:r>
+              <a:rPr lang="en-US" altLang="zh-CN" sz="4400" dirty="0"/>
+              <a:t>2</a:t>
+            </a:r>
+            <a:endParaRPr lang="zh-CN" altLang="en-US" sz="4400" dirty="0"/>
+          </a:p>
+        </p:txBody>
+      </p:sp>
+      <p:sp>
+        <p:nvSpPr>
+          <p:cNvPr id="3" name="内容占位符 2">
+            <a:extLst>
+              <a:ext uri="{FF2B5EF4-FFF2-40B4-BE49-F238E27FC236}">
+                <a16:creationId xmlns:a16="http://schemas.microsoft.com/office/drawing/2014/main" id="{25B2DFA2-72FF-2159-7EE9-B3DB1438DD34}"/>
+              </a:ext>
+            </a:extLst>
+          </p:cNvPr>
+          <p:cNvSpPr>
+            <a:spLocks noGrp="1"/>
+          </p:cNvSpPr>
+          <p:nvPr>
+            <p:ph idx="1"/>
+          </p:nvPr>
+        </p:nvSpPr>
+        <p:spPr/>
+        <p:txBody>
+          <a:bodyPr/>
+          <a:lstStyle/>
+          <a:p>
+            <a:pPr marL="0" indent="0">
+              <a:buNone/>
+            </a:pPr>
+            <a:r>
+              <a:rPr lang="zh-CN" altLang="en-US" dirty="0"/>
+              <a:t>有个案例，夫妻两个都是电视台的领导高层，他们的孩子呢也是就读常青藤名校。</a:t>
+            </a:r>
+          </a:p>
+          <a:p>
+            <a:pPr marL="0" indent="0">
+              <a:buNone/>
+            </a:pPr>
+            <a:r>
+              <a:rPr lang="zh-CN" altLang="en-US" dirty="0"/>
+              <a:t>毕业之后也去了最好的公司，就是投资公司，在西方是非常好的公司。</a:t>
+            </a:r>
+          </a:p>
+          <a:p>
+            <a:pPr marL="0" indent="0">
+              <a:buNone/>
+            </a:pPr>
+            <a:r>
+              <a:rPr lang="zh-CN" altLang="en-US" dirty="0"/>
+              <a:t>然后干了半年后回来了，回来干什么呢？</a:t>
+            </a:r>
+          </a:p>
+          <a:p>
+            <a:pPr marL="0" indent="0">
+              <a:buNone/>
+            </a:pPr>
+            <a:r>
+              <a:rPr lang="zh-CN" altLang="en-US" dirty="0"/>
+              <a:t>在家天天念经，从此不再去上班。</a:t>
+            </a:r>
+          </a:p>
+        </p:txBody>
+      </p:sp>
+    </p:spTree>
+    <p:extLst>
+      <p:ext uri="{BB962C8B-B14F-4D97-AF65-F5344CB8AC3E}">
+        <p14:creationId xmlns:p14="http://schemas.microsoft.com/office/powerpoint/2010/main" val="3940564740"/>
+      </p:ext>
+    </p:extLst>
+  </p:cSld>
+  <p:clrMapOvr>
+    <a:masterClrMapping/>
+  </p:clrMapOvr>
+</p:sld>
+</file>
+
+<file path=ppt/slides/slide16.xml><?xml version="1.0" encoding="utf-8"?>
+<p:sld xmlns:a="http://schemas.openxmlformats.org/drawingml/2006/main" xmlns:r="http://schemas.openxmlformats.org/officeDocument/2006/relationships" xmlns:p="http://schemas.openxmlformats.org/presentationml/2006/main">
+  <p:cSld>
+    <p:spTree>
+      <p:nvGrpSpPr>
+        <p:cNvPr id="1" name="">
+          <a:extLst>
+            <a:ext uri="{FF2B5EF4-FFF2-40B4-BE49-F238E27FC236}">
+              <a16:creationId xmlns:a16="http://schemas.microsoft.com/office/drawing/2014/main" id="{57B4BE56-EF89-8422-E601-2E7A571DF53C}"/>
+            </a:ext>
+          </a:extLst>
+        </p:cNvPr>
+        <p:cNvGrpSpPr/>
+        <p:nvPr/>
+      </p:nvGrpSpPr>
+      <p:grpSpPr>
+        <a:xfrm>
+          <a:off x="0" y="0"/>
+          <a:ext cx="0" cy="0"/>
+          <a:chOff x="0" y="0"/>
+          <a:chExt cx="0" cy="0"/>
+        </a:xfrm>
+      </p:grpSpPr>
+      <p:sp>
+        <p:nvSpPr>
+          <p:cNvPr id="2" name="标题 1">
+            <a:extLst>
+              <a:ext uri="{FF2B5EF4-FFF2-40B4-BE49-F238E27FC236}">
+                <a16:creationId xmlns:a16="http://schemas.microsoft.com/office/drawing/2014/main" id="{64C537AC-354A-C2A6-095F-64336C85D4CA}"/>
+              </a:ext>
+            </a:extLst>
+          </p:cNvPr>
+          <p:cNvSpPr>
+            <a:spLocks noGrp="1"/>
+          </p:cNvSpPr>
+          <p:nvPr>
+            <p:ph type="title"/>
+          </p:nvPr>
+        </p:nvSpPr>
+        <p:spPr/>
+        <p:txBody>
+          <a:bodyPr/>
+          <a:lstStyle/>
+          <a:p>
+            <a:r>
+              <a:rPr lang="zh-CN" altLang="en-US" sz="4400" dirty="0"/>
+              <a:t>躺平问题</a:t>
+            </a:r>
+            <a:r>
+              <a:rPr lang="en-US" altLang="zh-CN" sz="4400" dirty="0"/>
+              <a:t>3</a:t>
+            </a:r>
+            <a:endParaRPr lang="zh-CN" altLang="en-US" sz="4400" dirty="0"/>
+          </a:p>
+        </p:txBody>
+      </p:sp>
+      <p:sp>
+        <p:nvSpPr>
+          <p:cNvPr id="3" name="内容占位符 2">
+            <a:extLst>
+              <a:ext uri="{FF2B5EF4-FFF2-40B4-BE49-F238E27FC236}">
+                <a16:creationId xmlns:a16="http://schemas.microsoft.com/office/drawing/2014/main" id="{87CE78E4-4465-6F4E-101C-80AB1A205F6C}"/>
+              </a:ext>
+            </a:extLst>
+          </p:cNvPr>
+          <p:cNvSpPr>
+            <a:spLocks noGrp="1"/>
+          </p:cNvSpPr>
+          <p:nvPr>
+            <p:ph idx="1"/>
+          </p:nvPr>
+        </p:nvSpPr>
+        <p:spPr/>
+        <p:txBody>
+          <a:bodyPr/>
+          <a:lstStyle/>
+          <a:p>
+            <a:pPr marL="0" indent="0">
+              <a:buNone/>
+            </a:pPr>
+            <a:r>
+              <a:rPr lang="zh-CN" altLang="en-US" dirty="0"/>
+              <a:t>还有很多类似的案例，当然现在已经变得非常普遍了。</a:t>
+            </a:r>
+          </a:p>
+          <a:p>
+            <a:pPr marL="0" indent="0">
+              <a:buNone/>
+            </a:pPr>
+            <a:r>
+              <a:rPr lang="zh-CN" altLang="en-US" dirty="0"/>
+              <a:t>其实是什么原因呢？</a:t>
+            </a:r>
+          </a:p>
+          <a:p>
+            <a:pPr marL="0" indent="0">
+              <a:buNone/>
+            </a:pPr>
+            <a:r>
+              <a:rPr lang="zh-CN" altLang="en-US" dirty="0"/>
+              <a:t>就是系统性的出问题了，所以网上说父母把孩子逼成抑郁的都是乱说。</a:t>
+            </a:r>
+          </a:p>
+          <a:p>
+            <a:pPr marL="0" indent="0">
+              <a:buNone/>
+            </a:pPr>
+            <a:r>
+              <a:rPr lang="zh-CN" altLang="en-US" dirty="0"/>
+              <a:t>这明显是非常普遍的、系统性的变化，非要说是父母家长导致的，这很可笑。</a:t>
+            </a:r>
+          </a:p>
+          <a:p>
+            <a:pPr marL="0" indent="0">
+              <a:buNone/>
+            </a:pPr>
+            <a:r>
+              <a:rPr lang="zh-CN" altLang="en-US" dirty="0"/>
+              <a:t>那么这些案例给了我们家长什么警示呢？</a:t>
+            </a:r>
+          </a:p>
+          <a:p>
+            <a:pPr marL="0" indent="0">
+              <a:buNone/>
+            </a:pPr>
+            <a:r>
+              <a:rPr lang="zh-CN" altLang="en-US" dirty="0"/>
+              <a:t>就是说，我们家长培养孩子培养了半天，结果他毕业后什么也不想干、什么也干不了。</a:t>
+            </a:r>
+          </a:p>
+          <a:p>
+            <a:pPr marL="0" indent="0">
+              <a:buNone/>
+            </a:pPr>
+            <a:r>
+              <a:rPr lang="zh-CN" altLang="en-US" dirty="0"/>
+              <a:t>那么你说这样的教育培养有什么用？</a:t>
+            </a:r>
+          </a:p>
+        </p:txBody>
+      </p:sp>
+    </p:spTree>
+    <p:extLst>
+      <p:ext uri="{BB962C8B-B14F-4D97-AF65-F5344CB8AC3E}">
+        <p14:creationId xmlns:p14="http://schemas.microsoft.com/office/powerpoint/2010/main" val="542043656"/>
+      </p:ext>
+    </p:extLst>
+  </p:cSld>
+  <p:clrMapOvr>
+    <a:masterClrMapping/>
+  </p:clrMapOvr>
+</p:sld>
+</file>
+
+<file path=ppt/slides/slide17.xml><?xml version="1.0" encoding="utf-8"?>
+<p:sld xmlns:a="http://schemas.openxmlformats.org/drawingml/2006/main" xmlns:r="http://schemas.openxmlformats.org/officeDocument/2006/relationships" xmlns:p="http://schemas.openxmlformats.org/presentationml/2006/main">
+  <p:cSld>
+    <p:spTree>
+      <p:nvGrpSpPr>
+        <p:cNvPr id="1" name="">
+          <a:extLst>
+            <a:ext uri="{FF2B5EF4-FFF2-40B4-BE49-F238E27FC236}">
+              <a16:creationId xmlns:a16="http://schemas.microsoft.com/office/drawing/2014/main" id="{59A7D19A-7B13-1402-0705-7ED14B1F2285}"/>
+            </a:ext>
+          </a:extLst>
+        </p:cNvPr>
+        <p:cNvGrpSpPr/>
+        <p:nvPr/>
+      </p:nvGrpSpPr>
+      <p:grpSpPr>
+        <a:xfrm>
+          <a:off x="0" y="0"/>
+          <a:ext cx="0" cy="0"/>
+          <a:chOff x="0" y="0"/>
+          <a:chExt cx="0" cy="0"/>
+        </a:xfrm>
+      </p:grpSpPr>
+      <p:sp>
+        <p:nvSpPr>
+          <p:cNvPr id="2" name="标题 1">
+            <a:extLst>
+              <a:ext uri="{FF2B5EF4-FFF2-40B4-BE49-F238E27FC236}">
+                <a16:creationId xmlns:a16="http://schemas.microsoft.com/office/drawing/2014/main" id="{51B91597-164F-2F04-B666-47BC4195D7EA}"/>
+              </a:ext>
+            </a:extLst>
+          </p:cNvPr>
+          <p:cNvSpPr>
+            <a:spLocks noGrp="1"/>
+          </p:cNvSpPr>
+          <p:nvPr>
+            <p:ph type="title"/>
+          </p:nvPr>
+        </p:nvSpPr>
+        <p:spPr/>
+        <p:txBody>
+          <a:bodyPr/>
+          <a:lstStyle/>
+          <a:p>
+            <a:r>
+              <a:rPr lang="zh-CN" altLang="en-US" sz="4400" dirty="0"/>
+              <a:t>失败是大概率事件</a:t>
+            </a:r>
+          </a:p>
+        </p:txBody>
+      </p:sp>
+      <p:sp>
+        <p:nvSpPr>
+          <p:cNvPr id="3" name="内容占位符 2">
+            <a:extLst>
+              <a:ext uri="{FF2B5EF4-FFF2-40B4-BE49-F238E27FC236}">
+                <a16:creationId xmlns:a16="http://schemas.microsoft.com/office/drawing/2014/main" id="{8213B8B6-0BC3-3869-F07E-B8388FB1880B}"/>
+              </a:ext>
+            </a:extLst>
+          </p:cNvPr>
+          <p:cNvSpPr>
+            <a:spLocks noGrp="1"/>
+          </p:cNvSpPr>
+          <p:nvPr>
+            <p:ph idx="1"/>
+          </p:nvPr>
+        </p:nvSpPr>
+        <p:spPr/>
+        <p:txBody>
+          <a:bodyPr/>
+          <a:lstStyle/>
+          <a:p>
+            <a:pPr marL="0" indent="0">
+              <a:buNone/>
+            </a:pPr>
+            <a:r>
+              <a:rPr lang="zh-CN" altLang="en-US" dirty="0"/>
+              <a:t>因此我们说，现在这代孩子的教育，失败是大概率事件！</a:t>
+            </a:r>
+          </a:p>
+          <a:p>
+            <a:pPr marL="0" indent="0">
+              <a:buNone/>
+            </a:pPr>
+            <a:r>
+              <a:rPr lang="zh-CN" altLang="en-US" dirty="0"/>
+              <a:t>一，就业端无限挤压，不给机会，太过残酷</a:t>
+            </a:r>
+          </a:p>
+          <a:p>
+            <a:pPr marL="0" indent="0">
+              <a:buNone/>
+            </a:pPr>
+            <a:r>
+              <a:rPr lang="zh-CN" altLang="en-US" dirty="0"/>
+              <a:t>二、教育培养出来的人才过剩，未来不确定性太大了。</a:t>
+            </a:r>
+          </a:p>
+          <a:p>
+            <a:pPr marL="0" indent="0">
+              <a:buNone/>
+            </a:pPr>
+            <a:r>
+              <a:rPr lang="zh-CN" altLang="en-US" dirty="0"/>
+              <a:t>现在的不确定性主要来自中美两国的竞争。</a:t>
+            </a:r>
+          </a:p>
+          <a:p>
+            <a:pPr marL="0" indent="0">
+              <a:buNone/>
+            </a:pPr>
+            <a:r>
+              <a:rPr lang="zh-CN" altLang="en-US" dirty="0"/>
+              <a:t>其他国家如欧洲日本已经没有资格参与</a:t>
+            </a:r>
+            <a:r>
+              <a:rPr lang="en-US" altLang="zh-CN" dirty="0"/>
+              <a:t>AI</a:t>
+            </a:r>
+            <a:r>
+              <a:rPr lang="zh-CN" altLang="en-US" dirty="0"/>
+              <a:t>竞争了。</a:t>
+            </a:r>
+          </a:p>
+          <a:p>
+            <a:pPr marL="0" indent="0">
+              <a:buNone/>
+            </a:pPr>
+            <a:r>
+              <a:rPr lang="zh-CN" altLang="en-US" dirty="0"/>
+              <a:t>所以孩子将来的就业机会，取决于中美竞争的结果。</a:t>
+            </a:r>
+          </a:p>
+        </p:txBody>
+      </p:sp>
+    </p:spTree>
+    <p:extLst>
+      <p:ext uri="{BB962C8B-B14F-4D97-AF65-F5344CB8AC3E}">
+        <p14:creationId xmlns:p14="http://schemas.microsoft.com/office/powerpoint/2010/main" val="1930393817"/>
+      </p:ext>
+    </p:extLst>
+  </p:cSld>
+  <p:clrMapOvr>
+    <a:masterClrMapping/>
+  </p:clrMapOvr>
+</p:sld>
+</file>
+
+<file path=ppt/slides/slide18.xml><?xml version="1.0" encoding="utf-8"?>
+<p:sld xmlns:a="http://schemas.openxmlformats.org/drawingml/2006/main" xmlns:r="http://schemas.openxmlformats.org/officeDocument/2006/relationships" xmlns:p="http://schemas.openxmlformats.org/presentationml/2006/main">
+  <p:cSld>
+    <p:spTree>
+      <p:nvGrpSpPr>
+        <p:cNvPr id="1" name="">
+          <a:extLst>
+            <a:ext uri="{FF2B5EF4-FFF2-40B4-BE49-F238E27FC236}">
+              <a16:creationId xmlns:a16="http://schemas.microsoft.com/office/drawing/2014/main" id="{D5E30A33-23BB-DCDE-B7B4-0F4EEBDD2624}"/>
+            </a:ext>
+          </a:extLst>
+        </p:cNvPr>
+        <p:cNvGrpSpPr/>
+        <p:nvPr/>
+      </p:nvGrpSpPr>
+      <p:grpSpPr>
+        <a:xfrm>
+          <a:off x="0" y="0"/>
+          <a:ext cx="0" cy="0"/>
+          <a:chOff x="0" y="0"/>
+          <a:chExt cx="0" cy="0"/>
+        </a:xfrm>
+      </p:grpSpPr>
+      <p:sp>
+        <p:nvSpPr>
+          <p:cNvPr id="2" name="标题 1">
+            <a:extLst>
+              <a:ext uri="{FF2B5EF4-FFF2-40B4-BE49-F238E27FC236}">
+                <a16:creationId xmlns:a16="http://schemas.microsoft.com/office/drawing/2014/main" id="{32A90453-9E14-AC5C-EB56-DEB9CD543DCD}"/>
+              </a:ext>
+            </a:extLst>
+          </p:cNvPr>
+          <p:cNvSpPr>
+            <a:spLocks noGrp="1"/>
+          </p:cNvSpPr>
+          <p:nvPr>
+            <p:ph type="title"/>
+          </p:nvPr>
+        </p:nvSpPr>
+        <p:spPr/>
+        <p:txBody>
+          <a:bodyPr/>
+          <a:lstStyle/>
+          <a:p>
+            <a:r>
+              <a:rPr lang="zh-CN" altLang="en-US" sz="4400" dirty="0"/>
+              <a:t>为什么学习如此艰难</a:t>
+            </a:r>
+          </a:p>
+        </p:txBody>
+      </p:sp>
+      <p:sp>
+        <p:nvSpPr>
+          <p:cNvPr id="3" name="内容占位符 2">
+            <a:extLst>
+              <a:ext uri="{FF2B5EF4-FFF2-40B4-BE49-F238E27FC236}">
+                <a16:creationId xmlns:a16="http://schemas.microsoft.com/office/drawing/2014/main" id="{B0A0C15A-BAF5-9A06-4FD7-3C7AF8BA6F08}"/>
+              </a:ext>
+            </a:extLst>
+          </p:cNvPr>
+          <p:cNvSpPr>
+            <a:spLocks noGrp="1"/>
+          </p:cNvSpPr>
+          <p:nvPr>
+            <p:ph idx="1"/>
+          </p:nvPr>
+        </p:nvSpPr>
+        <p:spPr/>
+        <p:txBody>
+          <a:bodyPr/>
+          <a:lstStyle/>
+          <a:p>
+            <a:pPr marL="0" indent="0">
+              <a:buNone/>
+            </a:pPr>
+            <a:r>
+              <a:rPr lang="zh-CN" altLang="en-US" dirty="0"/>
+              <a:t>那么现在的孩子为什么学习如此艰难呢？</a:t>
+            </a:r>
+          </a:p>
+          <a:p>
+            <a:pPr marL="0" indent="0">
+              <a:buNone/>
+            </a:pPr>
+            <a:r>
+              <a:rPr lang="zh-CN" altLang="en-US" dirty="0"/>
+              <a:t>因为它已经变了，变的不再是以教育本身为目的，而是筛选为目的。</a:t>
+            </a:r>
+          </a:p>
+          <a:p>
+            <a:pPr marL="0" indent="0">
+              <a:buNone/>
+            </a:pPr>
+            <a:r>
+              <a:rPr lang="zh-CN" altLang="en-US" dirty="0"/>
+              <a:t>他就是要搞最难的东西。</a:t>
+            </a:r>
+          </a:p>
+          <a:p>
+            <a:pPr marL="0" indent="0">
+              <a:buNone/>
+            </a:pPr>
+            <a:r>
+              <a:rPr lang="zh-CN" altLang="en-US" dirty="0"/>
+              <a:t>为什么？</a:t>
+            </a:r>
+          </a:p>
+          <a:p>
+            <a:pPr marL="0" indent="0">
+              <a:buNone/>
+            </a:pPr>
+            <a:r>
+              <a:rPr lang="zh-CN" altLang="en-US" dirty="0"/>
+              <a:t>还是因为竞争，主要是靠头部顶尖的那群孩子。</a:t>
+            </a:r>
+          </a:p>
+        </p:txBody>
+      </p:sp>
+    </p:spTree>
+    <p:extLst>
+      <p:ext uri="{BB962C8B-B14F-4D97-AF65-F5344CB8AC3E}">
+        <p14:creationId xmlns:p14="http://schemas.microsoft.com/office/powerpoint/2010/main" val="1054533147"/>
+      </p:ext>
+    </p:extLst>
+  </p:cSld>
+  <p:clrMapOvr>
+    <a:masterClrMapping/>
+  </p:clrMapOvr>
+</p:sld>
+</file>
+
+<file path=ppt/slides/slide19.xml><?xml version="1.0" encoding="utf-8"?>
+<p:sld xmlns:a="http://schemas.openxmlformats.org/drawingml/2006/main" xmlns:r="http://schemas.openxmlformats.org/officeDocument/2006/relationships" xmlns:p="http://schemas.openxmlformats.org/presentationml/2006/main">
+  <p:cSld>
+    <p:spTree>
+      <p:nvGrpSpPr>
+        <p:cNvPr id="1" name="">
+          <a:extLst>
+            <a:ext uri="{FF2B5EF4-FFF2-40B4-BE49-F238E27FC236}">
+              <a16:creationId xmlns:a16="http://schemas.microsoft.com/office/drawing/2014/main" id="{4D799FB9-0D95-E9AA-A2F1-440B09B374DC}"/>
+            </a:ext>
+          </a:extLst>
+        </p:cNvPr>
+        <p:cNvGrpSpPr/>
+        <p:nvPr/>
+      </p:nvGrpSpPr>
+      <p:grpSpPr>
+        <a:xfrm>
+          <a:off x="0" y="0"/>
+          <a:ext cx="0" cy="0"/>
+          <a:chOff x="0" y="0"/>
+          <a:chExt cx="0" cy="0"/>
+        </a:xfrm>
+      </p:grpSpPr>
+      <p:sp>
+        <p:nvSpPr>
+          <p:cNvPr id="2" name="标题 1">
+            <a:extLst>
+              <a:ext uri="{FF2B5EF4-FFF2-40B4-BE49-F238E27FC236}">
+                <a16:creationId xmlns:a16="http://schemas.microsoft.com/office/drawing/2014/main" id="{789799B9-9F60-E894-EF4F-DFF923CD6AEF}"/>
+              </a:ext>
+            </a:extLst>
+          </p:cNvPr>
+          <p:cNvSpPr>
+            <a:spLocks noGrp="1"/>
+          </p:cNvSpPr>
+          <p:nvPr>
+            <p:ph type="title"/>
+          </p:nvPr>
+        </p:nvSpPr>
+        <p:spPr/>
+        <p:txBody>
+          <a:bodyPr/>
+          <a:lstStyle/>
+          <a:p>
+            <a:r>
+              <a:rPr lang="zh-CN" altLang="en-US" sz="4400" dirty="0"/>
+              <a:t>普通娃应该怎么办</a:t>
+            </a:r>
+            <a:r>
+              <a:rPr lang="en-US" altLang="zh-CN" sz="4400" dirty="0"/>
+              <a:t>1</a:t>
+            </a:r>
+            <a:endParaRPr lang="zh-CN" altLang="en-US" sz="4400" dirty="0"/>
+          </a:p>
+        </p:txBody>
+      </p:sp>
+      <p:sp>
+        <p:nvSpPr>
+          <p:cNvPr id="3" name="内容占位符 2">
+            <a:extLst>
+              <a:ext uri="{FF2B5EF4-FFF2-40B4-BE49-F238E27FC236}">
+                <a16:creationId xmlns:a16="http://schemas.microsoft.com/office/drawing/2014/main" id="{FE97E35C-45CA-33F8-14B1-3F2C5B627A38}"/>
+              </a:ext>
+            </a:extLst>
+          </p:cNvPr>
+          <p:cNvSpPr>
+            <a:spLocks noGrp="1"/>
+          </p:cNvSpPr>
+          <p:nvPr>
+            <p:ph idx="1"/>
+          </p:nvPr>
+        </p:nvSpPr>
+        <p:spPr/>
+        <p:txBody>
+          <a:bodyPr/>
+          <a:lstStyle/>
+          <a:p>
+            <a:pPr marL="0" indent="0">
+              <a:buNone/>
+            </a:pPr>
+            <a:r>
+              <a:rPr lang="zh-CN" altLang="en-US" dirty="0"/>
+              <a:t>要想不被淘汰，但是是个普通娃，我们应该怎么办呢？</a:t>
+            </a:r>
+          </a:p>
+          <a:p>
+            <a:pPr marL="0" indent="0">
+              <a:buNone/>
+            </a:pPr>
+            <a:r>
+              <a:rPr lang="zh-CN" altLang="en-US" dirty="0"/>
+              <a:t>我们说现在的孩子都是生活成长在虚拟世界中的。</a:t>
+            </a:r>
+          </a:p>
+          <a:p>
+            <a:pPr marL="0" indent="0">
+              <a:buNone/>
+            </a:pPr>
+            <a:r>
+              <a:rPr lang="zh-CN" altLang="en-US" dirty="0"/>
+              <a:t>你看孩子们从小就接触电子产品，打电子游戏、看电视、看平板、玩手机。</a:t>
+            </a:r>
+          </a:p>
+          <a:p>
+            <a:pPr marL="0" indent="0">
+              <a:buNone/>
+            </a:pPr>
+            <a:r>
+              <a:rPr lang="zh-CN" altLang="en-US" dirty="0"/>
+              <a:t>我们小时候没有这些东西，是生活在真实的世界中的。</a:t>
+            </a:r>
+          </a:p>
+          <a:p>
+            <a:pPr marL="0" indent="0">
+              <a:buNone/>
+            </a:pPr>
+            <a:r>
+              <a:rPr lang="zh-CN" altLang="en-US" dirty="0"/>
+              <a:t>水、火、泥、沙都玩过。</a:t>
+            </a:r>
+          </a:p>
+        </p:txBody>
+      </p:sp>
+    </p:spTree>
+    <p:extLst>
+      <p:ext uri="{BB962C8B-B14F-4D97-AF65-F5344CB8AC3E}">
+        <p14:creationId xmlns:p14="http://schemas.microsoft.com/office/powerpoint/2010/main" val="1364268031"/>
+      </p:ext>
+    </p:extLst>
+  </p:cSld>
+  <p:clrMapOvr>
+    <a:masterClrMapping/>
+  </p:clrMapOvr>
+</p:sld>
+</file>
+
+<file path=ppt/slides/slide2.xml><?xml version="1.0" encoding="utf-8"?>
+<p:sld xmlns:a="http://schemas.openxmlformats.org/drawingml/2006/main" xmlns:r="http://schemas.openxmlformats.org/officeDocument/2006/relationships" xmlns:p="http://schemas.openxmlformats.org/presentationml/2006/main">
+  <p:cSld>
+    <p:spTree>
+      <p:nvGrpSpPr>
+        <p:cNvPr id="1" name=""/>
+        <p:cNvGrpSpPr/>
+        <p:nvPr/>
+      </p:nvGrpSpPr>
+      <p:grpSpPr>
+        <a:xfrm>
+          <a:off x="0" y="0"/>
+          <a:ext cx="0" cy="0"/>
+          <a:chOff x="0" y="0"/>
+          <a:chExt cx="0" cy="0"/>
+        </a:xfrm>
+      </p:grpSpPr>
+      <p:sp>
+        <p:nvSpPr>
+          <p:cNvPr id="2" name="标题 1">
+            <a:extLst>
+              <a:ext uri="{FF2B5EF4-FFF2-40B4-BE49-F238E27FC236}">
+                <a16:creationId xmlns:a16="http://schemas.microsoft.com/office/drawing/2014/main" id="{5011E1E6-6BB0-22D9-BC45-494D62AE4162}"/>
+              </a:ext>
+            </a:extLst>
+          </p:cNvPr>
+          <p:cNvSpPr>
+            <a:spLocks noGrp="1"/>
+          </p:cNvSpPr>
+          <p:nvPr>
+            <p:ph type="title"/>
+          </p:nvPr>
+        </p:nvSpPr>
+        <p:spPr/>
+        <p:txBody>
+          <a:bodyPr/>
+          <a:lstStyle/>
+          <a:p>
+            <a:r>
+              <a:rPr lang="zh-CN" altLang="en-US" sz="4400" dirty="0"/>
+              <a:t>培养孩子是面向未来，而非面向现在（一）</a:t>
+            </a:r>
+          </a:p>
+        </p:txBody>
+      </p:sp>
+      <p:sp>
+        <p:nvSpPr>
+          <p:cNvPr id="3" name="内容占位符 2">
+            <a:extLst>
+              <a:ext uri="{FF2B5EF4-FFF2-40B4-BE49-F238E27FC236}">
+                <a16:creationId xmlns:a16="http://schemas.microsoft.com/office/drawing/2014/main" id="{A2C68CB0-C8C5-260C-C325-BE4AA61114DE}"/>
+              </a:ext>
+            </a:extLst>
+          </p:cNvPr>
+          <p:cNvSpPr>
+            <a:spLocks noGrp="1"/>
+          </p:cNvSpPr>
+          <p:nvPr>
+            <p:ph idx="1"/>
+          </p:nvPr>
+        </p:nvSpPr>
+        <p:spPr/>
+        <p:txBody>
+          <a:bodyPr/>
+          <a:lstStyle/>
+          <a:p>
+            <a:pPr marL="0" indent="0">
+              <a:buNone/>
+            </a:pPr>
+            <a:r>
+              <a:rPr lang="zh-CN" altLang="en-US" dirty="0"/>
+              <a:t>未来多久？至少</a:t>
+            </a:r>
+            <a:r>
+              <a:rPr lang="en-US" altLang="zh-CN" dirty="0"/>
+              <a:t>10</a:t>
+            </a:r>
+            <a:r>
+              <a:rPr lang="zh-CN" altLang="en-US" dirty="0"/>
+              <a:t>年以上。本科</a:t>
+            </a:r>
+            <a:r>
+              <a:rPr lang="en-US" altLang="zh-CN" dirty="0"/>
+              <a:t>4</a:t>
+            </a:r>
+            <a:r>
+              <a:rPr lang="zh-CN" altLang="en-US" dirty="0"/>
+              <a:t>年，研究生</a:t>
+            </a:r>
+            <a:r>
+              <a:rPr lang="en-US" altLang="zh-CN" dirty="0"/>
+              <a:t>3</a:t>
+            </a:r>
+            <a:r>
+              <a:rPr lang="zh-CN" altLang="en-US" dirty="0"/>
+              <a:t>年，工作</a:t>
+            </a:r>
+            <a:r>
+              <a:rPr lang="en-US" altLang="zh-CN" dirty="0"/>
+              <a:t>3</a:t>
+            </a:r>
+            <a:r>
+              <a:rPr lang="zh-CN" altLang="en-US" dirty="0"/>
+              <a:t>年。</a:t>
+            </a:r>
+            <a:endParaRPr lang="en-US" altLang="zh-CN" dirty="0"/>
+          </a:p>
+          <a:p>
+            <a:pPr marL="0" indent="0">
+              <a:buNone/>
+            </a:pPr>
+            <a:r>
+              <a:rPr lang="zh-CN" altLang="en-US" dirty="0"/>
+              <a:t>据说现在考公务员，要研究生学历，并且还要有至少两年以上的工作经历才能报考。</a:t>
+            </a:r>
+            <a:endParaRPr lang="en-US" altLang="zh-CN" dirty="0"/>
+          </a:p>
+          <a:p>
+            <a:pPr marL="0" indent="0">
+              <a:buNone/>
+            </a:pPr>
+            <a:r>
+              <a:rPr lang="zh-CN" altLang="en-US" dirty="0"/>
+              <a:t>美国，学了理科，或者说计算机专业，搞</a:t>
+            </a:r>
+            <a:r>
+              <a:rPr lang="en-US" altLang="zh-CN" dirty="0"/>
+              <a:t>AI</a:t>
+            </a:r>
+            <a:r>
+              <a:rPr lang="zh-CN" altLang="en-US" dirty="0"/>
+              <a:t>的，在毕业之后就没有工作了。</a:t>
+            </a:r>
+          </a:p>
+          <a:p>
+            <a:pPr marL="0" indent="0">
+              <a:buNone/>
+            </a:pPr>
+            <a:r>
+              <a:rPr lang="zh-CN" altLang="en-US" dirty="0"/>
+              <a:t>在</a:t>
+            </a:r>
+            <a:r>
+              <a:rPr lang="en-US" altLang="zh-CN" dirty="0"/>
+              <a:t>30</a:t>
+            </a:r>
+            <a:r>
+              <a:rPr lang="zh-CN" altLang="en-US" dirty="0"/>
+              <a:t>岁左右就要对专业方向或者说职业发展方向，要有一个清晰的定位。</a:t>
+            </a:r>
+          </a:p>
+          <a:p>
+            <a:pPr marL="0" indent="0">
+              <a:buNone/>
+            </a:pPr>
+            <a:r>
+              <a:rPr lang="zh-CN" altLang="en-US" dirty="0"/>
+              <a:t>因为现在这个时代，专业方向是非常固化的，想要跨专业、跨领域是几乎不可能的事。</a:t>
+            </a:r>
+            <a:endParaRPr lang="en-US" altLang="zh-CN" dirty="0"/>
+          </a:p>
+          <a:p>
+            <a:pPr marL="0" indent="0">
+              <a:buNone/>
+            </a:pPr>
+            <a:r>
+              <a:rPr lang="zh-CN" altLang="en-US" dirty="0"/>
+              <a:t>教育部，有一个很重要的改革</a:t>
+            </a:r>
+          </a:p>
+          <a:p>
+            <a:pPr marL="0" indent="0">
+              <a:buNone/>
+            </a:pPr>
+            <a:r>
+              <a:rPr lang="zh-CN" altLang="en-US" dirty="0"/>
+              <a:t>就改革不是新建了多少大学，而是说是要在全国建</a:t>
+            </a:r>
+            <a:r>
+              <a:rPr lang="en-US" altLang="zh-CN" dirty="0"/>
+              <a:t>9000</a:t>
+            </a:r>
+            <a:r>
+              <a:rPr lang="zh-CN" altLang="en-US" dirty="0"/>
+              <a:t>所，两年建成</a:t>
+            </a:r>
+            <a:r>
+              <a:rPr lang="en-US" altLang="zh-CN" dirty="0"/>
+              <a:t>1.8</a:t>
+            </a:r>
+            <a:r>
+              <a:rPr lang="zh-CN" altLang="en-US" dirty="0"/>
+              <a:t>万所学校。</a:t>
+            </a:r>
+          </a:p>
+          <a:p>
+            <a:pPr marL="0" indent="0">
+              <a:buNone/>
+            </a:pPr>
+            <a:r>
+              <a:rPr lang="zh-CN" altLang="en-US" dirty="0"/>
+              <a:t>这些学校不是用来学知识的，而是用来玩的，重要在体育、劳动和其他技能方面的培养。</a:t>
+            </a:r>
+          </a:p>
+        </p:txBody>
+      </p:sp>
+    </p:spTree>
+    <p:extLst>
+      <p:ext uri="{BB962C8B-B14F-4D97-AF65-F5344CB8AC3E}">
+        <p14:creationId xmlns:p14="http://schemas.microsoft.com/office/powerpoint/2010/main" val="1856905645"/>
+      </p:ext>
+    </p:extLst>
+  </p:cSld>
+  <p:clrMapOvr>
+    <a:masterClrMapping/>
+  </p:clrMapOvr>
+</p:sld>
+</file>
+
+<file path=ppt/slides/slide20.xml><?xml version="1.0" encoding="utf-8"?>
+<p:sld xmlns:a="http://schemas.openxmlformats.org/drawingml/2006/main" xmlns:r="http://schemas.openxmlformats.org/officeDocument/2006/relationships" xmlns:p="http://schemas.openxmlformats.org/presentationml/2006/main">
+  <p:cSld>
+    <p:spTree>
+      <p:nvGrpSpPr>
+        <p:cNvPr id="1" name="">
+          <a:extLst>
+            <a:ext uri="{FF2B5EF4-FFF2-40B4-BE49-F238E27FC236}">
+              <a16:creationId xmlns:a16="http://schemas.microsoft.com/office/drawing/2014/main" id="{DC4BC308-A0FF-FD0E-6B05-E06608E42063}"/>
+            </a:ext>
+          </a:extLst>
+        </p:cNvPr>
+        <p:cNvGrpSpPr/>
+        <p:nvPr/>
+      </p:nvGrpSpPr>
+      <p:grpSpPr>
+        <a:xfrm>
+          <a:off x="0" y="0"/>
+          <a:ext cx="0" cy="0"/>
+          <a:chOff x="0" y="0"/>
+          <a:chExt cx="0" cy="0"/>
+        </a:xfrm>
+      </p:grpSpPr>
+      <p:sp>
+        <p:nvSpPr>
+          <p:cNvPr id="2" name="标题 1">
+            <a:extLst>
+              <a:ext uri="{FF2B5EF4-FFF2-40B4-BE49-F238E27FC236}">
+                <a16:creationId xmlns:a16="http://schemas.microsoft.com/office/drawing/2014/main" id="{F80578D7-27E0-1AA1-B9E4-632214D345E7}"/>
+              </a:ext>
+            </a:extLst>
+          </p:cNvPr>
+          <p:cNvSpPr>
+            <a:spLocks noGrp="1"/>
+          </p:cNvSpPr>
+          <p:nvPr>
+            <p:ph type="title"/>
+          </p:nvPr>
+        </p:nvSpPr>
+        <p:spPr/>
+        <p:txBody>
+          <a:bodyPr/>
+          <a:lstStyle/>
+          <a:p>
+            <a:r>
+              <a:rPr lang="zh-CN" altLang="en-US" sz="4400" dirty="0"/>
+              <a:t>普通娃应该怎么办</a:t>
+            </a:r>
+            <a:r>
+              <a:rPr lang="en-US" altLang="zh-CN" sz="4400" dirty="0"/>
+              <a:t>2</a:t>
+            </a:r>
+            <a:endParaRPr lang="zh-CN" altLang="en-US" sz="4400" dirty="0"/>
+          </a:p>
+        </p:txBody>
+      </p:sp>
+      <p:sp>
+        <p:nvSpPr>
+          <p:cNvPr id="3" name="内容占位符 2">
+            <a:extLst>
+              <a:ext uri="{FF2B5EF4-FFF2-40B4-BE49-F238E27FC236}">
+                <a16:creationId xmlns:a16="http://schemas.microsoft.com/office/drawing/2014/main" id="{1CB92387-6888-D6DC-15E2-244574DB4CD1}"/>
+              </a:ext>
+            </a:extLst>
+          </p:cNvPr>
+          <p:cNvSpPr>
+            <a:spLocks noGrp="1"/>
+          </p:cNvSpPr>
+          <p:nvPr>
+            <p:ph idx="1"/>
+          </p:nvPr>
+        </p:nvSpPr>
+        <p:spPr/>
+        <p:txBody>
+          <a:bodyPr/>
+          <a:lstStyle/>
+          <a:p>
+            <a:pPr marL="0" indent="0">
+              <a:buNone/>
+            </a:pPr>
+            <a:r>
+              <a:rPr lang="zh-CN" altLang="en-US" dirty="0"/>
+              <a:t>真正正确的做法，是让孩子大量地接触自然，去体验真实世界！</a:t>
+            </a:r>
+          </a:p>
+          <a:p>
+            <a:pPr marL="0" indent="0">
+              <a:buNone/>
+            </a:pPr>
+            <a:endParaRPr lang="zh-CN" altLang="en-US" dirty="0"/>
+          </a:p>
+          <a:p>
+            <a:pPr marL="0" indent="0">
+              <a:buNone/>
+            </a:pPr>
+            <a:r>
+              <a:rPr lang="zh-CN" altLang="en-US" dirty="0"/>
+              <a:t>我以前举过一个“夹生饭”的例子。</a:t>
+            </a:r>
+          </a:p>
+        </p:txBody>
+      </p:sp>
+    </p:spTree>
+    <p:extLst>
+      <p:ext uri="{BB962C8B-B14F-4D97-AF65-F5344CB8AC3E}">
+        <p14:creationId xmlns:p14="http://schemas.microsoft.com/office/powerpoint/2010/main" val="3677349108"/>
+      </p:ext>
+    </p:extLst>
+  </p:cSld>
+  <p:clrMapOvr>
+    <a:masterClrMapping/>
+  </p:clrMapOvr>
+</p:sld>
+</file>
+
+<file path=ppt/slides/slide21.xml><?xml version="1.0" encoding="utf-8"?>
+<p:sld xmlns:a="http://schemas.openxmlformats.org/drawingml/2006/main" xmlns:r="http://schemas.openxmlformats.org/officeDocument/2006/relationships" xmlns:p="http://schemas.openxmlformats.org/presentationml/2006/main">
+  <p:cSld>
+    <p:spTree>
+      <p:nvGrpSpPr>
+        <p:cNvPr id="1" name="">
+          <a:extLst>
+            <a:ext uri="{FF2B5EF4-FFF2-40B4-BE49-F238E27FC236}">
+              <a16:creationId xmlns:a16="http://schemas.microsoft.com/office/drawing/2014/main" id="{89403927-F923-F9C0-E28A-46C292E9451B}"/>
+            </a:ext>
+          </a:extLst>
+        </p:cNvPr>
+        <p:cNvGrpSpPr/>
+        <p:nvPr/>
+      </p:nvGrpSpPr>
+      <p:grpSpPr>
+        <a:xfrm>
+          <a:off x="0" y="0"/>
+          <a:ext cx="0" cy="0"/>
+          <a:chOff x="0" y="0"/>
+          <a:chExt cx="0" cy="0"/>
+        </a:xfrm>
+      </p:grpSpPr>
+      <p:sp>
+        <p:nvSpPr>
+          <p:cNvPr id="2" name="标题 1">
+            <a:extLst>
+              <a:ext uri="{FF2B5EF4-FFF2-40B4-BE49-F238E27FC236}">
+                <a16:creationId xmlns:a16="http://schemas.microsoft.com/office/drawing/2014/main" id="{4FE849F8-5BC1-7A26-72AC-05E6F8078A77}"/>
+              </a:ext>
+            </a:extLst>
+          </p:cNvPr>
+          <p:cNvSpPr>
+            <a:spLocks noGrp="1"/>
+          </p:cNvSpPr>
+          <p:nvPr>
+            <p:ph type="title"/>
+          </p:nvPr>
+        </p:nvSpPr>
+        <p:spPr/>
+        <p:txBody>
+          <a:bodyPr/>
+          <a:lstStyle/>
+          <a:p>
+            <a:r>
+              <a:rPr lang="zh-CN" altLang="en-US" sz="4400" dirty="0"/>
+              <a:t>普通娃应该怎么办</a:t>
+            </a:r>
+            <a:r>
+              <a:rPr lang="en-US" altLang="zh-CN" sz="4400" dirty="0"/>
+              <a:t>3</a:t>
+            </a:r>
+            <a:endParaRPr lang="zh-CN" altLang="en-US" sz="4400" dirty="0"/>
+          </a:p>
+        </p:txBody>
+      </p:sp>
+      <p:sp>
+        <p:nvSpPr>
+          <p:cNvPr id="3" name="内容占位符 2">
+            <a:extLst>
+              <a:ext uri="{FF2B5EF4-FFF2-40B4-BE49-F238E27FC236}">
+                <a16:creationId xmlns:a16="http://schemas.microsoft.com/office/drawing/2014/main" id="{EE1CB043-BB5B-D8BC-F10C-7F02DF9965B3}"/>
+              </a:ext>
+            </a:extLst>
+          </p:cNvPr>
+          <p:cNvSpPr>
+            <a:spLocks noGrp="1"/>
+          </p:cNvSpPr>
+          <p:nvPr>
+            <p:ph idx="1"/>
+          </p:nvPr>
+        </p:nvSpPr>
+        <p:spPr/>
+        <p:txBody>
+          <a:bodyPr/>
+          <a:lstStyle/>
+          <a:p>
+            <a:pPr marL="0" indent="0">
+              <a:buNone/>
+            </a:pPr>
+            <a:r>
+              <a:rPr lang="zh-CN" altLang="en-US" dirty="0"/>
+              <a:t>有的家长会问，国家为什么不禁止手机游戏。</a:t>
+            </a:r>
+          </a:p>
+          <a:p>
+            <a:pPr marL="0" indent="0">
+              <a:buNone/>
+            </a:pPr>
+            <a:r>
+              <a:rPr lang="zh-CN" altLang="en-US" dirty="0"/>
+              <a:t>这仍然涉及到中美竞争的问题。</a:t>
+            </a:r>
+          </a:p>
+          <a:p>
+            <a:pPr marL="0" indent="0">
+              <a:buNone/>
+            </a:pPr>
+            <a:r>
+              <a:rPr lang="zh-CN" altLang="en-US" dirty="0"/>
+              <a:t>深度思考</a:t>
+            </a:r>
+          </a:p>
+          <a:p>
+            <a:pPr marL="0" indent="0">
+              <a:buNone/>
+            </a:pPr>
+            <a:r>
+              <a:rPr lang="zh-CN" altLang="en-US" dirty="0"/>
+              <a:t>注意力问题</a:t>
+            </a:r>
+          </a:p>
+        </p:txBody>
+      </p:sp>
+    </p:spTree>
+    <p:extLst>
+      <p:ext uri="{BB962C8B-B14F-4D97-AF65-F5344CB8AC3E}">
+        <p14:creationId xmlns:p14="http://schemas.microsoft.com/office/powerpoint/2010/main" val="996922700"/>
+      </p:ext>
+    </p:extLst>
+  </p:cSld>
+  <p:clrMapOvr>
+    <a:masterClrMapping/>
+  </p:clrMapOvr>
+</p:sld>
+</file>
+
+<file path=ppt/slides/slide22.xml><?xml version="1.0" encoding="utf-8"?>
+<p:sld xmlns:a="http://schemas.openxmlformats.org/drawingml/2006/main" xmlns:r="http://schemas.openxmlformats.org/officeDocument/2006/relationships" xmlns:p="http://schemas.openxmlformats.org/presentationml/2006/main">
+  <p:cSld>
+    <p:spTree>
+      <p:nvGrpSpPr>
+        <p:cNvPr id="1" name="">
+          <a:extLst>
+            <a:ext uri="{FF2B5EF4-FFF2-40B4-BE49-F238E27FC236}">
+              <a16:creationId xmlns:a16="http://schemas.microsoft.com/office/drawing/2014/main" id="{6962491D-FE5D-258B-3204-B94773C53D15}"/>
+            </a:ext>
+          </a:extLst>
+        </p:cNvPr>
+        <p:cNvGrpSpPr/>
+        <p:nvPr/>
+      </p:nvGrpSpPr>
+      <p:grpSpPr>
+        <a:xfrm>
+          <a:off x="0" y="0"/>
+          <a:ext cx="0" cy="0"/>
+          <a:chOff x="0" y="0"/>
+          <a:chExt cx="0" cy="0"/>
+        </a:xfrm>
+      </p:grpSpPr>
+      <p:sp>
+        <p:nvSpPr>
+          <p:cNvPr id="2" name="标题 1">
+            <a:extLst>
+              <a:ext uri="{FF2B5EF4-FFF2-40B4-BE49-F238E27FC236}">
+                <a16:creationId xmlns:a16="http://schemas.microsoft.com/office/drawing/2014/main" id="{7DCAE318-B87A-3392-CB96-3E70F2E4D755}"/>
+              </a:ext>
+            </a:extLst>
+          </p:cNvPr>
+          <p:cNvSpPr>
+            <a:spLocks noGrp="1"/>
+          </p:cNvSpPr>
+          <p:nvPr>
+            <p:ph type="title"/>
+          </p:nvPr>
+        </p:nvSpPr>
+        <p:spPr/>
+        <p:txBody>
+          <a:bodyPr/>
+          <a:lstStyle/>
+          <a:p>
+            <a:r>
+              <a:rPr lang="zh-CN" altLang="en-US" sz="4400" dirty="0"/>
+              <a:t>常见的错误教育方式</a:t>
+            </a:r>
+            <a:r>
+              <a:rPr lang="en-US" altLang="zh-CN" sz="4400" dirty="0"/>
+              <a:t>1</a:t>
+            </a:r>
+            <a:endParaRPr lang="zh-CN" altLang="en-US" sz="4400" dirty="0"/>
+          </a:p>
+        </p:txBody>
+      </p:sp>
+      <p:sp>
+        <p:nvSpPr>
+          <p:cNvPr id="3" name="内容占位符 2">
+            <a:extLst>
+              <a:ext uri="{FF2B5EF4-FFF2-40B4-BE49-F238E27FC236}">
+                <a16:creationId xmlns:a16="http://schemas.microsoft.com/office/drawing/2014/main" id="{8FFF174D-9366-0AEE-FFCF-B3D7C1F20DF3}"/>
+              </a:ext>
+            </a:extLst>
+          </p:cNvPr>
+          <p:cNvSpPr>
+            <a:spLocks noGrp="1"/>
+          </p:cNvSpPr>
+          <p:nvPr>
+            <p:ph idx="1"/>
+          </p:nvPr>
+        </p:nvSpPr>
+        <p:spPr/>
+        <p:txBody>
+          <a:bodyPr/>
+          <a:lstStyle/>
+          <a:p>
+            <a:pPr marL="0" indent="0">
+              <a:buNone/>
+            </a:pPr>
+            <a:r>
+              <a:rPr lang="zh-CN" altLang="en-US" dirty="0"/>
+              <a:t>常见的错误教育方式。</a:t>
+            </a:r>
+          </a:p>
+          <a:p>
+            <a:pPr marL="0" indent="0">
+              <a:buNone/>
+            </a:pPr>
+            <a:endParaRPr lang="zh-CN" altLang="en-US" dirty="0"/>
+          </a:p>
+          <a:p>
+            <a:pPr marL="0" indent="0">
+              <a:buNone/>
+            </a:pPr>
+            <a:r>
+              <a:rPr lang="zh-CN" altLang="en-US" dirty="0"/>
+              <a:t>第一个就是放任孩子发展。</a:t>
+            </a:r>
+          </a:p>
+          <a:p>
+            <a:pPr marL="0" indent="0">
+              <a:buNone/>
+            </a:pPr>
+            <a:endParaRPr lang="zh-CN" altLang="en-US" dirty="0"/>
+          </a:p>
+          <a:p>
+            <a:pPr marL="0" indent="0">
+              <a:buNone/>
+            </a:pPr>
+            <a:r>
+              <a:rPr lang="zh-CN" altLang="en-US" dirty="0"/>
+              <a:t>导致孩子游戏成瘾。</a:t>
+            </a:r>
+          </a:p>
+        </p:txBody>
+      </p:sp>
+    </p:spTree>
+    <p:extLst>
+      <p:ext uri="{BB962C8B-B14F-4D97-AF65-F5344CB8AC3E}">
+        <p14:creationId xmlns:p14="http://schemas.microsoft.com/office/powerpoint/2010/main" val="2899467264"/>
+      </p:ext>
+    </p:extLst>
+  </p:cSld>
+  <p:clrMapOvr>
+    <a:masterClrMapping/>
+  </p:clrMapOvr>
+</p:sld>
+</file>
+
+<file path=ppt/slides/slide23.xml><?xml version="1.0" encoding="utf-8"?>
+<p:sld xmlns:a="http://schemas.openxmlformats.org/drawingml/2006/main" xmlns:r="http://schemas.openxmlformats.org/officeDocument/2006/relationships" xmlns:p="http://schemas.openxmlformats.org/presentationml/2006/main">
+  <p:cSld>
+    <p:spTree>
+      <p:nvGrpSpPr>
+        <p:cNvPr id="1" name="">
+          <a:extLst>
+            <a:ext uri="{FF2B5EF4-FFF2-40B4-BE49-F238E27FC236}">
+              <a16:creationId xmlns:a16="http://schemas.microsoft.com/office/drawing/2014/main" id="{2B3B6CF7-B4AB-F918-E692-81427BCBDC59}"/>
+            </a:ext>
+          </a:extLst>
+        </p:cNvPr>
+        <p:cNvGrpSpPr/>
+        <p:nvPr/>
+      </p:nvGrpSpPr>
+      <p:grpSpPr>
+        <a:xfrm>
+          <a:off x="0" y="0"/>
+          <a:ext cx="0" cy="0"/>
+          <a:chOff x="0" y="0"/>
+          <a:chExt cx="0" cy="0"/>
+        </a:xfrm>
+      </p:grpSpPr>
+      <p:sp>
+        <p:nvSpPr>
+          <p:cNvPr id="2" name="标题 1">
+            <a:extLst>
+              <a:ext uri="{FF2B5EF4-FFF2-40B4-BE49-F238E27FC236}">
+                <a16:creationId xmlns:a16="http://schemas.microsoft.com/office/drawing/2014/main" id="{F0B656E4-0AE5-7121-3167-B5362A955862}"/>
+              </a:ext>
+            </a:extLst>
+          </p:cNvPr>
+          <p:cNvSpPr>
+            <a:spLocks noGrp="1"/>
+          </p:cNvSpPr>
+          <p:nvPr>
+            <p:ph type="title"/>
+          </p:nvPr>
+        </p:nvSpPr>
+        <p:spPr/>
+        <p:txBody>
+          <a:bodyPr/>
+          <a:lstStyle/>
+          <a:p>
+            <a:r>
+              <a:rPr lang="zh-CN" altLang="en-US" sz="4400" dirty="0"/>
+              <a:t>常见的错误教育方式</a:t>
+            </a:r>
+            <a:r>
+              <a:rPr lang="en-US" altLang="zh-CN" sz="4400" dirty="0"/>
+              <a:t>2</a:t>
+            </a:r>
+            <a:endParaRPr lang="zh-CN" altLang="en-US" sz="4400" dirty="0"/>
+          </a:p>
+        </p:txBody>
+      </p:sp>
+      <p:sp>
+        <p:nvSpPr>
+          <p:cNvPr id="3" name="内容占位符 2">
+            <a:extLst>
+              <a:ext uri="{FF2B5EF4-FFF2-40B4-BE49-F238E27FC236}">
+                <a16:creationId xmlns:a16="http://schemas.microsoft.com/office/drawing/2014/main" id="{30DDD0BB-7777-20DA-14C8-1056FA828302}"/>
+              </a:ext>
+            </a:extLst>
+          </p:cNvPr>
+          <p:cNvSpPr>
+            <a:spLocks noGrp="1"/>
+          </p:cNvSpPr>
+          <p:nvPr>
+            <p:ph idx="1"/>
+          </p:nvPr>
+        </p:nvSpPr>
+        <p:spPr/>
+        <p:txBody>
+          <a:bodyPr/>
+          <a:lstStyle/>
+          <a:p>
+            <a:pPr marL="0" indent="0">
+              <a:buNone/>
+            </a:pPr>
+            <a:r>
+              <a:rPr lang="zh-CN" altLang="en-US" dirty="0"/>
+              <a:t>第二个就是过度管理孩子。</a:t>
+            </a:r>
+          </a:p>
+          <a:p>
+            <a:pPr marL="0" indent="0">
+              <a:buNone/>
+            </a:pPr>
+            <a:r>
+              <a:rPr lang="zh-CN" altLang="en-US" dirty="0"/>
+              <a:t>导致孩子没有欲望。</a:t>
+            </a:r>
+          </a:p>
+          <a:p>
+            <a:pPr marL="0" indent="0">
+              <a:buNone/>
+            </a:pPr>
+            <a:r>
+              <a:rPr lang="zh-CN" altLang="en-US" dirty="0"/>
+              <a:t>这两种合起来更糟糕，一方面允许孩子玩手机，另一方面又不允许孩子做运动活动，只让孩子学习。</a:t>
+            </a:r>
+          </a:p>
+          <a:p>
+            <a:pPr marL="0" indent="0">
+              <a:buNone/>
+            </a:pPr>
+            <a:r>
+              <a:rPr lang="zh-CN" altLang="en-US"/>
+              <a:t>这种</a:t>
+            </a:r>
+            <a:r>
+              <a:rPr lang="zh-CN" altLang="en-US" dirty="0"/>
+              <a:t>情况，孩子很快就会躺平。</a:t>
+            </a:r>
+          </a:p>
+        </p:txBody>
+      </p:sp>
+    </p:spTree>
+    <p:extLst>
+      <p:ext uri="{BB962C8B-B14F-4D97-AF65-F5344CB8AC3E}">
+        <p14:creationId xmlns:p14="http://schemas.microsoft.com/office/powerpoint/2010/main" val="500985186"/>
+      </p:ext>
+    </p:extLst>
+  </p:cSld>
+  <p:clrMapOvr>
+    <a:masterClrMapping/>
+  </p:clrMapOvr>
+</p:sld>
+</file>
+
+<file path=ppt/slides/slide24.xml><?xml version="1.0" encoding="utf-8"?>
+<p:sld xmlns:a="http://schemas.openxmlformats.org/drawingml/2006/main" xmlns:r="http://schemas.openxmlformats.org/officeDocument/2006/relationships" xmlns:p="http://schemas.openxmlformats.org/presentationml/2006/main">
+  <p:cSld>
+    <p:spTree>
+      <p:nvGrpSpPr>
+        <p:cNvPr id="1" name="">
+          <a:extLst>
+            <a:ext uri="{FF2B5EF4-FFF2-40B4-BE49-F238E27FC236}">
+              <a16:creationId xmlns:a16="http://schemas.microsoft.com/office/drawing/2014/main" id="{F9B552D4-4764-249E-BCA4-750D49AF0CEF}"/>
+            </a:ext>
+          </a:extLst>
+        </p:cNvPr>
+        <p:cNvGrpSpPr/>
+        <p:nvPr/>
+      </p:nvGrpSpPr>
+      <p:grpSpPr>
+        <a:xfrm>
+          <a:off x="0" y="0"/>
+          <a:ext cx="0" cy="0"/>
+          <a:chOff x="0" y="0"/>
+          <a:chExt cx="0" cy="0"/>
+        </a:xfrm>
+      </p:grpSpPr>
+      <p:sp>
+        <p:nvSpPr>
+          <p:cNvPr id="2" name="标题 1">
+            <a:extLst>
+              <a:ext uri="{FF2B5EF4-FFF2-40B4-BE49-F238E27FC236}">
+                <a16:creationId xmlns:a16="http://schemas.microsoft.com/office/drawing/2014/main" id="{E5A26613-4E33-A99F-FEC5-DC0FC1C1C8DB}"/>
+              </a:ext>
+            </a:extLst>
+          </p:cNvPr>
+          <p:cNvSpPr>
+            <a:spLocks noGrp="1"/>
+          </p:cNvSpPr>
+          <p:nvPr>
+            <p:ph type="title"/>
+          </p:nvPr>
+        </p:nvSpPr>
+        <p:spPr/>
+        <p:txBody>
+          <a:bodyPr/>
+          <a:lstStyle/>
+          <a:p>
+            <a:r>
+              <a:rPr lang="zh-CN" altLang="en-US" sz="4400" dirty="0"/>
+              <a:t>第三代儿童教育就是面向未来的教育（</a:t>
+            </a:r>
+            <a:r>
+              <a:rPr lang="en-US" altLang="zh-CN" sz="4400" dirty="0"/>
+              <a:t>12</a:t>
+            </a:r>
+            <a:r>
+              <a:rPr lang="zh-CN" altLang="en-US" sz="4400" dirty="0"/>
+              <a:t>）</a:t>
+            </a:r>
+          </a:p>
+        </p:txBody>
+      </p:sp>
+      <p:sp>
+        <p:nvSpPr>
+          <p:cNvPr id="3" name="内容占位符 2">
+            <a:extLst>
+              <a:ext uri="{FF2B5EF4-FFF2-40B4-BE49-F238E27FC236}">
+                <a16:creationId xmlns:a16="http://schemas.microsoft.com/office/drawing/2014/main" id="{C6CDF445-61ED-1BE5-4544-9413BB34A62F}"/>
+              </a:ext>
+            </a:extLst>
+          </p:cNvPr>
+          <p:cNvSpPr>
+            <a:spLocks noGrp="1"/>
+          </p:cNvSpPr>
+          <p:nvPr>
+            <p:ph idx="1"/>
+          </p:nvPr>
+        </p:nvSpPr>
+        <p:spPr/>
+        <p:txBody>
+          <a:bodyPr/>
+          <a:lstStyle/>
+          <a:p>
+            <a:pPr marL="0" indent="0">
+              <a:buNone/>
+            </a:pPr>
+            <a:r>
+              <a:rPr lang="en-US" altLang="zh-CN" dirty="0"/>
+              <a:t>a</a:t>
+            </a:r>
+            <a:endParaRPr lang="zh-CN" altLang="en-US" dirty="0"/>
+          </a:p>
+        </p:txBody>
+      </p:sp>
+    </p:spTree>
+    <p:extLst>
+      <p:ext uri="{BB962C8B-B14F-4D97-AF65-F5344CB8AC3E}">
+        <p14:creationId xmlns:p14="http://schemas.microsoft.com/office/powerpoint/2010/main" val="3116430649"/>
+      </p:ext>
+    </p:extLst>
+  </p:cSld>
+  <p:clrMapOvr>
+    <a:masterClrMapping/>
+  </p:clrMapOvr>
+</p:sld>
+</file>
+
+<file path=ppt/slides/slide25.xml><?xml version="1.0" encoding="utf-8"?>
 <p:sld xmlns:a="http://schemas.openxmlformats.org/drawingml/2006/main" xmlns:r="http://schemas.openxmlformats.org/officeDocument/2006/relationships" xmlns:p="http://schemas.openxmlformats.org/presentationml/2006/main">
   <p:cSld>
     <p:spTree>
@@ -4935,7 +6423,7 @@
 </p:sld>
 </file>
 
-<file path=ppt/slides/slide16.xml><?xml version="1.0" encoding="utf-8"?>
+<file path=ppt/slides/slide26.xml><?xml version="1.0" encoding="utf-8"?>
 <p:sld xmlns:a="http://schemas.openxmlformats.org/drawingml/2006/main" xmlns:r="http://schemas.openxmlformats.org/officeDocument/2006/relationships" xmlns:p="http://schemas.openxmlformats.org/presentationml/2006/main">
   <p:cSld>
     <p:spTree>
@@ -5060,7 +6548,7 @@
 </p:sld>
 </file>
 
-<file path=ppt/slides/slide17.xml><?xml version="1.0" encoding="utf-8"?>
+<file path=ppt/slides/slide27.xml><?xml version="1.0" encoding="utf-8"?>
 <p:sld xmlns:a="http://schemas.openxmlformats.org/drawingml/2006/main" xmlns:r="http://schemas.openxmlformats.org/officeDocument/2006/relationships" xmlns:p="http://schemas.openxmlformats.org/presentationml/2006/main">
   <p:cSld>
     <p:spTree>
@@ -5215,7 +6703,7 @@
 </p:sld>
 </file>
 
-<file path=ppt/slides/slide18.xml><?xml version="1.0" encoding="utf-8"?>
+<file path=ppt/slides/slide28.xml><?xml version="1.0" encoding="utf-8"?>
 <p:sld xmlns:a="http://schemas.openxmlformats.org/drawingml/2006/main" xmlns:r="http://schemas.openxmlformats.org/officeDocument/2006/relationships" xmlns:p="http://schemas.openxmlformats.org/presentationml/2006/main">
   <p:cSld>
     <p:spTree>
@@ -5867,7 +7355,7 @@
 </p:sld>
 </file>
 
-<file path=ppt/slides/slide19.xml><?xml version="1.0" encoding="utf-8"?>
+<file path=ppt/slides/slide29.xml><?xml version="1.0" encoding="utf-8"?>
 <p:sld xmlns:a="http://schemas.openxmlformats.org/drawingml/2006/main" xmlns:r="http://schemas.openxmlformats.org/officeDocument/2006/relationships" xmlns:p="http://schemas.openxmlformats.org/presentationml/2006/main">
   <p:cSld>
     <p:spTree>
@@ -6546,7 +8034,127 @@
 </p:sld>
 </file>
 
-<file path=ppt/slides/slide2.xml><?xml version="1.0" encoding="utf-8"?>
+<file path=ppt/slides/slide3.xml><?xml version="1.0" encoding="utf-8"?>
+<p:sld xmlns:a="http://schemas.openxmlformats.org/drawingml/2006/main" xmlns:r="http://schemas.openxmlformats.org/officeDocument/2006/relationships" xmlns:p="http://schemas.openxmlformats.org/presentationml/2006/main">
+  <p:cSld>
+    <p:spTree>
+      <p:nvGrpSpPr>
+        <p:cNvPr id="1" name="">
+          <a:extLst>
+            <a:ext uri="{FF2B5EF4-FFF2-40B4-BE49-F238E27FC236}">
+              <a16:creationId xmlns:a16="http://schemas.microsoft.com/office/drawing/2014/main" id="{5F94F6DB-EBC6-99DF-C0C1-E7A5826393E6}"/>
+            </a:ext>
+          </a:extLst>
+        </p:cNvPr>
+        <p:cNvGrpSpPr/>
+        <p:nvPr/>
+      </p:nvGrpSpPr>
+      <p:grpSpPr>
+        <a:xfrm>
+          <a:off x="0" y="0"/>
+          <a:ext cx="0" cy="0"/>
+          <a:chOff x="0" y="0"/>
+          <a:chExt cx="0" cy="0"/>
+        </a:xfrm>
+      </p:grpSpPr>
+      <p:sp>
+        <p:nvSpPr>
+          <p:cNvPr id="2" name="标题 1">
+            <a:extLst>
+              <a:ext uri="{FF2B5EF4-FFF2-40B4-BE49-F238E27FC236}">
+                <a16:creationId xmlns:a16="http://schemas.microsoft.com/office/drawing/2014/main" id="{2C196539-6500-F81A-95E0-F5C3AC1482D1}"/>
+              </a:ext>
+            </a:extLst>
+          </p:cNvPr>
+          <p:cNvSpPr>
+            <a:spLocks noGrp="1"/>
+          </p:cNvSpPr>
+          <p:nvPr>
+            <p:ph type="title"/>
+          </p:nvPr>
+        </p:nvSpPr>
+        <p:spPr/>
+        <p:txBody>
+          <a:bodyPr/>
+          <a:lstStyle/>
+          <a:p>
+            <a:r>
+              <a:rPr lang="zh-CN" altLang="en-US" sz="4400" dirty="0"/>
+              <a:t>第三代儿童教育就是面向未来的教育（一）</a:t>
+            </a:r>
+          </a:p>
+        </p:txBody>
+      </p:sp>
+      <p:sp>
+        <p:nvSpPr>
+          <p:cNvPr id="3" name="内容占位符 2">
+            <a:extLst>
+              <a:ext uri="{FF2B5EF4-FFF2-40B4-BE49-F238E27FC236}">
+                <a16:creationId xmlns:a16="http://schemas.microsoft.com/office/drawing/2014/main" id="{FB3FD454-F9F4-D0BD-AC17-672E75E406C3}"/>
+              </a:ext>
+            </a:extLst>
+          </p:cNvPr>
+          <p:cNvSpPr>
+            <a:spLocks noGrp="1"/>
+          </p:cNvSpPr>
+          <p:nvPr>
+            <p:ph idx="1"/>
+          </p:nvPr>
+        </p:nvSpPr>
+        <p:spPr/>
+        <p:txBody>
+          <a:bodyPr/>
+          <a:lstStyle/>
+          <a:p>
+            <a:pPr marL="0" indent="0">
+              <a:buNone/>
+            </a:pPr>
+            <a:r>
+              <a:rPr lang="zh-CN" altLang="en-US" dirty="0"/>
+              <a:t>面向互联网时代的孩子才能够找到工作的教育。</a:t>
+            </a:r>
+          </a:p>
+          <a:p>
+            <a:pPr marL="0" indent="0">
+              <a:buNone/>
+            </a:pPr>
+            <a:r>
+              <a:rPr lang="zh-CN" altLang="en-US" dirty="0"/>
+              <a:t>这个第三代儿童教育目前大概只在极少数国家中试点。</a:t>
+            </a:r>
+          </a:p>
+          <a:p>
+            <a:pPr marL="0" indent="0">
+              <a:buNone/>
+            </a:pPr>
+            <a:r>
+              <a:rPr lang="zh-CN" altLang="en-US" dirty="0"/>
+              <a:t>中国已经有在做试点，国外最典型的国家就是芬兰。</a:t>
+            </a:r>
+            <a:endParaRPr lang="en-US" altLang="zh-CN" dirty="0"/>
+          </a:p>
+          <a:p>
+            <a:pPr marL="0" indent="0">
+              <a:buNone/>
+            </a:pPr>
+            <a:endParaRPr lang="zh-CN" altLang="en-US" dirty="0"/>
+          </a:p>
+        </p:txBody>
+      </p:sp>
+    </p:spTree>
+    <p:extLst>
+      <p:ext uri="{BB962C8B-B14F-4D97-AF65-F5344CB8AC3E}">
+        <p14:creationId xmlns:p14="http://schemas.microsoft.com/office/powerpoint/2010/main" val="1658203332"/>
+      </p:ext>
+    </p:extLst>
+  </p:cSld>
+  <p:clrMapOvr>
+    <a:masterClrMapping/>
+  </p:clrMapOvr>
+</p:sld>
+</file>
+
+<file path=ppt/slides/slide30.xml><?xml version="1.0" encoding="utf-8"?>
 <p:sld xmlns:a="http://schemas.openxmlformats.org/drawingml/2006/main" xmlns:r="http://schemas.openxmlformats.org/officeDocument/2006/relationships" xmlns:p="http://schemas.openxmlformats.org/presentationml/2006/main">
   <p:cSld>
     <p:spTree>
@@ -6568,225 +8176,6 @@
           <p:cNvPr id="2" name="标题 1">
             <a:extLst>
               <a:ext uri="{FF2B5EF4-FFF2-40B4-BE49-F238E27FC236}">
-                <a16:creationId xmlns:a16="http://schemas.microsoft.com/office/drawing/2014/main" id="{5011E1E6-6BB0-22D9-BC45-494D62AE4162}"/>
-              </a:ext>
-            </a:extLst>
-          </p:cNvPr>
-          <p:cNvSpPr>
-            <a:spLocks noGrp="1"/>
-          </p:cNvSpPr>
-          <p:nvPr>
-            <p:ph type="title"/>
-          </p:nvPr>
-        </p:nvSpPr>
-        <p:spPr/>
-        <p:txBody>
-          <a:bodyPr/>
-          <a:lstStyle/>
-          <a:p>
-            <a:r>
-              <a:rPr lang="zh-CN" altLang="en-US" sz="4400" dirty="0"/>
-              <a:t>培养孩子是面向未来，而非面向现在（一）</a:t>
-            </a:r>
-          </a:p>
-        </p:txBody>
-      </p:sp>
-      <p:sp>
-        <p:nvSpPr>
-          <p:cNvPr id="3" name="内容占位符 2">
-            <a:extLst>
-              <a:ext uri="{FF2B5EF4-FFF2-40B4-BE49-F238E27FC236}">
-                <a16:creationId xmlns:a16="http://schemas.microsoft.com/office/drawing/2014/main" id="{A2C68CB0-C8C5-260C-C325-BE4AA61114DE}"/>
-              </a:ext>
-            </a:extLst>
-          </p:cNvPr>
-          <p:cNvSpPr>
-            <a:spLocks noGrp="1"/>
-          </p:cNvSpPr>
-          <p:nvPr>
-            <p:ph idx="1"/>
-          </p:nvPr>
-        </p:nvSpPr>
-        <p:spPr/>
-        <p:txBody>
-          <a:bodyPr/>
-          <a:lstStyle/>
-          <a:p>
-            <a:pPr marL="0" indent="0">
-              <a:buNone/>
-            </a:pPr>
-            <a:r>
-              <a:rPr lang="zh-CN" altLang="en-US" dirty="0"/>
-              <a:t>未来多久？至少</a:t>
-            </a:r>
-            <a:r>
-              <a:rPr lang="en-US" altLang="zh-CN" dirty="0"/>
-              <a:t>10</a:t>
-            </a:r>
-            <a:r>
-              <a:rPr lang="zh-CN" altLang="en-US" dirty="0"/>
-              <a:t>年以上。本科</a:t>
-            </a:r>
-            <a:r>
-              <a:rPr lang="en-US" altLang="zh-CN" dirty="0"/>
-              <a:t>4</a:t>
-            </a:r>
-            <a:r>
-              <a:rPr lang="zh-CN" altLang="en-US" dirty="0"/>
-              <a:t>年，研究生</a:t>
-            </a:r>
-            <a:r>
-              <a:rPr lang="en-US" altLang="zh-CN" dirty="0"/>
-              <a:t>3</a:t>
-            </a:r>
-            <a:r>
-              <a:rPr lang="zh-CN" altLang="en-US" dirty="0"/>
-              <a:t>年，工作</a:t>
-            </a:r>
-            <a:r>
-              <a:rPr lang="en-US" altLang="zh-CN" dirty="0"/>
-              <a:t>3</a:t>
-            </a:r>
-            <a:r>
-              <a:rPr lang="zh-CN" altLang="en-US" dirty="0"/>
-              <a:t>年。</a:t>
-            </a:r>
-            <a:endParaRPr lang="en-US" altLang="zh-CN" dirty="0"/>
-          </a:p>
-          <a:p>
-            <a:pPr marL="0" indent="0">
-              <a:buNone/>
-            </a:pPr>
-            <a:r>
-              <a:rPr lang="zh-CN" altLang="en-US" dirty="0"/>
-              <a:t>据说现在考公务员，要研究生学历，并且还要有至少两年以上的工作经历才能报考。</a:t>
-            </a:r>
-            <a:endParaRPr lang="en-US" altLang="zh-CN" dirty="0"/>
-          </a:p>
-          <a:p>
-            <a:pPr marL="0" indent="0">
-              <a:buNone/>
-            </a:pPr>
-            <a:r>
-              <a:rPr lang="zh-CN" altLang="en-US" dirty="0"/>
-              <a:t>美国，学了理科，或者说计算机专业，搞</a:t>
-            </a:r>
-            <a:r>
-              <a:rPr lang="en-US" altLang="zh-CN" dirty="0"/>
-              <a:t>AI</a:t>
-            </a:r>
-            <a:r>
-              <a:rPr lang="zh-CN" altLang="en-US" dirty="0"/>
-              <a:t>的，在毕业之后就没有工作了。</a:t>
-            </a:r>
-          </a:p>
-          <a:p>
-            <a:pPr marL="0" indent="0">
-              <a:buNone/>
-            </a:pPr>
-            <a:r>
-              <a:rPr lang="zh-CN" altLang="en-US" dirty="0"/>
-              <a:t>在</a:t>
-            </a:r>
-            <a:r>
-              <a:rPr lang="en-US" altLang="zh-CN" dirty="0"/>
-              <a:t>30</a:t>
-            </a:r>
-            <a:r>
-              <a:rPr lang="zh-CN" altLang="en-US" dirty="0"/>
-              <a:t>岁左右就要对专业方向或者说职业发展方向，要有一个清晰的定位。</a:t>
-            </a:r>
-          </a:p>
-          <a:p>
-            <a:pPr marL="0" indent="0">
-              <a:buNone/>
-            </a:pPr>
-            <a:r>
-              <a:rPr lang="zh-CN" altLang="en-US" dirty="0"/>
-              <a:t>因为现在这个时代，专业方向是非常固化的，想要跨专业、跨领域是几乎不可能的事。</a:t>
-            </a:r>
-            <a:endParaRPr lang="en-US" altLang="zh-CN" dirty="0"/>
-          </a:p>
-          <a:p>
-            <a:pPr marL="0" indent="0">
-              <a:buNone/>
-            </a:pPr>
-            <a:r>
-              <a:rPr lang="zh-CN" altLang="en-US" dirty="0"/>
-              <a:t>教育部，有一个很重要的改革</a:t>
-            </a:r>
-          </a:p>
-          <a:p>
-            <a:pPr marL="0" indent="0">
-              <a:buNone/>
-            </a:pPr>
-            <a:r>
-              <a:rPr lang="zh-CN" altLang="en-US" dirty="0"/>
-              <a:t>就改革不是新建了多少大学，而是说是要在全国建</a:t>
-            </a:r>
-            <a:r>
-              <a:rPr lang="en-US" altLang="zh-CN" dirty="0"/>
-              <a:t>9000</a:t>
-            </a:r>
-            <a:r>
-              <a:rPr lang="zh-CN" altLang="en-US" dirty="0"/>
-              <a:t>所，两年建成</a:t>
-            </a:r>
-            <a:r>
-              <a:rPr lang="en-US" altLang="zh-CN" dirty="0"/>
-              <a:t>1.8</a:t>
-            </a:r>
-            <a:r>
-              <a:rPr lang="zh-CN" altLang="en-US" dirty="0"/>
-              <a:t>万所学校。</a:t>
-            </a:r>
-          </a:p>
-          <a:p>
-            <a:pPr marL="0" indent="0">
-              <a:buNone/>
-            </a:pPr>
-            <a:r>
-              <a:rPr lang="zh-CN" altLang="en-US" dirty="0"/>
-              <a:t>这些学校不是用来学知识的，而是用来玩的，重要在体育、劳动和其他技能方面的培养。</a:t>
-            </a:r>
-          </a:p>
-        </p:txBody>
-      </p:sp>
-    </p:spTree>
-    <p:extLst>
-      <p:ext uri="{BB962C8B-B14F-4D97-AF65-F5344CB8AC3E}">
-        <p14:creationId xmlns:p14="http://schemas.microsoft.com/office/powerpoint/2010/main" val="1856905645"/>
-      </p:ext>
-    </p:extLst>
-  </p:cSld>
-  <p:clrMapOvr>
-    <a:masterClrMapping/>
-  </p:clrMapOvr>
-</p:sld>
-</file>
-
-<file path=ppt/slides/slide20.xml><?xml version="1.0" encoding="utf-8"?>
-<p:sld xmlns:a="http://schemas.openxmlformats.org/drawingml/2006/main" xmlns:r="http://schemas.openxmlformats.org/officeDocument/2006/relationships" xmlns:p="http://schemas.openxmlformats.org/presentationml/2006/main">
-  <p:cSld>
-    <p:spTree>
-      <p:nvGrpSpPr>
-        <p:cNvPr id="1" name=""/>
-        <p:cNvGrpSpPr/>
-        <p:nvPr/>
-      </p:nvGrpSpPr>
-      <p:grpSpPr>
-        <a:xfrm>
-          <a:off x="0" y="0"/>
-          <a:ext cx="0" cy="0"/>
-          <a:chOff x="0" y="0"/>
-          <a:chExt cx="0" cy="0"/>
-        </a:xfrm>
-      </p:grpSpPr>
-      <p:sp>
-        <p:nvSpPr>
-          <p:cNvPr id="2" name="标题 1">
-            <a:extLst>
-              <a:ext uri="{FF2B5EF4-FFF2-40B4-BE49-F238E27FC236}">
                 <a16:creationId xmlns:a16="http://schemas.microsoft.com/office/drawing/2014/main" id="{3FF8F0FA-0924-BB50-886C-D6E25EDD1A10}"/>
               </a:ext>
             </a:extLst>
@@ -6938,7 +8327,7 @@
 </p:sld>
 </file>
 
-<file path=ppt/slides/slide21.xml><?xml version="1.0" encoding="utf-8"?>
+<file path=ppt/slides/slide31.xml><?xml version="1.0" encoding="utf-8"?>
 <p:sld xmlns:a="http://schemas.openxmlformats.org/drawingml/2006/main" xmlns:r="http://schemas.openxmlformats.org/officeDocument/2006/relationships" xmlns:p="http://schemas.openxmlformats.org/presentationml/2006/main">
   <p:cSld>
     <p:spTree>
@@ -7125,7 +8514,7 @@
 </p:sld>
 </file>
 
-<file path=ppt/slides/slide22.xml><?xml version="1.0" encoding="utf-8"?>
+<file path=ppt/slides/slide32.xml><?xml version="1.0" encoding="utf-8"?>
 <p:sld xmlns:a="http://schemas.openxmlformats.org/drawingml/2006/main" xmlns:r="http://schemas.openxmlformats.org/officeDocument/2006/relationships" xmlns:p="http://schemas.openxmlformats.org/presentationml/2006/main">
   <p:cSld>
     <p:spTree>
@@ -7286,7 +8675,7 @@
 </p:sld>
 </file>
 
-<file path=ppt/slides/slide23.xml><?xml version="1.0" encoding="utf-8"?>
+<file path=ppt/slides/slide33.xml><?xml version="1.0" encoding="utf-8"?>
 <p:sld xmlns:a="http://schemas.openxmlformats.org/drawingml/2006/main" xmlns:r="http://schemas.openxmlformats.org/officeDocument/2006/relationships" xmlns:p="http://schemas.openxmlformats.org/presentationml/2006/main">
   <p:cSld>
     <p:spTree>
@@ -7483,7 +8872,7 @@
 </p:sld>
 </file>
 
-<file path=ppt/slides/slide24.xml><?xml version="1.0" encoding="utf-8"?>
+<file path=ppt/slides/slide34.xml><?xml version="1.0" encoding="utf-8"?>
 <p:sld xmlns:a="http://schemas.openxmlformats.org/drawingml/2006/main" xmlns:r="http://schemas.openxmlformats.org/officeDocument/2006/relationships" xmlns:p="http://schemas.openxmlformats.org/presentationml/2006/main">
   <p:cSld>
     <p:spTree>
@@ -7647,7 +9036,7 @@
 </p:sld>
 </file>
 
-<file path=ppt/slides/slide25.xml><?xml version="1.0" encoding="utf-8"?>
+<file path=ppt/slides/slide35.xml><?xml version="1.0" encoding="utf-8"?>
 <p:sld xmlns:a="http://schemas.openxmlformats.org/drawingml/2006/main" xmlns:r="http://schemas.openxmlformats.org/officeDocument/2006/relationships" xmlns:p="http://schemas.openxmlformats.org/presentationml/2006/main">
   <p:cSld>
     <p:spTree>
@@ -7827,7 +9216,7 @@
 </p:sld>
 </file>
 
-<file path=ppt/slides/slide26.xml><?xml version="1.0" encoding="utf-8"?>
+<file path=ppt/slides/slide36.xml><?xml version="1.0" encoding="utf-8"?>
 <p:sld xmlns:a="http://schemas.openxmlformats.org/drawingml/2006/main" xmlns:r="http://schemas.openxmlformats.org/officeDocument/2006/relationships" xmlns:p="http://schemas.openxmlformats.org/presentationml/2006/main">
   <p:cSld>
     <p:spTree>
@@ -8619,7 +10008,7 @@
 </p:sld>
 </file>
 
-<file path=ppt/slides/slide27.xml><?xml version="1.0" encoding="utf-8"?>
+<file path=ppt/slides/slide37.xml><?xml version="1.0" encoding="utf-8"?>
 <p:sld xmlns:a="http://schemas.openxmlformats.org/drawingml/2006/main" xmlns:r="http://schemas.openxmlformats.org/officeDocument/2006/relationships" xmlns:p="http://schemas.openxmlformats.org/presentationml/2006/main">
   <p:cSld>
     <p:spTree>
@@ -8826,7 +10215,7 @@
 </p:sld>
 </file>
 
-<file path=ppt/slides/slide28.xml><?xml version="1.0" encoding="utf-8"?>
+<file path=ppt/slides/slide38.xml><?xml version="1.0" encoding="utf-8"?>
 <p:sld xmlns:a="http://schemas.openxmlformats.org/drawingml/2006/main" xmlns:r="http://schemas.openxmlformats.org/officeDocument/2006/relationships" xmlns:p="http://schemas.openxmlformats.org/presentationml/2006/main">
   <p:cSld>
     <p:spTree>
@@ -9003,7 +10392,7 @@
 </p:sld>
 </file>
 
-<file path=ppt/slides/slide29.xml><?xml version="1.0" encoding="utf-8"?>
+<file path=ppt/slides/slide39.xml><?xml version="1.0" encoding="utf-8"?>
 <p:sld xmlns:a="http://schemas.openxmlformats.org/drawingml/2006/main" xmlns:r="http://schemas.openxmlformats.org/officeDocument/2006/relationships" xmlns:p="http://schemas.openxmlformats.org/presentationml/2006/main">
   <p:cSld>
     <p:spTree>
@@ -9221,1941 +10610,6 @@
     <p:extLst>
       <p:ext uri="{BB962C8B-B14F-4D97-AF65-F5344CB8AC3E}">
         <p14:creationId xmlns:p14="http://schemas.microsoft.com/office/powerpoint/2010/main" val="2417100442"/>
-      </p:ext>
-    </p:extLst>
-  </p:cSld>
-  <p:clrMapOvr>
-    <a:masterClrMapping/>
-  </p:clrMapOvr>
-</p:sld>
-</file>
-
-<file path=ppt/slides/slide3.xml><?xml version="1.0" encoding="utf-8"?>
-<p:sld xmlns:a="http://schemas.openxmlformats.org/drawingml/2006/main" xmlns:r="http://schemas.openxmlformats.org/officeDocument/2006/relationships" xmlns:p="http://schemas.openxmlformats.org/presentationml/2006/main">
-  <p:cSld>
-    <p:spTree>
-      <p:nvGrpSpPr>
-        <p:cNvPr id="1" name="">
-          <a:extLst>
-            <a:ext uri="{FF2B5EF4-FFF2-40B4-BE49-F238E27FC236}">
-              <a16:creationId xmlns:a16="http://schemas.microsoft.com/office/drawing/2014/main" id="{5F94F6DB-EBC6-99DF-C0C1-E7A5826393E6}"/>
-            </a:ext>
-          </a:extLst>
-        </p:cNvPr>
-        <p:cNvGrpSpPr/>
-        <p:nvPr/>
-      </p:nvGrpSpPr>
-      <p:grpSpPr>
-        <a:xfrm>
-          <a:off x="0" y="0"/>
-          <a:ext cx="0" cy="0"/>
-          <a:chOff x="0" y="0"/>
-          <a:chExt cx="0" cy="0"/>
-        </a:xfrm>
-      </p:grpSpPr>
-      <p:sp>
-        <p:nvSpPr>
-          <p:cNvPr id="2" name="标题 1">
-            <a:extLst>
-              <a:ext uri="{FF2B5EF4-FFF2-40B4-BE49-F238E27FC236}">
-                <a16:creationId xmlns:a16="http://schemas.microsoft.com/office/drawing/2014/main" id="{2C196539-6500-F81A-95E0-F5C3AC1482D1}"/>
-              </a:ext>
-            </a:extLst>
-          </p:cNvPr>
-          <p:cNvSpPr>
-            <a:spLocks noGrp="1"/>
-          </p:cNvSpPr>
-          <p:nvPr>
-            <p:ph type="title"/>
-          </p:nvPr>
-        </p:nvSpPr>
-        <p:spPr/>
-        <p:txBody>
-          <a:bodyPr/>
-          <a:lstStyle/>
-          <a:p>
-            <a:r>
-              <a:rPr lang="zh-CN" altLang="en-US" sz="4400" dirty="0"/>
-              <a:t>第三代儿童教育就是面向未来的教育（一）</a:t>
-            </a:r>
-          </a:p>
-        </p:txBody>
-      </p:sp>
-      <p:sp>
-        <p:nvSpPr>
-          <p:cNvPr id="3" name="内容占位符 2">
-            <a:extLst>
-              <a:ext uri="{FF2B5EF4-FFF2-40B4-BE49-F238E27FC236}">
-                <a16:creationId xmlns:a16="http://schemas.microsoft.com/office/drawing/2014/main" id="{FB3FD454-F9F4-D0BD-AC17-672E75E406C3}"/>
-              </a:ext>
-            </a:extLst>
-          </p:cNvPr>
-          <p:cNvSpPr>
-            <a:spLocks noGrp="1"/>
-          </p:cNvSpPr>
-          <p:nvPr>
-            <p:ph idx="1"/>
-          </p:nvPr>
-        </p:nvSpPr>
-        <p:spPr/>
-        <p:txBody>
-          <a:bodyPr/>
-          <a:lstStyle/>
-          <a:p>
-            <a:pPr marL="0" indent="0">
-              <a:buNone/>
-            </a:pPr>
-            <a:r>
-              <a:rPr lang="zh-CN" altLang="en-US" dirty="0"/>
-              <a:t>面向互联网时代的孩子才能够找到工作的教育。</a:t>
-            </a:r>
-          </a:p>
-          <a:p>
-            <a:pPr marL="0" indent="0">
-              <a:buNone/>
-            </a:pPr>
-            <a:r>
-              <a:rPr lang="zh-CN" altLang="en-US" dirty="0"/>
-              <a:t>这个第三代儿童教育目前大概只在极少数国家中试点。</a:t>
-            </a:r>
-          </a:p>
-          <a:p>
-            <a:pPr marL="0" indent="0">
-              <a:buNone/>
-            </a:pPr>
-            <a:r>
-              <a:rPr lang="zh-CN" altLang="en-US" dirty="0"/>
-              <a:t>中国已经有在做试点，国外最典型的国家就是芬兰。</a:t>
-            </a:r>
-            <a:endParaRPr lang="en-US" altLang="zh-CN" dirty="0"/>
-          </a:p>
-          <a:p>
-            <a:pPr marL="0" indent="0">
-              <a:buNone/>
-            </a:pPr>
-            <a:endParaRPr lang="zh-CN" altLang="en-US" dirty="0"/>
-          </a:p>
-        </p:txBody>
-      </p:sp>
-    </p:spTree>
-    <p:extLst>
-      <p:ext uri="{BB962C8B-B14F-4D97-AF65-F5344CB8AC3E}">
-        <p14:creationId xmlns:p14="http://schemas.microsoft.com/office/powerpoint/2010/main" val="1658203332"/>
-      </p:ext>
-    </p:extLst>
-  </p:cSld>
-  <p:clrMapOvr>
-    <a:masterClrMapping/>
-  </p:clrMapOvr>
-</p:sld>
-</file>
-
-<file path=ppt/slides/slide30.xml><?xml version="1.0" encoding="utf-8"?>
-<p:sld xmlns:a="http://schemas.openxmlformats.org/drawingml/2006/main" xmlns:r="http://schemas.openxmlformats.org/officeDocument/2006/relationships" xmlns:p="http://schemas.openxmlformats.org/presentationml/2006/main">
-  <p:cSld>
-    <p:spTree>
-      <p:nvGrpSpPr>
-        <p:cNvPr id="1" name="">
-          <a:extLst>
-            <a:ext uri="{FF2B5EF4-FFF2-40B4-BE49-F238E27FC236}">
-              <a16:creationId xmlns:a16="http://schemas.microsoft.com/office/drawing/2014/main" id="{4EB6EEA2-1726-44EB-37CE-24B2F5BF91D3}"/>
-            </a:ext>
-          </a:extLst>
-        </p:cNvPr>
-        <p:cNvGrpSpPr/>
-        <p:nvPr/>
-      </p:nvGrpSpPr>
-      <p:grpSpPr>
-        <a:xfrm>
-          <a:off x="0" y="0"/>
-          <a:ext cx="0" cy="0"/>
-          <a:chOff x="0" y="0"/>
-          <a:chExt cx="0" cy="0"/>
-        </a:xfrm>
-      </p:grpSpPr>
-      <p:sp>
-        <p:nvSpPr>
-          <p:cNvPr id="2" name="标题 1">
-            <a:extLst>
-              <a:ext uri="{FF2B5EF4-FFF2-40B4-BE49-F238E27FC236}">
-                <a16:creationId xmlns:a16="http://schemas.microsoft.com/office/drawing/2014/main" id="{72F5A53B-F16F-A4B5-5791-ED3BF6F3E670}"/>
-              </a:ext>
-            </a:extLst>
-          </p:cNvPr>
-          <p:cNvSpPr>
-            <a:spLocks noGrp="1"/>
-          </p:cNvSpPr>
-          <p:nvPr>
-            <p:ph type="title"/>
-          </p:nvPr>
-        </p:nvSpPr>
-        <p:spPr/>
-        <p:txBody>
-          <a:bodyPr/>
-          <a:lstStyle/>
-          <a:p>
-            <a:r>
-              <a:rPr lang="zh-CN" altLang="en-US" sz="4400" dirty="0"/>
-              <a:t>爱和原生家庭之谬误（四）</a:t>
-            </a:r>
-          </a:p>
-        </p:txBody>
-      </p:sp>
-      <p:sp>
-        <p:nvSpPr>
-          <p:cNvPr id="3" name="内容占位符 2">
-            <a:extLst>
-              <a:ext uri="{FF2B5EF4-FFF2-40B4-BE49-F238E27FC236}">
-                <a16:creationId xmlns:a16="http://schemas.microsoft.com/office/drawing/2014/main" id="{D82AA319-B42F-1272-F357-507B15C2B933}"/>
-              </a:ext>
-            </a:extLst>
-          </p:cNvPr>
-          <p:cNvSpPr>
-            <a:spLocks noGrp="1"/>
-          </p:cNvSpPr>
-          <p:nvPr>
-            <p:ph idx="1"/>
-          </p:nvPr>
-        </p:nvSpPr>
-        <p:spPr/>
-        <p:txBody>
-          <a:bodyPr/>
-          <a:lstStyle/>
-          <a:p>
-            <a:pPr marL="0" indent="0">
-              <a:buNone/>
-            </a:pPr>
-            <a:r>
-              <a:rPr lang="zh-CN" altLang="en-US" dirty="0"/>
-              <a:t>你父母给孩子爱，爱得越多，越容易娇生惯养。</a:t>
-            </a:r>
-          </a:p>
-          <a:p>
-            <a:pPr marL="0" indent="0">
-              <a:buNone/>
-            </a:pPr>
-            <a:r>
-              <a:rPr lang="zh-CN" altLang="en-US" dirty="0"/>
-              <a:t>道德经讲，反者道之动，弱者道之用。</a:t>
-            </a:r>
-          </a:p>
-          <a:p>
-            <a:pPr marL="0" indent="0">
-              <a:buNone/>
-            </a:pPr>
-            <a:r>
-              <a:rPr lang="zh-CN" altLang="en-US" dirty="0"/>
-              <a:t>任何事物都是向其反方向发展的。</a:t>
-            </a:r>
-          </a:p>
-          <a:p>
-            <a:pPr marL="0" indent="0">
-              <a:buNone/>
-            </a:pPr>
-            <a:r>
-              <a:rPr lang="zh-CN" altLang="en-US" dirty="0"/>
-              <a:t>你给孩子爱，只要一过度，那么他就会朝着反方向发展。</a:t>
-            </a:r>
-          </a:p>
-          <a:p>
-            <a:pPr marL="0" indent="0">
-              <a:buNone/>
-            </a:pPr>
-            <a:r>
-              <a:rPr lang="zh-CN" altLang="en-US" dirty="0"/>
-              <a:t>古代就有恩生于害，害生于恩的老话。</a:t>
-            </a:r>
-          </a:p>
-          <a:p>
-            <a:pPr marL="0" indent="0">
-              <a:buNone/>
-            </a:pPr>
-            <a:r>
-              <a:rPr lang="zh-CN" altLang="en-US" dirty="0"/>
-              <a:t>所以我们家长一定要懂这里的道理，一定要看清网络上说的，给孩子爱，孩子的爱不够，要完全接纳孩子，这类的谎言。</a:t>
-            </a:r>
-          </a:p>
-          <a:p>
-            <a:pPr marL="0" indent="0">
-              <a:buNone/>
-            </a:pPr>
-            <a:endParaRPr lang="zh-CN" altLang="en-US" dirty="0"/>
-          </a:p>
-          <a:p>
-            <a:pPr marL="0" indent="0">
-              <a:buNone/>
-            </a:pPr>
-            <a:endParaRPr lang="zh-CN" altLang="en-US" dirty="0"/>
-          </a:p>
-          <a:p>
-            <a:pPr marL="0" indent="0">
-              <a:buNone/>
-            </a:pPr>
-            <a:endParaRPr lang="zh-CN" altLang="en-US" dirty="0"/>
-          </a:p>
-          <a:p>
-            <a:pPr marL="0" indent="0">
-              <a:buNone/>
-            </a:pPr>
-            <a:endParaRPr lang="zh-CN" altLang="en-US" dirty="0"/>
-          </a:p>
-        </p:txBody>
-      </p:sp>
-    </p:spTree>
-    <p:extLst>
-      <p:ext uri="{BB962C8B-B14F-4D97-AF65-F5344CB8AC3E}">
-        <p14:creationId xmlns:p14="http://schemas.microsoft.com/office/powerpoint/2010/main" val="3170134583"/>
-      </p:ext>
-    </p:extLst>
-  </p:cSld>
-  <p:clrMapOvr>
-    <a:masterClrMapping/>
-  </p:clrMapOvr>
-</p:sld>
-</file>
-
-<file path=ppt/slides/slide31.xml><?xml version="1.0" encoding="utf-8"?>
-<p:sld xmlns:a="http://schemas.openxmlformats.org/drawingml/2006/main" xmlns:r="http://schemas.openxmlformats.org/officeDocument/2006/relationships" xmlns:p="http://schemas.openxmlformats.org/presentationml/2006/main">
-  <p:cSld>
-    <p:spTree>
-      <p:nvGrpSpPr>
-        <p:cNvPr id="1" name="">
-          <a:extLst>
-            <a:ext uri="{FF2B5EF4-FFF2-40B4-BE49-F238E27FC236}">
-              <a16:creationId xmlns:a16="http://schemas.microsoft.com/office/drawing/2014/main" id="{39139177-37D5-90A6-EC1A-946CA9061A81}"/>
-            </a:ext>
-          </a:extLst>
-        </p:cNvPr>
-        <p:cNvGrpSpPr/>
-        <p:nvPr/>
-      </p:nvGrpSpPr>
-      <p:grpSpPr>
-        <a:xfrm>
-          <a:off x="0" y="0"/>
-          <a:ext cx="0" cy="0"/>
-          <a:chOff x="0" y="0"/>
-          <a:chExt cx="0" cy="0"/>
-        </a:xfrm>
-      </p:grpSpPr>
-      <p:sp>
-        <p:nvSpPr>
-          <p:cNvPr id="2" name="标题 1">
-            <a:extLst>
-              <a:ext uri="{FF2B5EF4-FFF2-40B4-BE49-F238E27FC236}">
-                <a16:creationId xmlns:a16="http://schemas.microsoft.com/office/drawing/2014/main" id="{5066C51C-D4D7-FD3D-2639-0D33BF9BBAEA}"/>
-              </a:ext>
-            </a:extLst>
-          </p:cNvPr>
-          <p:cNvSpPr>
-            <a:spLocks noGrp="1"/>
-          </p:cNvSpPr>
-          <p:nvPr>
-            <p:ph type="title"/>
-          </p:nvPr>
-        </p:nvSpPr>
-        <p:spPr/>
-        <p:txBody>
-          <a:bodyPr/>
-          <a:lstStyle/>
-          <a:p>
-            <a:r>
-              <a:rPr lang="zh-CN" altLang="en-US" sz="4400" dirty="0"/>
-              <a:t>爱和原生家庭之谬误（五）</a:t>
-            </a:r>
-          </a:p>
-        </p:txBody>
-      </p:sp>
-      <p:sp>
-        <p:nvSpPr>
-          <p:cNvPr id="3" name="内容占位符 2">
-            <a:extLst>
-              <a:ext uri="{FF2B5EF4-FFF2-40B4-BE49-F238E27FC236}">
-                <a16:creationId xmlns:a16="http://schemas.microsoft.com/office/drawing/2014/main" id="{03DF3C73-F789-327A-E144-E3556A3714E4}"/>
-              </a:ext>
-            </a:extLst>
-          </p:cNvPr>
-          <p:cNvSpPr>
-            <a:spLocks noGrp="1"/>
-          </p:cNvSpPr>
-          <p:nvPr>
-            <p:ph idx="1"/>
-          </p:nvPr>
-        </p:nvSpPr>
-        <p:spPr>
-          <a:xfrm>
-            <a:off x="521208" y="2000250"/>
-            <a:ext cx="11155680" cy="4345686"/>
-          </a:xfrm>
-        </p:spPr>
-        <p:txBody>
-          <a:bodyPr/>
-          <a:lstStyle/>
-          <a:p>
-            <a:pPr marL="0" indent="0">
-              <a:buNone/>
-            </a:pPr>
-            <a:r>
-              <a:rPr lang="zh-CN" altLang="en-US" dirty="0"/>
-              <a:t>原生家庭的概念，它是一个不严谨不专业的词，在世界任何一本大学教材中都不存在。</a:t>
-            </a:r>
-          </a:p>
-          <a:p>
-            <a:pPr marL="0" indent="0">
-              <a:buNone/>
-            </a:pPr>
-            <a:r>
-              <a:rPr lang="zh-CN" altLang="en-US" dirty="0"/>
-              <a:t>其实网络上流传的原生家庭概念，实际是指父母对待孩子的教养方式。</a:t>
-            </a:r>
-          </a:p>
-          <a:p>
-            <a:pPr marL="0" indent="0">
-              <a:buNone/>
-            </a:pPr>
-            <a:r>
-              <a:rPr lang="zh-CN" altLang="en-US" dirty="0"/>
-              <a:t>当然后来又混合杂糅了家庭经济条件都乱七八糟的东西。</a:t>
-            </a:r>
-          </a:p>
-          <a:p>
-            <a:pPr marL="0" indent="0">
-              <a:buNone/>
-            </a:pPr>
-            <a:r>
-              <a:rPr lang="zh-CN" altLang="en-US" dirty="0"/>
-              <a:t>实际上父母的教养方式，并不是我们必须刻意要关注的东西。</a:t>
-            </a:r>
-          </a:p>
-          <a:p>
-            <a:pPr marL="0" indent="0">
-              <a:buNone/>
-            </a:pPr>
-            <a:r>
-              <a:rPr lang="zh-CN" altLang="en-US" dirty="0"/>
-              <a:t>什么意思呢？</a:t>
-            </a:r>
-          </a:p>
-          <a:p>
-            <a:pPr marL="0" indent="0">
-              <a:buNone/>
-            </a:pPr>
-            <a:r>
-              <a:rPr lang="zh-CN" altLang="en-US" dirty="0"/>
-              <a:t>就是说，父母是采取打骂，还是温柔对待，都不是关键问题。</a:t>
-            </a:r>
-          </a:p>
-          <a:p>
-            <a:pPr marL="0" indent="0">
-              <a:buNone/>
-            </a:pPr>
-            <a:r>
-              <a:rPr lang="zh-CN" altLang="en-US" dirty="0"/>
-              <a:t>这些形式不决定孩子一定会有所改变，或将来会按照你设想的方向发展。</a:t>
-            </a:r>
-          </a:p>
-          <a:p>
-            <a:pPr marL="0" indent="0">
-              <a:buNone/>
-            </a:pPr>
-            <a:r>
-              <a:rPr lang="zh-CN" altLang="en-US" dirty="0"/>
-              <a:t>因为关键决定因素不是这些，而是另一个东西。</a:t>
-            </a:r>
-          </a:p>
-          <a:p>
-            <a:pPr marL="0" indent="0">
-              <a:buNone/>
-            </a:pPr>
-            <a:r>
-              <a:rPr lang="zh-CN" altLang="en-US" dirty="0"/>
-              <a:t>这个东西，叫作社会环境影响。</a:t>
-            </a:r>
-          </a:p>
-        </p:txBody>
-      </p:sp>
-    </p:spTree>
-    <p:extLst>
-      <p:ext uri="{BB962C8B-B14F-4D97-AF65-F5344CB8AC3E}">
-        <p14:creationId xmlns:p14="http://schemas.microsoft.com/office/powerpoint/2010/main" val="2390253722"/>
-      </p:ext>
-    </p:extLst>
-  </p:cSld>
-  <p:clrMapOvr>
-    <a:masterClrMapping/>
-  </p:clrMapOvr>
-</p:sld>
-</file>
-
-<file path=ppt/slides/slide32.xml><?xml version="1.0" encoding="utf-8"?>
-<p:sld xmlns:a="http://schemas.openxmlformats.org/drawingml/2006/main" xmlns:r="http://schemas.openxmlformats.org/officeDocument/2006/relationships" xmlns:p="http://schemas.openxmlformats.org/presentationml/2006/main">
-  <p:cSld>
-    <p:spTree>
-      <p:nvGrpSpPr>
-        <p:cNvPr id="1" name=""/>
-        <p:cNvGrpSpPr/>
-        <p:nvPr/>
-      </p:nvGrpSpPr>
-      <p:grpSpPr>
-        <a:xfrm>
-          <a:off x="0" y="0"/>
-          <a:ext cx="0" cy="0"/>
-          <a:chOff x="0" y="0"/>
-          <a:chExt cx="0" cy="0"/>
-        </a:xfrm>
-      </p:grpSpPr>
-      <p:sp>
-        <p:nvSpPr>
-          <p:cNvPr id="2" name="标题 1">
-            <a:extLst>
-              <a:ext uri="{FF2B5EF4-FFF2-40B4-BE49-F238E27FC236}">
-                <a16:creationId xmlns:a16="http://schemas.microsoft.com/office/drawing/2014/main" id="{4926CEE7-6DEE-802E-9EB8-874101F50EAD}"/>
-              </a:ext>
-            </a:extLst>
-          </p:cNvPr>
-          <p:cNvSpPr>
-            <a:spLocks noGrp="1"/>
-          </p:cNvSpPr>
-          <p:nvPr>
-            <p:ph type="title"/>
-          </p:nvPr>
-        </p:nvSpPr>
-        <p:spPr/>
-        <p:txBody>
-          <a:bodyPr/>
-          <a:lstStyle/>
-          <a:p>
-            <a:r>
-              <a:rPr lang="zh-CN" altLang="en-US" sz="4400" dirty="0"/>
-              <a:t>儿童青少年教育关键（一）</a:t>
-            </a:r>
-          </a:p>
-        </p:txBody>
-      </p:sp>
-      <p:sp>
-        <p:nvSpPr>
-          <p:cNvPr id="3" name="内容占位符 2">
-            <a:extLst>
-              <a:ext uri="{FF2B5EF4-FFF2-40B4-BE49-F238E27FC236}">
-                <a16:creationId xmlns:a16="http://schemas.microsoft.com/office/drawing/2014/main" id="{3BD1E4F8-725F-2E33-C2EA-0F24968586BD}"/>
-              </a:ext>
-            </a:extLst>
-          </p:cNvPr>
-          <p:cNvSpPr>
-            <a:spLocks noGrp="1"/>
-          </p:cNvSpPr>
-          <p:nvPr>
-            <p:ph idx="1"/>
-          </p:nvPr>
-        </p:nvSpPr>
-        <p:spPr>
-          <a:xfrm>
-            <a:off x="521208" y="1771651"/>
-            <a:ext cx="11155680" cy="4574286"/>
-          </a:xfrm>
-        </p:spPr>
-        <p:txBody>
-          <a:bodyPr/>
-          <a:lstStyle/>
-          <a:p>
-            <a:pPr marL="0" indent="0">
-              <a:buNone/>
-            </a:pPr>
-            <a:r>
-              <a:rPr lang="zh-CN" altLang="en-US" dirty="0"/>
-              <a:t>我来给大家讲一些正规、严谨、科学、靠谱的教育和心理学知识。大家在网上是看不到的。网上</a:t>
-            </a:r>
-            <a:r>
-              <a:rPr lang="en-US" altLang="zh-CN" dirty="0"/>
-              <a:t>99%</a:t>
-            </a:r>
-            <a:r>
-              <a:rPr lang="zh-CN" altLang="en-US" dirty="0"/>
-              <a:t>都是假的。</a:t>
-            </a:r>
-            <a:endParaRPr lang="en-US" altLang="zh-CN" dirty="0"/>
-          </a:p>
-          <a:p>
-            <a:pPr marL="0" indent="0">
-              <a:buNone/>
-            </a:pPr>
-            <a:r>
-              <a:rPr lang="zh-CN" altLang="en-US" dirty="0"/>
-              <a:t>上个世纪</a:t>
-            </a:r>
-            <a:r>
-              <a:rPr lang="en-US" altLang="zh-CN" dirty="0"/>
-              <a:t>60</a:t>
-            </a:r>
-            <a:r>
-              <a:rPr lang="zh-CN" altLang="en-US" dirty="0"/>
-              <a:t>年代，由于二战结束，世界各地产生了大量的孤儿。因此研究人员就有机会获得了大量的现成的实验样本。</a:t>
-            </a:r>
-          </a:p>
-          <a:p>
-            <a:pPr marL="0" indent="0">
-              <a:buNone/>
-            </a:pPr>
-            <a:r>
-              <a:rPr lang="zh-CN" altLang="en-US" dirty="0"/>
-              <a:t>这些由战争产生的遗孤，有很多都是双胞胎，其中有不少同卵双胞胎。研究人员就研究观察这此孩子，看看这些孩子的成长到底是由什么因素影响。</a:t>
-            </a:r>
-          </a:p>
-          <a:p>
-            <a:pPr marL="0" indent="0">
-              <a:buNone/>
-            </a:pPr>
-            <a:r>
-              <a:rPr lang="zh-CN" altLang="en-US" dirty="0"/>
-              <a:t>这些孩子数量巨大，有上百万之众，样本数量足够说明问题。这些孩子被分别寄养到不同的家庭中。数十年过去了，最终研究人员得出了惊人的结论。</a:t>
-            </a:r>
-          </a:p>
-          <a:p>
-            <a:pPr marL="0" indent="0">
-              <a:buNone/>
-            </a:pPr>
-            <a:r>
-              <a:rPr lang="zh-CN" altLang="en-US" dirty="0"/>
-              <a:t>一个人，受到哪些因素影响呢？</a:t>
-            </a:r>
-            <a:endParaRPr lang="en-US" altLang="zh-CN" dirty="0"/>
-          </a:p>
-          <a:p>
-            <a:pPr marL="0" indent="0">
-              <a:buNone/>
-            </a:pPr>
-            <a:r>
-              <a:rPr lang="zh-CN" altLang="en-US" dirty="0"/>
-              <a:t>一个是遗传基因，占</a:t>
-            </a:r>
-            <a:r>
-              <a:rPr lang="en-US" altLang="zh-CN" dirty="0"/>
-              <a:t>60%</a:t>
-            </a:r>
-            <a:r>
-              <a:rPr lang="zh-CN" altLang="en-US" dirty="0"/>
-              <a:t>，年纪大了后甚至占</a:t>
-            </a:r>
-            <a:r>
-              <a:rPr lang="en-US" altLang="zh-CN" dirty="0"/>
-              <a:t>80%</a:t>
-            </a:r>
-            <a:r>
-              <a:rPr lang="zh-CN" altLang="en-US" dirty="0"/>
-              <a:t>以上。二个是环境影响，占</a:t>
-            </a:r>
-            <a:r>
-              <a:rPr lang="en-US" altLang="zh-CN" dirty="0"/>
-              <a:t>35%</a:t>
-            </a:r>
-            <a:r>
-              <a:rPr lang="zh-CN" altLang="en-US" dirty="0"/>
-              <a:t>。剩下不到</a:t>
-            </a:r>
-            <a:r>
-              <a:rPr lang="en-US" altLang="zh-CN" dirty="0"/>
-              <a:t>5%</a:t>
-            </a:r>
-            <a:r>
-              <a:rPr lang="zh-CN" altLang="en-US" dirty="0"/>
-              <a:t>，是其他影响。</a:t>
-            </a:r>
-          </a:p>
-          <a:p>
-            <a:pPr marL="0" indent="0">
-              <a:buNone/>
-            </a:pPr>
-            <a:endParaRPr lang="zh-CN" altLang="en-US" dirty="0"/>
-          </a:p>
-          <a:p>
-            <a:pPr marL="0" indent="0">
-              <a:buNone/>
-            </a:pPr>
-            <a:endParaRPr lang="zh-CN" altLang="en-US" dirty="0"/>
-          </a:p>
-        </p:txBody>
-      </p:sp>
-    </p:spTree>
-    <p:extLst>
-      <p:ext uri="{BB962C8B-B14F-4D97-AF65-F5344CB8AC3E}">
-        <p14:creationId xmlns:p14="http://schemas.microsoft.com/office/powerpoint/2010/main" val="436198922"/>
-      </p:ext>
-    </p:extLst>
-  </p:cSld>
-  <p:clrMapOvr>
-    <a:masterClrMapping/>
-  </p:clrMapOvr>
-</p:sld>
-</file>
-
-<file path=ppt/slides/slide33.xml><?xml version="1.0" encoding="utf-8"?>
-<p:sld xmlns:a="http://schemas.openxmlformats.org/drawingml/2006/main" xmlns:r="http://schemas.openxmlformats.org/officeDocument/2006/relationships" xmlns:p="http://schemas.openxmlformats.org/presentationml/2006/main">
-  <p:cSld>
-    <p:spTree>
-      <p:nvGrpSpPr>
-        <p:cNvPr id="1" name="">
-          <a:extLst>
-            <a:ext uri="{FF2B5EF4-FFF2-40B4-BE49-F238E27FC236}">
-              <a16:creationId xmlns:a16="http://schemas.microsoft.com/office/drawing/2014/main" id="{5D4C9217-8C65-5EEE-CDB0-34BF9987679C}"/>
-            </a:ext>
-          </a:extLst>
-        </p:cNvPr>
-        <p:cNvGrpSpPr/>
-        <p:nvPr/>
-      </p:nvGrpSpPr>
-      <p:grpSpPr>
-        <a:xfrm>
-          <a:off x="0" y="0"/>
-          <a:ext cx="0" cy="0"/>
-          <a:chOff x="0" y="0"/>
-          <a:chExt cx="0" cy="0"/>
-        </a:xfrm>
-      </p:grpSpPr>
-      <p:sp>
-        <p:nvSpPr>
-          <p:cNvPr id="2" name="标题 1">
-            <a:extLst>
-              <a:ext uri="{FF2B5EF4-FFF2-40B4-BE49-F238E27FC236}">
-                <a16:creationId xmlns:a16="http://schemas.microsoft.com/office/drawing/2014/main" id="{4CEF6739-EB1B-2D28-BF5C-AF11FC5820E1}"/>
-              </a:ext>
-            </a:extLst>
-          </p:cNvPr>
-          <p:cNvSpPr>
-            <a:spLocks noGrp="1"/>
-          </p:cNvSpPr>
-          <p:nvPr>
-            <p:ph type="title"/>
-          </p:nvPr>
-        </p:nvSpPr>
-        <p:spPr/>
-        <p:txBody>
-          <a:bodyPr/>
-          <a:lstStyle/>
-          <a:p>
-            <a:r>
-              <a:rPr lang="zh-CN" altLang="en-US" sz="4400" dirty="0"/>
-              <a:t>儿童青少年教育关键（二）</a:t>
-            </a:r>
-          </a:p>
-        </p:txBody>
-      </p:sp>
-      <p:sp>
-        <p:nvSpPr>
-          <p:cNvPr id="3" name="内容占位符 2">
-            <a:extLst>
-              <a:ext uri="{FF2B5EF4-FFF2-40B4-BE49-F238E27FC236}">
-                <a16:creationId xmlns:a16="http://schemas.microsoft.com/office/drawing/2014/main" id="{B72E7B50-E775-E8D6-4912-2E2A1725189A}"/>
-              </a:ext>
-            </a:extLst>
-          </p:cNvPr>
-          <p:cNvSpPr>
-            <a:spLocks noGrp="1"/>
-          </p:cNvSpPr>
-          <p:nvPr>
-            <p:ph idx="1"/>
-          </p:nvPr>
-        </p:nvSpPr>
-        <p:spPr>
-          <a:xfrm>
-            <a:off x="521208" y="1971675"/>
-            <a:ext cx="11155680" cy="4374261"/>
-          </a:xfrm>
-        </p:spPr>
-        <p:txBody>
-          <a:bodyPr/>
-          <a:lstStyle/>
-          <a:p>
-            <a:pPr marL="0" indent="0">
-              <a:buNone/>
-            </a:pPr>
-            <a:r>
-              <a:rPr lang="zh-CN" altLang="en-US" dirty="0"/>
-              <a:t>即便是同卵双胞胎，在分别放到不同的家庭中，最后也会表现出非常相似非常接近的习惯和行为。</a:t>
-            </a:r>
-          </a:p>
-          <a:p>
-            <a:pPr marL="0" indent="0">
-              <a:buNone/>
-            </a:pPr>
-            <a:r>
-              <a:rPr lang="zh-CN" altLang="en-US" dirty="0"/>
-              <a:t>大家可以去网上查资料，这是真实的科学实验，全世界都有报道过。大家也可以去看一本书</a:t>
-            </a:r>
-            <a:r>
-              <a:rPr lang="en-US" altLang="zh-CN" dirty="0"/>
-              <a:t>《</a:t>
-            </a:r>
-            <a:r>
-              <a:rPr lang="zh-CN" altLang="en-US" dirty="0"/>
-              <a:t>基因蓝图</a:t>
-            </a:r>
-            <a:r>
-              <a:rPr lang="en-US" altLang="zh-CN" dirty="0"/>
-              <a:t>》</a:t>
-            </a:r>
-            <a:r>
-              <a:rPr lang="zh-CN" altLang="en-US" dirty="0"/>
-              <a:t>，里面写得非常清楚。</a:t>
-            </a:r>
-          </a:p>
-          <a:p>
-            <a:pPr marL="0" indent="0">
-              <a:buNone/>
-            </a:pPr>
-            <a:r>
-              <a:rPr lang="zh-CN" altLang="en-US" dirty="0"/>
-              <a:t>这里面已经澄清家庭教养方式对孩子来说并不存在决定性。</a:t>
-            </a:r>
-          </a:p>
-          <a:p>
-            <a:pPr marL="0" indent="0">
-              <a:buNone/>
-            </a:pPr>
-            <a:r>
-              <a:rPr lang="zh-CN" altLang="en-US" dirty="0"/>
-              <a:t>前面说的，除了基因影响之外，环境影响主要是指家庭外的社会环境影响。</a:t>
-            </a:r>
-          </a:p>
-          <a:p>
-            <a:pPr marL="0" indent="0">
-              <a:buNone/>
-            </a:pPr>
-            <a:endParaRPr lang="zh-CN" altLang="en-US" dirty="0"/>
-          </a:p>
-          <a:p>
-            <a:pPr marL="0" indent="0">
-              <a:buNone/>
-            </a:pPr>
-            <a:r>
-              <a:rPr lang="zh-CN" altLang="en-US" dirty="0"/>
-              <a:t>（即便是家庭条件的好坏，也不是必然，庞众望）</a:t>
-            </a:r>
-          </a:p>
-          <a:p>
-            <a:pPr marL="0" indent="0">
-              <a:buNone/>
-            </a:pPr>
-            <a:endParaRPr lang="zh-CN" altLang="en-US" dirty="0"/>
-          </a:p>
-        </p:txBody>
-      </p:sp>
-    </p:spTree>
-    <p:extLst>
-      <p:ext uri="{BB962C8B-B14F-4D97-AF65-F5344CB8AC3E}">
-        <p14:creationId xmlns:p14="http://schemas.microsoft.com/office/powerpoint/2010/main" val="2157453960"/>
-      </p:ext>
-    </p:extLst>
-  </p:cSld>
-  <p:clrMapOvr>
-    <a:masterClrMapping/>
-  </p:clrMapOvr>
-</p:sld>
-</file>
-
-<file path=ppt/slides/slide34.xml><?xml version="1.0" encoding="utf-8"?>
-<p:sld xmlns:a="http://schemas.openxmlformats.org/drawingml/2006/main" xmlns:r="http://schemas.openxmlformats.org/officeDocument/2006/relationships" xmlns:p="http://schemas.openxmlformats.org/presentationml/2006/main">
-  <p:cSld>
-    <p:spTree>
-      <p:nvGrpSpPr>
-        <p:cNvPr id="1" name="">
-          <a:extLst>
-            <a:ext uri="{FF2B5EF4-FFF2-40B4-BE49-F238E27FC236}">
-              <a16:creationId xmlns:a16="http://schemas.microsoft.com/office/drawing/2014/main" id="{7F961147-9D0F-8A46-5EA7-0D4B9309F2D5}"/>
-            </a:ext>
-          </a:extLst>
-        </p:cNvPr>
-        <p:cNvGrpSpPr/>
-        <p:nvPr/>
-      </p:nvGrpSpPr>
-      <p:grpSpPr>
-        <a:xfrm>
-          <a:off x="0" y="0"/>
-          <a:ext cx="0" cy="0"/>
-          <a:chOff x="0" y="0"/>
-          <a:chExt cx="0" cy="0"/>
-        </a:xfrm>
-      </p:grpSpPr>
-      <p:sp>
-        <p:nvSpPr>
-          <p:cNvPr id="2" name="标题 1">
-            <a:extLst>
-              <a:ext uri="{FF2B5EF4-FFF2-40B4-BE49-F238E27FC236}">
-                <a16:creationId xmlns:a16="http://schemas.microsoft.com/office/drawing/2014/main" id="{8E7AD1D1-61AA-88B9-9D16-D66A1A43CAAE}"/>
-              </a:ext>
-            </a:extLst>
-          </p:cNvPr>
-          <p:cNvSpPr>
-            <a:spLocks noGrp="1"/>
-          </p:cNvSpPr>
-          <p:nvPr>
-            <p:ph type="title"/>
-          </p:nvPr>
-        </p:nvSpPr>
-        <p:spPr/>
-        <p:txBody>
-          <a:bodyPr/>
-          <a:lstStyle/>
-          <a:p>
-            <a:r>
-              <a:rPr lang="zh-CN" altLang="en-US" sz="4400" dirty="0"/>
-              <a:t>儿童青少年教育关键（三）</a:t>
-            </a:r>
-          </a:p>
-        </p:txBody>
-      </p:sp>
-      <p:sp>
-        <p:nvSpPr>
-          <p:cNvPr id="3" name="内容占位符 2">
-            <a:extLst>
-              <a:ext uri="{FF2B5EF4-FFF2-40B4-BE49-F238E27FC236}">
-                <a16:creationId xmlns:a16="http://schemas.microsoft.com/office/drawing/2014/main" id="{8D9A4D9A-A5A3-6676-3199-06DB2DCD4826}"/>
-              </a:ext>
-            </a:extLst>
-          </p:cNvPr>
-          <p:cNvSpPr>
-            <a:spLocks noGrp="1"/>
-          </p:cNvSpPr>
-          <p:nvPr>
-            <p:ph idx="1"/>
-          </p:nvPr>
-        </p:nvSpPr>
-        <p:spPr>
-          <a:xfrm>
-            <a:off x="521208" y="1843087"/>
-            <a:ext cx="11155680" cy="4886325"/>
-          </a:xfrm>
-        </p:spPr>
-        <p:txBody>
-          <a:bodyPr/>
-          <a:lstStyle/>
-          <a:p>
-            <a:pPr marL="0" indent="0">
-              <a:buNone/>
-            </a:pPr>
-            <a:r>
-              <a:rPr lang="zh-CN" altLang="en-US" dirty="0"/>
-              <a:t>**家庭的历史变迁**</a:t>
-            </a:r>
-            <a:endParaRPr lang="en-US" altLang="zh-CN" dirty="0"/>
-          </a:p>
-          <a:p>
-            <a:pPr marL="0" indent="0">
-              <a:buNone/>
-            </a:pPr>
-            <a:endParaRPr lang="zh-CN" altLang="en-US" dirty="0"/>
-          </a:p>
-          <a:p>
-            <a:pPr marL="0" indent="0">
-              <a:buNone/>
-            </a:pPr>
-            <a:r>
-              <a:rPr lang="zh-CN" altLang="en-US" dirty="0"/>
-              <a:t>在农耕时代，我们是生活在一个什么环境中的呢？</a:t>
-            </a:r>
-          </a:p>
-          <a:p>
-            <a:pPr marL="0" indent="0">
-              <a:buNone/>
-            </a:pPr>
-            <a:r>
-              <a:rPr lang="zh-CN" altLang="en-US" dirty="0"/>
-              <a:t>七大姑八大姨，汉语中有非常多的亲戚的称呼，就说明我们生活在一个大的家族体系中。</a:t>
-            </a:r>
-          </a:p>
-          <a:p>
-            <a:pPr marL="0" indent="0">
-              <a:buNone/>
-            </a:pPr>
-            <a:r>
-              <a:rPr lang="zh-CN" altLang="en-US" dirty="0"/>
-              <a:t>即便你家的亲戚不多，大家也生活在一个村里，八竿子打不着的远房亲戚多少也有几个。</a:t>
-            </a:r>
-          </a:p>
-          <a:p>
-            <a:pPr marL="0" indent="0">
-              <a:buNone/>
-            </a:pPr>
-            <a:r>
-              <a:rPr lang="zh-CN" altLang="en-US" dirty="0"/>
-              <a:t>这种家族式的群居生活，是源自农业耕作需要，因为人多力量大嘛！</a:t>
-            </a:r>
-          </a:p>
-          <a:p>
-            <a:pPr marL="0" indent="0">
-              <a:buNone/>
-            </a:pPr>
-            <a:r>
-              <a:rPr lang="zh-CN" altLang="en-US" dirty="0"/>
-              <a:t>大家都团结在一起，除此之外，还有祖坟、祠堂、家谱等等。</a:t>
-            </a:r>
-            <a:endParaRPr lang="en-US" altLang="zh-CN" dirty="0"/>
-          </a:p>
-          <a:p>
-            <a:pPr marL="0" indent="0">
-              <a:buNone/>
-            </a:pPr>
-            <a:r>
-              <a:rPr lang="zh-CN" altLang="en-US" dirty="0"/>
-              <a:t>范仲淹创立的家族田地制度以“范氏义庄”。</a:t>
-            </a:r>
-          </a:p>
-          <a:p>
-            <a:pPr marL="0" indent="0">
-              <a:buNone/>
-            </a:pPr>
-            <a:r>
-              <a:rPr lang="zh-CN" altLang="en-US" dirty="0"/>
-              <a:t>以前的孩子们，就是在这样的环境中成长起来的。</a:t>
-            </a:r>
-          </a:p>
-          <a:p>
-            <a:pPr marL="0" indent="0">
-              <a:buNone/>
-            </a:pPr>
-            <a:endParaRPr lang="zh-CN" altLang="en-US" dirty="0"/>
-          </a:p>
-          <a:p>
-            <a:pPr marL="0" indent="0">
-              <a:buNone/>
-            </a:pPr>
-            <a:endParaRPr lang="zh-CN" altLang="en-US" dirty="0"/>
-          </a:p>
-        </p:txBody>
-      </p:sp>
-    </p:spTree>
-    <p:extLst>
-      <p:ext uri="{BB962C8B-B14F-4D97-AF65-F5344CB8AC3E}">
-        <p14:creationId xmlns:p14="http://schemas.microsoft.com/office/powerpoint/2010/main" val="2357775213"/>
-      </p:ext>
-    </p:extLst>
-  </p:cSld>
-  <p:clrMapOvr>
-    <a:masterClrMapping/>
-  </p:clrMapOvr>
-</p:sld>
-</file>
-
-<file path=ppt/slides/slide35.xml><?xml version="1.0" encoding="utf-8"?>
-<p:sld xmlns:a="http://schemas.openxmlformats.org/drawingml/2006/main" xmlns:r="http://schemas.openxmlformats.org/officeDocument/2006/relationships" xmlns:p="http://schemas.openxmlformats.org/presentationml/2006/main">
-  <p:cSld>
-    <p:spTree>
-      <p:nvGrpSpPr>
-        <p:cNvPr id="1" name="">
-          <a:extLst>
-            <a:ext uri="{FF2B5EF4-FFF2-40B4-BE49-F238E27FC236}">
-              <a16:creationId xmlns:a16="http://schemas.microsoft.com/office/drawing/2014/main" id="{CD70C410-38A1-B7E4-9198-8B09CE81B00A}"/>
-            </a:ext>
-          </a:extLst>
-        </p:cNvPr>
-        <p:cNvGrpSpPr/>
-        <p:nvPr/>
-      </p:nvGrpSpPr>
-      <p:grpSpPr>
-        <a:xfrm>
-          <a:off x="0" y="0"/>
-          <a:ext cx="0" cy="0"/>
-          <a:chOff x="0" y="0"/>
-          <a:chExt cx="0" cy="0"/>
-        </a:xfrm>
-      </p:grpSpPr>
-      <p:sp>
-        <p:nvSpPr>
-          <p:cNvPr id="2" name="标题 1">
-            <a:extLst>
-              <a:ext uri="{FF2B5EF4-FFF2-40B4-BE49-F238E27FC236}">
-                <a16:creationId xmlns:a16="http://schemas.microsoft.com/office/drawing/2014/main" id="{E94D2359-2C55-8EEF-49AD-C9715B861A86}"/>
-              </a:ext>
-            </a:extLst>
-          </p:cNvPr>
-          <p:cNvSpPr>
-            <a:spLocks noGrp="1"/>
-          </p:cNvSpPr>
-          <p:nvPr>
-            <p:ph type="title"/>
-          </p:nvPr>
-        </p:nvSpPr>
-        <p:spPr/>
-        <p:txBody>
-          <a:bodyPr/>
-          <a:lstStyle/>
-          <a:p>
-            <a:r>
-              <a:rPr lang="zh-CN" altLang="en-US" sz="4400" dirty="0"/>
-              <a:t>儿童青少年教育关键（四）</a:t>
-            </a:r>
-          </a:p>
-        </p:txBody>
-      </p:sp>
-      <p:sp>
-        <p:nvSpPr>
-          <p:cNvPr id="3" name="内容占位符 2">
-            <a:extLst>
-              <a:ext uri="{FF2B5EF4-FFF2-40B4-BE49-F238E27FC236}">
-                <a16:creationId xmlns:a16="http://schemas.microsoft.com/office/drawing/2014/main" id="{6F99F286-7A05-FEBB-BF1F-3C56AB3856E9}"/>
-              </a:ext>
-            </a:extLst>
-          </p:cNvPr>
-          <p:cNvSpPr>
-            <a:spLocks noGrp="1"/>
-          </p:cNvSpPr>
-          <p:nvPr>
-            <p:ph idx="1"/>
-          </p:nvPr>
-        </p:nvSpPr>
-        <p:spPr>
-          <a:xfrm>
-            <a:off x="521208" y="1843087"/>
-            <a:ext cx="11155680" cy="4886325"/>
-          </a:xfrm>
-        </p:spPr>
-        <p:txBody>
-          <a:bodyPr/>
-          <a:lstStyle/>
-          <a:p>
-            <a:pPr marL="0" indent="0">
-              <a:buNone/>
-            </a:pPr>
-            <a:r>
-              <a:rPr lang="zh-CN" altLang="en-US" dirty="0"/>
-              <a:t>好，接下来到了上个世纪</a:t>
-            </a:r>
-            <a:r>
-              <a:rPr lang="en-US" altLang="zh-CN" dirty="0"/>
-              <a:t>80</a:t>
-            </a:r>
-            <a:r>
-              <a:rPr lang="zh-CN" altLang="en-US" dirty="0"/>
-              <a:t>年代之前。</a:t>
-            </a:r>
-          </a:p>
-          <a:p>
-            <a:pPr marL="0" indent="0">
-              <a:buNone/>
-            </a:pPr>
-            <a:r>
-              <a:rPr lang="zh-CN" altLang="en-US" dirty="0"/>
-              <a:t>当时的生活环境是怎么样的呢？</a:t>
-            </a:r>
-          </a:p>
-          <a:p>
-            <a:pPr marL="0" indent="0">
-              <a:buNone/>
-            </a:pPr>
-            <a:r>
-              <a:rPr lang="zh-CN" altLang="en-US" dirty="0"/>
-              <a:t>首先想到的是，家属院，厂办学校，厂办医院，厂办食堂。</a:t>
-            </a:r>
-          </a:p>
-          <a:p>
-            <a:pPr marL="0" indent="0">
-              <a:buNone/>
-            </a:pPr>
-            <a:r>
-              <a:rPr lang="zh-CN" altLang="en-US" dirty="0"/>
-              <a:t>大家都生活在一个集体中。什么都是公家的，自己也是公家的人。</a:t>
-            </a:r>
-          </a:p>
-          <a:p>
-            <a:pPr marL="0" indent="0">
-              <a:buNone/>
-            </a:pPr>
-            <a:r>
-              <a:rPr lang="zh-CN" altLang="en-US" dirty="0"/>
-              <a:t>所以说那一辈子爱占小便宜，其实并不是品行不好，而是他们习惯了生活在公家这种环境中。</a:t>
-            </a:r>
-          </a:p>
-          <a:p>
-            <a:pPr marL="0" indent="0">
-              <a:buNone/>
-            </a:pPr>
-            <a:r>
-              <a:rPr lang="zh-CN" altLang="en-US" dirty="0"/>
-              <a:t>谁会说，拿自已家里的东西还不好意思的呢？</a:t>
-            </a:r>
-          </a:p>
-          <a:p>
-            <a:pPr marL="0" indent="0">
-              <a:buNone/>
-            </a:pPr>
-            <a:r>
-              <a:rPr lang="zh-CN" altLang="en-US" dirty="0"/>
-              <a:t>这是那时候养成的习惯，因为就没有个人私人的概念。</a:t>
-            </a:r>
-          </a:p>
-          <a:p>
-            <a:pPr marL="0" indent="0">
-              <a:buNone/>
-            </a:pPr>
-            <a:r>
-              <a:rPr lang="zh-CN" altLang="en-US" dirty="0"/>
-              <a:t>当时的孩子们，就生活在这样的环境中，长辈们可能都是同事或领导，小伙伴们可能都是周围差不多都是一个单位组织的孩子。</a:t>
-            </a:r>
-          </a:p>
-          <a:p>
-            <a:pPr marL="0" indent="0">
-              <a:buNone/>
-            </a:pPr>
-            <a:endParaRPr lang="zh-CN" altLang="en-US" dirty="0"/>
-          </a:p>
-          <a:p>
-            <a:pPr marL="0" indent="0">
-              <a:buNone/>
-            </a:pPr>
-            <a:endParaRPr lang="zh-CN" altLang="en-US" dirty="0"/>
-          </a:p>
-        </p:txBody>
-      </p:sp>
-    </p:spTree>
-    <p:extLst>
-      <p:ext uri="{BB962C8B-B14F-4D97-AF65-F5344CB8AC3E}">
-        <p14:creationId xmlns:p14="http://schemas.microsoft.com/office/powerpoint/2010/main" val="4041955554"/>
-      </p:ext>
-    </p:extLst>
-  </p:cSld>
-  <p:clrMapOvr>
-    <a:masterClrMapping/>
-  </p:clrMapOvr>
-</p:sld>
-</file>
-
-<file path=ppt/slides/slide36.xml><?xml version="1.0" encoding="utf-8"?>
-<p:sld xmlns:a="http://schemas.openxmlformats.org/drawingml/2006/main" xmlns:r="http://schemas.openxmlformats.org/officeDocument/2006/relationships" xmlns:p="http://schemas.openxmlformats.org/presentationml/2006/main">
-  <p:cSld>
-    <p:spTree>
-      <p:nvGrpSpPr>
-        <p:cNvPr id="1" name="">
-          <a:extLst>
-            <a:ext uri="{FF2B5EF4-FFF2-40B4-BE49-F238E27FC236}">
-              <a16:creationId xmlns:a16="http://schemas.microsoft.com/office/drawing/2014/main" id="{1F5DC398-1315-DF2D-35EE-E5511A187F91}"/>
-            </a:ext>
-          </a:extLst>
-        </p:cNvPr>
-        <p:cNvGrpSpPr/>
-        <p:nvPr/>
-      </p:nvGrpSpPr>
-      <p:grpSpPr>
-        <a:xfrm>
-          <a:off x="0" y="0"/>
-          <a:ext cx="0" cy="0"/>
-          <a:chOff x="0" y="0"/>
-          <a:chExt cx="0" cy="0"/>
-        </a:xfrm>
-      </p:grpSpPr>
-      <p:sp>
-        <p:nvSpPr>
-          <p:cNvPr id="2" name="标题 1">
-            <a:extLst>
-              <a:ext uri="{FF2B5EF4-FFF2-40B4-BE49-F238E27FC236}">
-                <a16:creationId xmlns:a16="http://schemas.microsoft.com/office/drawing/2014/main" id="{4D8CBE0A-855C-EC55-9A69-37DDAC0C2AD5}"/>
-              </a:ext>
-            </a:extLst>
-          </p:cNvPr>
-          <p:cNvSpPr>
-            <a:spLocks noGrp="1"/>
-          </p:cNvSpPr>
-          <p:nvPr>
-            <p:ph type="title"/>
-          </p:nvPr>
-        </p:nvSpPr>
-        <p:spPr/>
-        <p:txBody>
-          <a:bodyPr/>
-          <a:lstStyle/>
-          <a:p>
-            <a:r>
-              <a:rPr lang="zh-CN" altLang="en-US" sz="4400" dirty="0"/>
-              <a:t>儿童青少年教育关键（五）</a:t>
-            </a:r>
-          </a:p>
-        </p:txBody>
-      </p:sp>
-      <p:sp>
-        <p:nvSpPr>
-          <p:cNvPr id="3" name="内容占位符 2">
-            <a:extLst>
-              <a:ext uri="{FF2B5EF4-FFF2-40B4-BE49-F238E27FC236}">
-                <a16:creationId xmlns:a16="http://schemas.microsoft.com/office/drawing/2014/main" id="{027E65FB-183F-1676-8591-2EEC11A7BED8}"/>
-              </a:ext>
-            </a:extLst>
-          </p:cNvPr>
-          <p:cNvSpPr>
-            <a:spLocks noGrp="1"/>
-          </p:cNvSpPr>
-          <p:nvPr>
-            <p:ph idx="1"/>
-          </p:nvPr>
-        </p:nvSpPr>
-        <p:spPr>
-          <a:xfrm>
-            <a:off x="521208" y="1843087"/>
-            <a:ext cx="11155680" cy="4886325"/>
-          </a:xfrm>
-        </p:spPr>
-        <p:txBody>
-          <a:bodyPr/>
-          <a:lstStyle/>
-          <a:p>
-            <a:pPr marL="0" indent="0">
-              <a:buNone/>
-            </a:pPr>
-            <a:r>
-              <a:rPr lang="zh-CN" altLang="en-US" dirty="0"/>
-              <a:t>好，现在到了</a:t>
-            </a:r>
-            <a:r>
-              <a:rPr lang="en-US" altLang="zh-CN" dirty="0"/>
-              <a:t>80</a:t>
-            </a:r>
-            <a:r>
-              <a:rPr lang="zh-CN" altLang="en-US" dirty="0"/>
-              <a:t>、</a:t>
-            </a:r>
-            <a:r>
-              <a:rPr lang="en-US" altLang="zh-CN" dirty="0"/>
-              <a:t>90</a:t>
-            </a:r>
-            <a:r>
-              <a:rPr lang="zh-CN" altLang="en-US" dirty="0"/>
-              <a:t>年代。</a:t>
-            </a:r>
-            <a:endParaRPr lang="en-US" altLang="zh-CN" dirty="0"/>
-          </a:p>
-          <a:p>
-            <a:pPr marL="0" indent="0">
-              <a:buNone/>
-            </a:pPr>
-            <a:endParaRPr lang="en-US" altLang="zh-CN" dirty="0"/>
-          </a:p>
-          <a:p>
-            <a:pPr marL="0" indent="0">
-              <a:buNone/>
-            </a:pPr>
-            <a:r>
-              <a:rPr lang="en-US" altLang="zh-CN" dirty="0"/>
-              <a:t>72</a:t>
-            </a:r>
-            <a:r>
-              <a:rPr lang="zh-CN" altLang="en-US" dirty="0"/>
-              <a:t>年尼克松访华，</a:t>
-            </a:r>
-            <a:r>
-              <a:rPr lang="en-US" altLang="zh-CN" dirty="0"/>
-              <a:t>79</a:t>
-            </a:r>
-            <a:r>
-              <a:rPr lang="zh-CN" altLang="en-US" dirty="0"/>
-              <a:t>年中美正式建交。中美蜜月期，关系好得跟穿一条裤子似的。</a:t>
-            </a:r>
-          </a:p>
-          <a:p>
-            <a:pPr marL="0" indent="0">
-              <a:buNone/>
-            </a:pPr>
-            <a:r>
-              <a:rPr lang="zh-CN" altLang="en-US" dirty="0"/>
-              <a:t>好到什么程度呢？</a:t>
-            </a:r>
-            <a:endParaRPr lang="en-US" altLang="zh-CN" dirty="0"/>
-          </a:p>
-          <a:p>
-            <a:pPr marL="0" indent="0">
-              <a:buNone/>
-            </a:pPr>
-            <a:r>
-              <a:rPr lang="zh-CN" altLang="en-US" dirty="0"/>
-              <a:t>据说美国把当时最好的武器都开放售卖给了中国。当然，它是为了联合中国去对付苏联。当时的越南一看情况有变，你个浓眉大眼的中国也叛变西方帝国主义了，就开始挑事。邓公当时说，小朋友不听话，就要打屁股，于是就和美国打了招呼，说我要开始教训小朋友了。于是越战爆发，时间点就是</a:t>
-            </a:r>
-            <a:r>
-              <a:rPr lang="en-US" altLang="zh-CN" dirty="0"/>
-              <a:t>80</a:t>
-            </a:r>
-            <a:r>
-              <a:rPr lang="zh-CN" altLang="en-US" dirty="0"/>
-              <a:t>年代。当然这些都是政治话题，我们不多说。</a:t>
-            </a:r>
-            <a:endParaRPr lang="en-US" altLang="zh-CN" dirty="0"/>
-          </a:p>
-          <a:p>
-            <a:pPr marL="0" indent="0">
-              <a:buNone/>
-            </a:pPr>
-            <a:endParaRPr lang="zh-CN" altLang="en-US" dirty="0"/>
-          </a:p>
-          <a:p>
-            <a:pPr marL="0" indent="0">
-              <a:buNone/>
-            </a:pPr>
-            <a:endParaRPr lang="zh-CN" altLang="en-US" dirty="0"/>
-          </a:p>
-        </p:txBody>
-      </p:sp>
-    </p:spTree>
-    <p:extLst>
-      <p:ext uri="{BB962C8B-B14F-4D97-AF65-F5344CB8AC3E}">
-        <p14:creationId xmlns:p14="http://schemas.microsoft.com/office/powerpoint/2010/main" val="1969550488"/>
-      </p:ext>
-    </p:extLst>
-  </p:cSld>
-  <p:clrMapOvr>
-    <a:masterClrMapping/>
-  </p:clrMapOvr>
-</p:sld>
-</file>
-
-<file path=ppt/slides/slide37.xml><?xml version="1.0" encoding="utf-8"?>
-<p:sld xmlns:a="http://schemas.openxmlformats.org/drawingml/2006/main" xmlns:r="http://schemas.openxmlformats.org/officeDocument/2006/relationships" xmlns:p="http://schemas.openxmlformats.org/presentationml/2006/main">
-  <p:cSld>
-    <p:spTree>
-      <p:nvGrpSpPr>
-        <p:cNvPr id="1" name="">
-          <a:extLst>
-            <a:ext uri="{FF2B5EF4-FFF2-40B4-BE49-F238E27FC236}">
-              <a16:creationId xmlns:a16="http://schemas.microsoft.com/office/drawing/2014/main" id="{4A8F644A-34BB-DEE4-DE22-0176104705BE}"/>
-            </a:ext>
-          </a:extLst>
-        </p:cNvPr>
-        <p:cNvGrpSpPr/>
-        <p:nvPr/>
-      </p:nvGrpSpPr>
-      <p:grpSpPr>
-        <a:xfrm>
-          <a:off x="0" y="0"/>
-          <a:ext cx="0" cy="0"/>
-          <a:chOff x="0" y="0"/>
-          <a:chExt cx="0" cy="0"/>
-        </a:xfrm>
-      </p:grpSpPr>
-      <p:sp>
-        <p:nvSpPr>
-          <p:cNvPr id="2" name="标题 1">
-            <a:extLst>
-              <a:ext uri="{FF2B5EF4-FFF2-40B4-BE49-F238E27FC236}">
-                <a16:creationId xmlns:a16="http://schemas.microsoft.com/office/drawing/2014/main" id="{8972653F-979B-1CF5-187E-30A7E17A0A56}"/>
-              </a:ext>
-            </a:extLst>
-          </p:cNvPr>
-          <p:cNvSpPr>
-            <a:spLocks noGrp="1"/>
-          </p:cNvSpPr>
-          <p:nvPr>
-            <p:ph type="title"/>
-          </p:nvPr>
-        </p:nvSpPr>
-        <p:spPr/>
-        <p:txBody>
-          <a:bodyPr/>
-          <a:lstStyle/>
-          <a:p>
-            <a:r>
-              <a:rPr lang="zh-CN" altLang="en-US" sz="4400" dirty="0"/>
-              <a:t>儿童青少年教育关键（六）</a:t>
-            </a:r>
-          </a:p>
-        </p:txBody>
-      </p:sp>
-      <p:sp>
-        <p:nvSpPr>
-          <p:cNvPr id="3" name="内容占位符 2">
-            <a:extLst>
-              <a:ext uri="{FF2B5EF4-FFF2-40B4-BE49-F238E27FC236}">
-                <a16:creationId xmlns:a16="http://schemas.microsoft.com/office/drawing/2014/main" id="{D0F296AF-BF38-7C2E-537D-5E0A003CEC27}"/>
-              </a:ext>
-            </a:extLst>
-          </p:cNvPr>
-          <p:cNvSpPr>
-            <a:spLocks noGrp="1"/>
-          </p:cNvSpPr>
-          <p:nvPr>
-            <p:ph idx="1"/>
-          </p:nvPr>
-        </p:nvSpPr>
-        <p:spPr>
-          <a:xfrm>
-            <a:off x="521208" y="1843087"/>
-            <a:ext cx="11155680" cy="4886325"/>
-          </a:xfrm>
-        </p:spPr>
-        <p:txBody>
-          <a:bodyPr/>
-          <a:lstStyle/>
-          <a:p>
-            <a:pPr marL="0" indent="0">
-              <a:buNone/>
-            </a:pPr>
-            <a:r>
-              <a:rPr lang="zh-CN" altLang="en-US" dirty="0"/>
-              <a:t>我们只说，中美关系当时是非常好的，美国也用最大的力量帮助中国发展经济。</a:t>
-            </a:r>
-          </a:p>
-          <a:p>
-            <a:pPr marL="0" indent="0">
-              <a:buNone/>
-            </a:pPr>
-            <a:r>
-              <a:rPr lang="zh-CN" altLang="en-US" dirty="0"/>
-              <a:t>于是中国的经济开始飞速发展了，但同时西方的部分思潮也跟着进来了。当时就面临着国有企业转型的问题，大量的国有资产转成了私营。</a:t>
-            </a:r>
-            <a:r>
-              <a:rPr lang="en-US" altLang="zh-CN" dirty="0"/>
-              <a:t>94</a:t>
-            </a:r>
-            <a:r>
-              <a:rPr lang="zh-CN" altLang="en-US" dirty="0"/>
-              <a:t>年国家出台的分税制改革，让地方政府出现了财政上的困难。</a:t>
-            </a:r>
-          </a:p>
-          <a:p>
-            <a:pPr marL="0" indent="0">
-              <a:buNone/>
-            </a:pPr>
-            <a:r>
-              <a:rPr lang="zh-CN" altLang="en-US" dirty="0"/>
-              <a:t>各种状况频频出现，导致了全国性的大下岗。</a:t>
-            </a:r>
-            <a:endParaRPr lang="en-US" altLang="zh-CN" dirty="0"/>
-          </a:p>
-          <a:p>
-            <a:pPr marL="0" indent="0">
-              <a:buNone/>
-            </a:pPr>
-            <a:r>
-              <a:rPr lang="zh-CN" altLang="en-US" dirty="0"/>
-              <a:t>到了</a:t>
-            </a:r>
-            <a:r>
-              <a:rPr lang="en-US" altLang="zh-CN" dirty="0"/>
-              <a:t>90</a:t>
-            </a:r>
-            <a:r>
-              <a:rPr lang="zh-CN" altLang="en-US" dirty="0"/>
-              <a:t>年代末期，已经有很多工人失业。</a:t>
-            </a:r>
-          </a:p>
-          <a:p>
-            <a:pPr marL="0" indent="0">
-              <a:buNone/>
-            </a:pPr>
-            <a:r>
-              <a:rPr lang="zh-CN" altLang="en-US" dirty="0"/>
-              <a:t>失业到什么程度呢？</a:t>
-            </a:r>
-            <a:endParaRPr lang="en-US" altLang="zh-CN" dirty="0"/>
-          </a:p>
-          <a:p>
-            <a:pPr marL="0" indent="0">
-              <a:buNone/>
-            </a:pPr>
-            <a:r>
-              <a:rPr lang="zh-CN" altLang="en-US" dirty="0"/>
-              <a:t>据说广东和四川多了很多洗脚城。</a:t>
-            </a:r>
-          </a:p>
-          <a:p>
-            <a:pPr marL="0" indent="0">
-              <a:buNone/>
-            </a:pPr>
-            <a:endParaRPr lang="zh-CN" altLang="en-US" dirty="0"/>
-          </a:p>
-          <a:p>
-            <a:pPr marL="0" indent="0">
-              <a:buNone/>
-            </a:pPr>
-            <a:endParaRPr lang="zh-CN" altLang="en-US" dirty="0"/>
-          </a:p>
-          <a:p>
-            <a:pPr marL="0" indent="0">
-              <a:buNone/>
-            </a:pPr>
-            <a:endParaRPr lang="zh-CN" altLang="en-US" dirty="0"/>
-          </a:p>
-          <a:p>
-            <a:pPr marL="0" indent="0">
-              <a:buNone/>
-            </a:pPr>
-            <a:endParaRPr lang="zh-CN" altLang="en-US" dirty="0"/>
-          </a:p>
-        </p:txBody>
-      </p:sp>
-    </p:spTree>
-    <p:extLst>
-      <p:ext uri="{BB962C8B-B14F-4D97-AF65-F5344CB8AC3E}">
-        <p14:creationId xmlns:p14="http://schemas.microsoft.com/office/powerpoint/2010/main" val="1284855151"/>
-      </p:ext>
-    </p:extLst>
-  </p:cSld>
-  <p:clrMapOvr>
-    <a:masterClrMapping/>
-  </p:clrMapOvr>
-</p:sld>
-</file>
-
-<file path=ppt/slides/slide38.xml><?xml version="1.0" encoding="utf-8"?>
-<p:sld xmlns:a="http://schemas.openxmlformats.org/drawingml/2006/main" xmlns:r="http://schemas.openxmlformats.org/officeDocument/2006/relationships" xmlns:p="http://schemas.openxmlformats.org/presentationml/2006/main">
-  <p:cSld>
-    <p:spTree>
-      <p:nvGrpSpPr>
-        <p:cNvPr id="1" name="">
-          <a:extLst>
-            <a:ext uri="{FF2B5EF4-FFF2-40B4-BE49-F238E27FC236}">
-              <a16:creationId xmlns:a16="http://schemas.microsoft.com/office/drawing/2014/main" id="{5B94F347-B00B-C510-9BE4-D004D8E7D640}"/>
-            </a:ext>
-          </a:extLst>
-        </p:cNvPr>
-        <p:cNvGrpSpPr/>
-        <p:nvPr/>
-      </p:nvGrpSpPr>
-      <p:grpSpPr>
-        <a:xfrm>
-          <a:off x="0" y="0"/>
-          <a:ext cx="0" cy="0"/>
-          <a:chOff x="0" y="0"/>
-          <a:chExt cx="0" cy="0"/>
-        </a:xfrm>
-      </p:grpSpPr>
-      <p:sp>
-        <p:nvSpPr>
-          <p:cNvPr id="2" name="标题 1">
-            <a:extLst>
-              <a:ext uri="{FF2B5EF4-FFF2-40B4-BE49-F238E27FC236}">
-                <a16:creationId xmlns:a16="http://schemas.microsoft.com/office/drawing/2014/main" id="{3A7ED3D3-73DA-451B-4BDF-C06E73869EF5}"/>
-              </a:ext>
-            </a:extLst>
-          </p:cNvPr>
-          <p:cNvSpPr>
-            <a:spLocks noGrp="1"/>
-          </p:cNvSpPr>
-          <p:nvPr>
-            <p:ph type="title"/>
-          </p:nvPr>
-        </p:nvSpPr>
-        <p:spPr/>
-        <p:txBody>
-          <a:bodyPr/>
-          <a:lstStyle/>
-          <a:p>
-            <a:r>
-              <a:rPr lang="zh-CN" altLang="en-US" sz="4400" dirty="0"/>
-              <a:t>儿童青少年教育关键（七）</a:t>
-            </a:r>
-          </a:p>
-        </p:txBody>
-      </p:sp>
-      <p:sp>
-        <p:nvSpPr>
-          <p:cNvPr id="3" name="内容占位符 2">
-            <a:extLst>
-              <a:ext uri="{FF2B5EF4-FFF2-40B4-BE49-F238E27FC236}">
-                <a16:creationId xmlns:a16="http://schemas.microsoft.com/office/drawing/2014/main" id="{37001C4B-A8DF-D358-0FD4-1D12CA986F8F}"/>
-              </a:ext>
-            </a:extLst>
-          </p:cNvPr>
-          <p:cNvSpPr>
-            <a:spLocks noGrp="1"/>
-          </p:cNvSpPr>
-          <p:nvPr>
-            <p:ph idx="1"/>
-          </p:nvPr>
-        </p:nvSpPr>
-        <p:spPr>
-          <a:xfrm>
-            <a:off x="521208" y="1843087"/>
-            <a:ext cx="11155680" cy="4886325"/>
-          </a:xfrm>
-        </p:spPr>
-        <p:txBody>
-          <a:bodyPr/>
-          <a:lstStyle/>
-          <a:p>
-            <a:pPr marL="0" indent="0">
-              <a:buNone/>
-            </a:pPr>
-            <a:r>
-              <a:rPr lang="zh-CN" altLang="en-US" dirty="0"/>
-              <a:t>当时，在</a:t>
-            </a:r>
-            <a:r>
-              <a:rPr lang="en-US" altLang="zh-CN" dirty="0"/>
-              <a:t>90</a:t>
-            </a:r>
-            <a:r>
-              <a:rPr lang="zh-CN" altLang="en-US" dirty="0"/>
-              <a:t>年代初，大概</a:t>
-            </a:r>
-            <a:r>
-              <a:rPr lang="en-US" altLang="zh-CN" dirty="0"/>
-              <a:t>91</a:t>
-            </a:r>
-            <a:r>
-              <a:rPr lang="zh-CN" altLang="en-US" dirty="0"/>
-              <a:t>年还是</a:t>
-            </a:r>
-            <a:r>
-              <a:rPr lang="en-US" altLang="zh-CN" dirty="0"/>
-              <a:t>92</a:t>
-            </a:r>
-            <a:r>
-              <a:rPr lang="zh-CN" altLang="en-US" dirty="0"/>
-              <a:t>年，曾仕强曾预言中国将来会成为世界第二大经济体，科技水平会超过西方，压根就没人信。</a:t>
-            </a:r>
-            <a:endParaRPr lang="en-US" altLang="zh-CN" dirty="0"/>
-          </a:p>
-          <a:p>
-            <a:pPr marL="0" indent="0">
-              <a:buNone/>
-            </a:pPr>
-            <a:r>
-              <a:rPr lang="zh-CN" altLang="en-US" dirty="0"/>
-              <a:t>直到</a:t>
-            </a:r>
-            <a:r>
-              <a:rPr lang="en-US" altLang="zh-CN" dirty="0"/>
-              <a:t>2000</a:t>
-            </a:r>
-            <a:r>
-              <a:rPr lang="zh-CN" altLang="en-US" dirty="0"/>
-              <a:t>年初，发生了根本性的改变。</a:t>
-            </a:r>
-            <a:endParaRPr lang="en-US" altLang="zh-CN" dirty="0"/>
-          </a:p>
-          <a:p>
-            <a:pPr marL="0" indent="0">
-              <a:buNone/>
-            </a:pPr>
-            <a:r>
-              <a:rPr lang="zh-CN" altLang="en-US" dirty="0"/>
-              <a:t>当时中国加入了</a:t>
-            </a:r>
-            <a:r>
-              <a:rPr lang="en-US" altLang="zh-CN" dirty="0"/>
-              <a:t>WTO</a:t>
-            </a:r>
-            <a:r>
-              <a:rPr lang="zh-CN" altLang="en-US" dirty="0"/>
-              <a:t>，并且还有一个重要因素，就是网络的兴起。</a:t>
-            </a:r>
-            <a:endParaRPr lang="en-US" altLang="zh-CN" dirty="0"/>
-          </a:p>
-          <a:p>
-            <a:pPr marL="0" indent="0">
-              <a:buNone/>
-            </a:pPr>
-            <a:endParaRPr lang="zh-CN" altLang="en-US" dirty="0"/>
-          </a:p>
-          <a:p>
-            <a:pPr marL="0" indent="0">
-              <a:buNone/>
-            </a:pPr>
-            <a:r>
-              <a:rPr lang="zh-CN" altLang="en-US" dirty="0"/>
-              <a:t>大量的农民工进城。进城干什么呢？</a:t>
-            </a:r>
-            <a:endParaRPr lang="en-US" altLang="zh-CN" dirty="0"/>
-          </a:p>
-          <a:p>
-            <a:pPr marL="0" indent="0">
-              <a:buNone/>
-            </a:pPr>
-            <a:r>
-              <a:rPr lang="zh-CN" altLang="en-US" dirty="0"/>
-              <a:t>当然是打工赚钱了！</a:t>
-            </a:r>
-            <a:endParaRPr lang="en-US" altLang="zh-CN" dirty="0"/>
-          </a:p>
-          <a:p>
-            <a:pPr marL="0" indent="0">
-              <a:buNone/>
-            </a:pPr>
-            <a:r>
-              <a:rPr lang="zh-CN" altLang="en-US" dirty="0"/>
-              <a:t>随着房地产开发以及经济的恢复，城市建设起来了，大家的日子也慢慢好起来了。</a:t>
-            </a:r>
-          </a:p>
-          <a:p>
-            <a:pPr marL="0" indent="0">
-              <a:buNone/>
-            </a:pPr>
-            <a:endParaRPr lang="zh-CN" altLang="en-US" dirty="0"/>
-          </a:p>
-          <a:p>
-            <a:pPr marL="0" indent="0">
-              <a:buNone/>
-            </a:pPr>
-            <a:endParaRPr lang="zh-CN" altLang="en-US" dirty="0"/>
-          </a:p>
-          <a:p>
-            <a:pPr marL="0" indent="0">
-              <a:buNone/>
-            </a:pPr>
-            <a:endParaRPr lang="zh-CN" altLang="en-US" dirty="0"/>
-          </a:p>
-          <a:p>
-            <a:pPr marL="0" indent="0">
-              <a:buNone/>
-            </a:pPr>
-            <a:endParaRPr lang="zh-CN" altLang="en-US" dirty="0"/>
-          </a:p>
-        </p:txBody>
-      </p:sp>
-    </p:spTree>
-    <p:extLst>
-      <p:ext uri="{BB962C8B-B14F-4D97-AF65-F5344CB8AC3E}">
-        <p14:creationId xmlns:p14="http://schemas.microsoft.com/office/powerpoint/2010/main" val="3207431065"/>
-      </p:ext>
-    </p:extLst>
-  </p:cSld>
-  <p:clrMapOvr>
-    <a:masterClrMapping/>
-  </p:clrMapOvr>
-</p:sld>
-</file>
-
-<file path=ppt/slides/slide39.xml><?xml version="1.0" encoding="utf-8"?>
-<p:sld xmlns:a="http://schemas.openxmlformats.org/drawingml/2006/main" xmlns:r="http://schemas.openxmlformats.org/officeDocument/2006/relationships" xmlns:p="http://schemas.openxmlformats.org/presentationml/2006/main">
-  <p:cSld>
-    <p:spTree>
-      <p:nvGrpSpPr>
-        <p:cNvPr id="1" name="">
-          <a:extLst>
-            <a:ext uri="{FF2B5EF4-FFF2-40B4-BE49-F238E27FC236}">
-              <a16:creationId xmlns:a16="http://schemas.microsoft.com/office/drawing/2014/main" id="{CA15BC09-F0DD-360B-8A19-9353D5E2214C}"/>
-            </a:ext>
-          </a:extLst>
-        </p:cNvPr>
-        <p:cNvGrpSpPr/>
-        <p:nvPr/>
-      </p:nvGrpSpPr>
-      <p:grpSpPr>
-        <a:xfrm>
-          <a:off x="0" y="0"/>
-          <a:ext cx="0" cy="0"/>
-          <a:chOff x="0" y="0"/>
-          <a:chExt cx="0" cy="0"/>
-        </a:xfrm>
-      </p:grpSpPr>
-      <p:sp>
-        <p:nvSpPr>
-          <p:cNvPr id="2" name="标题 1">
-            <a:extLst>
-              <a:ext uri="{FF2B5EF4-FFF2-40B4-BE49-F238E27FC236}">
-                <a16:creationId xmlns:a16="http://schemas.microsoft.com/office/drawing/2014/main" id="{AEC53166-9D97-5873-B961-106C8E320857}"/>
-              </a:ext>
-            </a:extLst>
-          </p:cNvPr>
-          <p:cNvSpPr>
-            <a:spLocks noGrp="1"/>
-          </p:cNvSpPr>
-          <p:nvPr>
-            <p:ph type="title"/>
-          </p:nvPr>
-        </p:nvSpPr>
-        <p:spPr/>
-        <p:txBody>
-          <a:bodyPr/>
-          <a:lstStyle/>
-          <a:p>
-            <a:r>
-              <a:rPr lang="zh-CN" altLang="en-US" sz="4400" dirty="0"/>
-              <a:t>儿童青少年教育关键（八）</a:t>
-            </a:r>
-          </a:p>
-        </p:txBody>
-      </p:sp>
-      <p:sp>
-        <p:nvSpPr>
-          <p:cNvPr id="3" name="内容占位符 2">
-            <a:extLst>
-              <a:ext uri="{FF2B5EF4-FFF2-40B4-BE49-F238E27FC236}">
-                <a16:creationId xmlns:a16="http://schemas.microsoft.com/office/drawing/2014/main" id="{E3D1B5FE-225D-2F08-596A-5A16C009B26C}"/>
-              </a:ext>
-            </a:extLst>
-          </p:cNvPr>
-          <p:cNvSpPr>
-            <a:spLocks noGrp="1"/>
-          </p:cNvSpPr>
-          <p:nvPr>
-            <p:ph idx="1"/>
-          </p:nvPr>
-        </p:nvSpPr>
-        <p:spPr>
-          <a:xfrm>
-            <a:off x="521208" y="1843087"/>
-            <a:ext cx="11155680" cy="4886325"/>
-          </a:xfrm>
-        </p:spPr>
-        <p:txBody>
-          <a:bodyPr/>
-          <a:lstStyle/>
-          <a:p>
-            <a:pPr marL="0" indent="0">
-              <a:buNone/>
-            </a:pPr>
-            <a:r>
-              <a:rPr lang="zh-CN" altLang="en-US" dirty="0"/>
-              <a:t>好，说了这么说，大家发现没有。 </a:t>
-            </a:r>
-          </a:p>
-          <a:p>
-            <a:pPr marL="0" indent="0">
-              <a:buNone/>
-            </a:pPr>
-            <a:r>
-              <a:rPr lang="zh-CN" altLang="en-US" dirty="0"/>
-              <a:t>孩子们生活的环境发生了怎样的变化呢？</a:t>
-            </a:r>
-          </a:p>
-          <a:p>
-            <a:pPr marL="0" indent="0">
-              <a:buNone/>
-            </a:pPr>
-            <a:r>
-              <a:rPr lang="zh-CN" altLang="en-US" dirty="0"/>
-              <a:t>过去不管是家族式群居生活也好，还是公家国营集体生活也好，都已经不复存在了。</a:t>
-            </a:r>
-          </a:p>
-          <a:p>
-            <a:pPr marL="0" indent="0">
-              <a:buNone/>
-            </a:pPr>
-            <a:r>
-              <a:rPr lang="zh-CN" altLang="en-US" dirty="0"/>
-              <a:t>取而代之的是，孩子们住在钢筋混凝土的楼房里，大量的留守儿童。</a:t>
-            </a:r>
-          </a:p>
-          <a:p>
-            <a:pPr marL="0" indent="0">
-              <a:buNone/>
-            </a:pPr>
-            <a:r>
-              <a:rPr lang="zh-CN" altLang="en-US" dirty="0"/>
-              <a:t>以前的居住环境已经变成了各自独立生活。</a:t>
-            </a:r>
-          </a:p>
-          <a:p>
-            <a:pPr marL="0" indent="0">
-              <a:buNone/>
-            </a:pPr>
-            <a:r>
-              <a:rPr lang="zh-CN" altLang="en-US" dirty="0"/>
-              <a:t>我们如果能够正确看待这段发展历史，就会立刻发现，过去传统的家庭环境早已土崩瓦解。</a:t>
-            </a:r>
-          </a:p>
-          <a:p>
-            <a:pPr marL="0" indent="0">
-              <a:buNone/>
-            </a:pPr>
-            <a:endParaRPr lang="zh-CN" altLang="en-US" dirty="0"/>
-          </a:p>
-          <a:p>
-            <a:pPr marL="0" indent="0">
-              <a:buNone/>
-            </a:pPr>
-            <a:endParaRPr lang="zh-CN" altLang="en-US" dirty="0"/>
-          </a:p>
-        </p:txBody>
-      </p:sp>
-    </p:spTree>
-    <p:extLst>
-      <p:ext uri="{BB962C8B-B14F-4D97-AF65-F5344CB8AC3E}">
-        <p14:creationId xmlns:p14="http://schemas.microsoft.com/office/powerpoint/2010/main" val="348610587"/>
       </p:ext>
     </p:extLst>
   </p:cSld>
@@ -11320,7 +10774,7 @@
         <p:cNvPr id="1" name="">
           <a:extLst>
             <a:ext uri="{FF2B5EF4-FFF2-40B4-BE49-F238E27FC236}">
-              <a16:creationId xmlns:a16="http://schemas.microsoft.com/office/drawing/2014/main" id="{E28670EB-AE95-4D76-8053-420ED30D9633}"/>
+              <a16:creationId xmlns:a16="http://schemas.microsoft.com/office/drawing/2014/main" id="{4EB6EEA2-1726-44EB-37CE-24B2F5BF91D3}"/>
             </a:ext>
           </a:extLst>
         </p:cNvPr>
@@ -11340,7 +10794,7 @@
           <p:cNvPr id="2" name="标题 1">
             <a:extLst>
               <a:ext uri="{FF2B5EF4-FFF2-40B4-BE49-F238E27FC236}">
-                <a16:creationId xmlns:a16="http://schemas.microsoft.com/office/drawing/2014/main" id="{96980155-4F53-E2DE-EDF0-83A1B119E85E}"/>
+                <a16:creationId xmlns:a16="http://schemas.microsoft.com/office/drawing/2014/main" id="{72F5A53B-F16F-A4B5-5791-ED3BF6F3E670}"/>
               </a:ext>
             </a:extLst>
           </p:cNvPr>
@@ -11358,7 +10812,7 @@
           <a:p>
             <a:r>
               <a:rPr lang="zh-CN" altLang="en-US" sz="4400" dirty="0"/>
-              <a:t>儿童青少年教育关键（九）</a:t>
+              <a:t>爱和原生家庭之谬误（四）</a:t>
             </a:r>
           </a:p>
         </p:txBody>
@@ -11368,7 +10822,7 @@
           <p:cNvPr id="3" name="内容占位符 2">
             <a:extLst>
               <a:ext uri="{FF2B5EF4-FFF2-40B4-BE49-F238E27FC236}">
-                <a16:creationId xmlns:a16="http://schemas.microsoft.com/office/drawing/2014/main" id="{F114A539-EB63-8B8A-46C7-874A12BBB05E}"/>
+                <a16:creationId xmlns:a16="http://schemas.microsoft.com/office/drawing/2014/main" id="{D82AA319-B42F-1272-F357-507B15C2B933}"/>
               </a:ext>
             </a:extLst>
           </p:cNvPr>
@@ -11379,82 +10833,62 @@
             <p:ph idx="1"/>
           </p:nvPr>
         </p:nvSpPr>
-        <p:spPr>
-          <a:xfrm>
-            <a:off x="521208" y="1843088"/>
-            <a:ext cx="11155680" cy="4502848"/>
-          </a:xfrm>
-        </p:spPr>
-        <p:txBody>
-          <a:bodyPr/>
-          <a:lstStyle/>
-          <a:p>
-            <a:pPr marL="0" indent="0">
-              <a:buNone/>
-            </a:pPr>
-            <a:r>
-              <a:rPr lang="zh-CN" altLang="en-US" dirty="0"/>
-              <a:t>现在一家三口人，爸爸妈妈孩子。</a:t>
-            </a:r>
-          </a:p>
-          <a:p>
-            <a:pPr marL="0" indent="0">
-              <a:buNone/>
-            </a:pPr>
-            <a:r>
-              <a:rPr lang="zh-CN" altLang="en-US" dirty="0"/>
-              <a:t>开一亮，吃完早饭，爸爸到城东上班，妈妈到城西工作，孩子到城南上学。</a:t>
-            </a:r>
-          </a:p>
-          <a:p>
-            <a:pPr marL="0" indent="0">
-              <a:buNone/>
-            </a:pPr>
-            <a:r>
-              <a:rPr lang="zh-CN" altLang="en-US" dirty="0"/>
-              <a:t>晚上很晚才能回到家。</a:t>
-            </a:r>
-          </a:p>
-          <a:p>
-            <a:pPr marL="0" indent="0">
-              <a:buNone/>
-            </a:pPr>
-            <a:r>
-              <a:rPr lang="zh-CN" altLang="en-US" dirty="0"/>
-              <a:t>现在连一家人在一起吃个晚饭都可能是一件奢侈的事情，更别说要加班，还要补课，还要做其他的事情。</a:t>
-            </a:r>
-          </a:p>
-          <a:p>
-            <a:pPr marL="0" indent="0">
-              <a:buNone/>
-            </a:pPr>
-            <a:r>
-              <a:rPr lang="zh-CN" altLang="en-US" dirty="0"/>
-              <a:t>请问，这是一个家吗？</a:t>
-            </a:r>
-          </a:p>
-          <a:p>
-            <a:pPr marL="0" indent="0">
-              <a:buNone/>
-            </a:pPr>
-            <a:endParaRPr lang="zh-CN" altLang="en-US" dirty="0"/>
-          </a:p>
-          <a:p>
-            <a:pPr marL="0" indent="0">
-              <a:buNone/>
-            </a:pPr>
-            <a:r>
-              <a:rPr lang="zh-CN" altLang="en-US" dirty="0"/>
-              <a:t>关于婚恋纠纷问题的心理咨询，是紧紧排在心理咨询的第二位的，第一位的是儿童青少年心理问题。</a:t>
-            </a:r>
-          </a:p>
-          <a:p>
-            <a:pPr marL="0" indent="0">
-              <a:buNone/>
-            </a:pPr>
-            <a:r>
-              <a:rPr lang="zh-CN" altLang="en-US" dirty="0"/>
-              <a:t>所以你说，为什么会这样？</a:t>
+        <p:spPr/>
+        <p:txBody>
+          <a:bodyPr/>
+          <a:lstStyle/>
+          <a:p>
+            <a:pPr marL="0" indent="0">
+              <a:buNone/>
+            </a:pPr>
+            <a:r>
+              <a:rPr lang="zh-CN" altLang="en-US" dirty="0"/>
+              <a:t>你父母给孩子爱，爱得越多，越容易娇生惯养。</a:t>
+            </a:r>
+          </a:p>
+          <a:p>
+            <a:pPr marL="0" indent="0">
+              <a:buNone/>
+            </a:pPr>
+            <a:r>
+              <a:rPr lang="zh-CN" altLang="en-US" dirty="0"/>
+              <a:t>道德经讲，反者道之动，弱者道之用。</a:t>
+            </a:r>
+          </a:p>
+          <a:p>
+            <a:pPr marL="0" indent="0">
+              <a:buNone/>
+            </a:pPr>
+            <a:r>
+              <a:rPr lang="zh-CN" altLang="en-US" dirty="0"/>
+              <a:t>任何事物都是向其反方向发展的。</a:t>
+            </a:r>
+          </a:p>
+          <a:p>
+            <a:pPr marL="0" indent="0">
+              <a:buNone/>
+            </a:pPr>
+            <a:r>
+              <a:rPr lang="zh-CN" altLang="en-US" dirty="0"/>
+              <a:t>你给孩子爱，只要一过度，那么他就会朝着反方向发展。</a:t>
+            </a:r>
+          </a:p>
+          <a:p>
+            <a:pPr marL="0" indent="0">
+              <a:buNone/>
+            </a:pPr>
+            <a:r>
+              <a:rPr lang="zh-CN" altLang="en-US" dirty="0"/>
+              <a:t>古代就有恩生于害，害生于恩的老话。</a:t>
+            </a:r>
+          </a:p>
+          <a:p>
+            <a:pPr marL="0" indent="0">
+              <a:buNone/>
+            </a:pPr>
+            <a:r>
+              <a:rPr lang="zh-CN" altLang="en-US" dirty="0"/>
+              <a:t>所以我们家长一定要懂这里的道理，一定要看清网络上说的，给孩子爱，孩子的爱不够，要完全接纳孩子，这类的谎言。</a:t>
             </a:r>
           </a:p>
           <a:p>
@@ -11486,7 +10920,7 @@
     </p:spTree>
     <p:extLst>
       <p:ext uri="{BB962C8B-B14F-4D97-AF65-F5344CB8AC3E}">
-        <p14:creationId xmlns:p14="http://schemas.microsoft.com/office/powerpoint/2010/main" val="4061811091"/>
+        <p14:creationId xmlns:p14="http://schemas.microsoft.com/office/powerpoint/2010/main" val="3170134583"/>
       </p:ext>
     </p:extLst>
   </p:cSld>
@@ -11504,7 +10938,7 @@
         <p:cNvPr id="1" name="">
           <a:extLst>
             <a:ext uri="{FF2B5EF4-FFF2-40B4-BE49-F238E27FC236}">
-              <a16:creationId xmlns:a16="http://schemas.microsoft.com/office/drawing/2014/main" id="{C9B6A869-2166-1346-B558-3079F7CD1890}"/>
+              <a16:creationId xmlns:a16="http://schemas.microsoft.com/office/drawing/2014/main" id="{39139177-37D5-90A6-EC1A-946CA9061A81}"/>
             </a:ext>
           </a:extLst>
         </p:cNvPr>
@@ -11524,7 +10958,7 @@
           <p:cNvPr id="2" name="标题 1">
             <a:extLst>
               <a:ext uri="{FF2B5EF4-FFF2-40B4-BE49-F238E27FC236}">
-                <a16:creationId xmlns:a16="http://schemas.microsoft.com/office/drawing/2014/main" id="{8C70AF07-937D-7518-BBE6-7A6E9DC4D028}"/>
+                <a16:creationId xmlns:a16="http://schemas.microsoft.com/office/drawing/2014/main" id="{5066C51C-D4D7-FD3D-2639-0D33BF9BBAEA}"/>
               </a:ext>
             </a:extLst>
           </p:cNvPr>
@@ -11542,7 +10976,7 @@
           <a:p>
             <a:r>
               <a:rPr lang="zh-CN" altLang="en-US" sz="4400" dirty="0"/>
-              <a:t>儿童青少年教育关键（十）</a:t>
+              <a:t>爱和原生家庭之谬误（五）</a:t>
             </a:r>
           </a:p>
         </p:txBody>
@@ -11552,7 +10986,7 @@
           <p:cNvPr id="3" name="内容占位符 2">
             <a:extLst>
               <a:ext uri="{FF2B5EF4-FFF2-40B4-BE49-F238E27FC236}">
-                <a16:creationId xmlns:a16="http://schemas.microsoft.com/office/drawing/2014/main" id="{02761907-C60C-51C7-24C2-BCEE78EB50E1}"/>
+                <a16:creationId xmlns:a16="http://schemas.microsoft.com/office/drawing/2014/main" id="{03DF3C73-F789-327A-E144-E3556A3714E4}"/>
               </a:ext>
             </a:extLst>
           </p:cNvPr>
@@ -11565,8 +10999,8 @@
         </p:nvSpPr>
         <p:spPr>
           <a:xfrm>
-            <a:off x="521208" y="1914525"/>
-            <a:ext cx="11155680" cy="4431411"/>
+            <a:off x="521208" y="2000250"/>
+            <a:ext cx="11155680" cy="4345686"/>
           </a:xfrm>
         </p:spPr>
         <p:txBody>
@@ -11578,63 +11012,87 @@
             </a:pPr>
             <a:r>
               <a:rPr lang="zh-CN" altLang="en-US" dirty="0"/>
-              <a:t>随着工业文明的发展，资本主义通过解构传统的人的生活方式，导致了人与人之间是一种分裂式的生活方式。</a:t>
-            </a:r>
-          </a:p>
-          <a:p>
-            <a:pPr marL="0" indent="0">
-              <a:buNone/>
-            </a:pPr>
-            <a:r>
-              <a:rPr lang="zh-CN" altLang="en-US" dirty="0"/>
-              <a:t>我们说的家庭，实质并不是过去的那种家庭。</a:t>
-            </a:r>
-          </a:p>
-          <a:p>
-            <a:pPr marL="0" indent="0">
-              <a:buNone/>
-            </a:pPr>
-            <a:r>
-              <a:rPr lang="zh-CN" altLang="en-US" dirty="0"/>
-              <a:t>过去的家庭，也不是我们理解的由父母和孩子这么简单的组成。</a:t>
-            </a:r>
-          </a:p>
-          <a:p>
-            <a:pPr marL="0" indent="0">
-              <a:buNone/>
-            </a:pPr>
-            <a:r>
-              <a:rPr lang="zh-CN" altLang="en-US" dirty="0"/>
-              <a:t>其本质，实际上反而是一种社会环境，即大家族，由很多人组成的。</a:t>
-            </a:r>
-          </a:p>
-          <a:p>
-            <a:pPr marL="0" indent="0">
-              <a:buNone/>
-            </a:pPr>
-            <a:r>
-              <a:rPr lang="zh-CN" altLang="en-US" dirty="0"/>
-              <a:t>现在的家族充其量也就六个人组成，六个人能给孩子带来什么有效的影响呢？</a:t>
-            </a:r>
-          </a:p>
-          <a:p>
-            <a:pPr marL="0" indent="0">
-              <a:buNone/>
-            </a:pPr>
-            <a:endParaRPr lang="zh-CN" altLang="en-US" dirty="0"/>
-          </a:p>
-          <a:p>
-            <a:pPr marL="0" indent="0">
-              <a:buNone/>
-            </a:pPr>
-            <a:endParaRPr lang="zh-CN" altLang="en-US" dirty="0"/>
+              <a:t>原生家庭的概念，它是一个不严谨不专业的词，在世界任何一本大学教材中都不存在。</a:t>
+            </a:r>
+          </a:p>
+          <a:p>
+            <a:pPr marL="0" indent="0">
+              <a:buNone/>
+            </a:pPr>
+            <a:r>
+              <a:rPr lang="zh-CN" altLang="en-US" dirty="0"/>
+              <a:t>其实网络上流传的原生家庭概念，实际是指父母对待孩子的教养方式。</a:t>
+            </a:r>
+          </a:p>
+          <a:p>
+            <a:pPr marL="0" indent="0">
+              <a:buNone/>
+            </a:pPr>
+            <a:r>
+              <a:rPr lang="zh-CN" altLang="en-US" dirty="0"/>
+              <a:t>当然后来又混合杂糅了家庭经济条件都乱七八糟的东西。</a:t>
+            </a:r>
+          </a:p>
+          <a:p>
+            <a:pPr marL="0" indent="0">
+              <a:buNone/>
+            </a:pPr>
+            <a:r>
+              <a:rPr lang="zh-CN" altLang="en-US" dirty="0"/>
+              <a:t>实际上父母的教养方式，并不是我们必须刻意要关注的东西。</a:t>
+            </a:r>
+          </a:p>
+          <a:p>
+            <a:pPr marL="0" indent="0">
+              <a:buNone/>
+            </a:pPr>
+            <a:r>
+              <a:rPr lang="zh-CN" altLang="en-US" dirty="0"/>
+              <a:t>什么意思呢？</a:t>
+            </a:r>
+          </a:p>
+          <a:p>
+            <a:pPr marL="0" indent="0">
+              <a:buNone/>
+            </a:pPr>
+            <a:r>
+              <a:rPr lang="zh-CN" altLang="en-US" dirty="0"/>
+              <a:t>就是说，父母是采取打骂，还是温柔对待，都不是关键问题。</a:t>
+            </a:r>
+          </a:p>
+          <a:p>
+            <a:pPr marL="0" indent="0">
+              <a:buNone/>
+            </a:pPr>
+            <a:r>
+              <a:rPr lang="zh-CN" altLang="en-US" dirty="0"/>
+              <a:t>这些形式不决定孩子一定会有所改变，或将来会按照你设想的方向发展。</a:t>
+            </a:r>
+          </a:p>
+          <a:p>
+            <a:pPr marL="0" indent="0">
+              <a:buNone/>
+            </a:pPr>
+            <a:r>
+              <a:rPr lang="zh-CN" altLang="en-US" dirty="0"/>
+              <a:t>因为关键决定因素不是这些，而是另一个东西。</a:t>
+            </a:r>
+          </a:p>
+          <a:p>
+            <a:pPr marL="0" indent="0">
+              <a:buNone/>
+            </a:pPr>
+            <a:r>
+              <a:rPr lang="zh-CN" altLang="en-US" dirty="0"/>
+              <a:t>这个东西，叫作社会环境影响。</a:t>
+            </a:r>
           </a:p>
         </p:txBody>
       </p:sp>
     </p:spTree>
     <p:extLst>
       <p:ext uri="{BB962C8B-B14F-4D97-AF65-F5344CB8AC3E}">
-        <p14:creationId xmlns:p14="http://schemas.microsoft.com/office/powerpoint/2010/main" val="3307707904"/>
+        <p14:creationId xmlns:p14="http://schemas.microsoft.com/office/powerpoint/2010/main" val="2390253722"/>
       </p:ext>
     </p:extLst>
   </p:cSld>
@@ -11649,13 +11107,7 @@
   <p:cSld>
     <p:spTree>
       <p:nvGrpSpPr>
-        <p:cNvPr id="1" name="">
-          <a:extLst>
-            <a:ext uri="{FF2B5EF4-FFF2-40B4-BE49-F238E27FC236}">
-              <a16:creationId xmlns:a16="http://schemas.microsoft.com/office/drawing/2014/main" id="{B9041A6C-2FCD-0610-7596-56F7D6A0C160}"/>
-            </a:ext>
-          </a:extLst>
-        </p:cNvPr>
+        <p:cNvPr id="1" name=""/>
         <p:cNvGrpSpPr/>
         <p:nvPr/>
       </p:nvGrpSpPr>
@@ -11672,7 +11124,7 @@
           <p:cNvPr id="2" name="标题 1">
             <a:extLst>
               <a:ext uri="{FF2B5EF4-FFF2-40B4-BE49-F238E27FC236}">
-                <a16:creationId xmlns:a16="http://schemas.microsoft.com/office/drawing/2014/main" id="{5B7983B1-520A-F982-D467-DDD0837834E9}"/>
+                <a16:creationId xmlns:a16="http://schemas.microsoft.com/office/drawing/2014/main" id="{4926CEE7-6DEE-802E-9EB8-874101F50EAD}"/>
               </a:ext>
             </a:extLst>
           </p:cNvPr>
@@ -11690,7 +11142,7 @@
           <a:p>
             <a:r>
               <a:rPr lang="zh-CN" altLang="en-US" sz="4400" dirty="0"/>
-              <a:t>儿童青少年教育关键（十一）</a:t>
+              <a:t>儿童青少年教育关键（一）</a:t>
             </a:r>
           </a:p>
         </p:txBody>
@@ -11700,7 +11152,7 @@
           <p:cNvPr id="3" name="内容占位符 2">
             <a:extLst>
               <a:ext uri="{FF2B5EF4-FFF2-40B4-BE49-F238E27FC236}">
-                <a16:creationId xmlns:a16="http://schemas.microsoft.com/office/drawing/2014/main" id="{60353229-6282-58C3-B58B-6F1D8827B383}"/>
+                <a16:creationId xmlns:a16="http://schemas.microsoft.com/office/drawing/2014/main" id="{3BD1E4F8-725F-2E33-C2EA-0F24968586BD}"/>
               </a:ext>
             </a:extLst>
           </p:cNvPr>
@@ -11713,8 +11165,8 @@
         </p:nvSpPr>
         <p:spPr>
           <a:xfrm>
-            <a:off x="521208" y="1957388"/>
-            <a:ext cx="11155680" cy="4729162"/>
+            <a:off x="521208" y="1771651"/>
+            <a:ext cx="11155680" cy="4574286"/>
           </a:xfrm>
         </p:spPr>
         <p:txBody>
@@ -11726,60 +11178,122 @@
             </a:pPr>
             <a:r>
               <a:rPr lang="zh-CN" altLang="en-US" dirty="0"/>
-              <a:t>有人说了，我感觉家庭对孩子还是有影响的。</a:t>
-            </a:r>
-          </a:p>
-          <a:p>
-            <a:pPr marL="0" indent="0">
-              <a:buNone/>
-            </a:pPr>
-            <a:r>
-              <a:rPr lang="zh-CN" altLang="en-US" dirty="0"/>
-              <a:t>其实你还是没有理解，孟母三迁，你想想是在说家庭父母对孩子的影响吗？</a:t>
-            </a:r>
-          </a:p>
-          <a:p>
-            <a:pPr marL="0" indent="0">
-              <a:buNone/>
-            </a:pPr>
-            <a:r>
-              <a:rPr lang="zh-CN" altLang="en-US" dirty="0"/>
-              <a:t>那分明是在说环境对孩子的影响。</a:t>
-            </a:r>
-          </a:p>
-          <a:p>
-            <a:pPr marL="0" indent="0">
-              <a:buNone/>
-            </a:pPr>
-            <a:r>
-              <a:rPr lang="zh-CN" altLang="en-US" dirty="0"/>
-              <a:t>过去就是家族这种小社会对孩子的影响。</a:t>
-            </a:r>
-          </a:p>
-          <a:p>
-            <a:pPr marL="0" indent="0">
-              <a:buNone/>
-            </a:pPr>
-            <a:r>
-              <a:rPr lang="zh-CN" altLang="en-US" dirty="0"/>
-              <a:t>所以你就应该知道，什么家风、家教，那是过去那种环境下的东西，现在的小家庭，哪里来的什么家风家教？</a:t>
-            </a:r>
-          </a:p>
-          <a:p>
-            <a:pPr marL="0" indent="0">
-              <a:buNone/>
-            </a:pPr>
-            <a:r>
-              <a:rPr lang="zh-CN" altLang="en-US" dirty="0"/>
-              <a:t>几个人对孩子的影响实在是太有限了。</a:t>
-            </a:r>
+              <a:t>我来给大家讲一些正规、严谨、科学、靠谱的教育和心理学知识。大家在网上是看不到的。网上</a:t>
+            </a:r>
+            <a:r>
+              <a:rPr lang="en-US" altLang="zh-CN" dirty="0"/>
+              <a:t>99%</a:t>
+            </a:r>
+            <a:r>
+              <a:rPr lang="zh-CN" altLang="en-US" dirty="0"/>
+              <a:t>都是假的。</a:t>
+            </a:r>
+            <a:endParaRPr lang="en-US" altLang="zh-CN" dirty="0"/>
+          </a:p>
+          <a:p>
+            <a:pPr marL="0" indent="0">
+              <a:buNone/>
+            </a:pPr>
+            <a:r>
+              <a:rPr lang="zh-CN" altLang="en-US" dirty="0"/>
+              <a:t>上个世纪</a:t>
+            </a:r>
+            <a:r>
+              <a:rPr lang="en-US" altLang="zh-CN" dirty="0"/>
+              <a:t>60</a:t>
+            </a:r>
+            <a:r>
+              <a:rPr lang="zh-CN" altLang="en-US" dirty="0"/>
+              <a:t>年代，由于二战结束，世界各地产生了大量的孤儿。因此研究人员就有机会获得了大量的现成的实验样本。</a:t>
+            </a:r>
+          </a:p>
+          <a:p>
+            <a:pPr marL="0" indent="0">
+              <a:buNone/>
+            </a:pPr>
+            <a:r>
+              <a:rPr lang="zh-CN" altLang="en-US" dirty="0"/>
+              <a:t>这些由战争产生的遗孤，有很多都是双胞胎，其中有不少同卵双胞胎。研究人员就研究观察这此孩子，看看这些孩子的成长到底是由什么因素影响。</a:t>
+            </a:r>
+          </a:p>
+          <a:p>
+            <a:pPr marL="0" indent="0">
+              <a:buNone/>
+            </a:pPr>
+            <a:r>
+              <a:rPr lang="zh-CN" altLang="en-US" dirty="0"/>
+              <a:t>这些孩子数量巨大，有上百万之众，样本数量足够说明问题。这些孩子被分别寄养到不同的家庭中。数十年过去了，最终研究人员得出了惊人的结论。</a:t>
+            </a:r>
+          </a:p>
+          <a:p>
+            <a:pPr marL="0" indent="0">
+              <a:buNone/>
+            </a:pPr>
+            <a:r>
+              <a:rPr lang="zh-CN" altLang="en-US" dirty="0"/>
+              <a:t>一个人，受到哪些因素影响呢？</a:t>
+            </a:r>
+            <a:endParaRPr lang="en-US" altLang="zh-CN" dirty="0"/>
+          </a:p>
+          <a:p>
+            <a:pPr marL="0" indent="0">
+              <a:buNone/>
+            </a:pPr>
+            <a:r>
+              <a:rPr lang="zh-CN" altLang="en-US" dirty="0"/>
+              <a:t>一个是遗传基因，占</a:t>
+            </a:r>
+            <a:r>
+              <a:rPr lang="en-US" altLang="zh-CN" dirty="0"/>
+              <a:t>60%</a:t>
+            </a:r>
+            <a:r>
+              <a:rPr lang="zh-CN" altLang="en-US" dirty="0"/>
+              <a:t>，年纪大了后甚至占</a:t>
+            </a:r>
+            <a:r>
+              <a:rPr lang="en-US" altLang="zh-CN" dirty="0"/>
+              <a:t>80%</a:t>
+            </a:r>
+            <a:r>
+              <a:rPr lang="zh-CN" altLang="en-US" dirty="0"/>
+              <a:t>以上。二个是环境影响，占</a:t>
+            </a:r>
+            <a:r>
+              <a:rPr lang="en-US" altLang="zh-CN" dirty="0"/>
+              <a:t>35%</a:t>
+            </a:r>
+            <a:r>
+              <a:rPr lang="zh-CN" altLang="en-US" dirty="0"/>
+              <a:t>。剩下不到</a:t>
+            </a:r>
+            <a:r>
+              <a:rPr lang="en-US" altLang="zh-CN" dirty="0"/>
+              <a:t>5%</a:t>
+            </a:r>
+            <a:r>
+              <a:rPr lang="zh-CN" altLang="en-US" dirty="0"/>
+              <a:t>，是其他影响。</a:t>
+            </a:r>
+          </a:p>
+          <a:p>
+            <a:pPr marL="0" indent="0">
+              <a:buNone/>
+            </a:pPr>
+            <a:endParaRPr lang="zh-CN" altLang="en-US" dirty="0"/>
+          </a:p>
+          <a:p>
+            <a:pPr marL="0" indent="0">
+              <a:buNone/>
+            </a:pPr>
+            <a:endParaRPr lang="zh-CN" altLang="en-US" dirty="0"/>
           </a:p>
         </p:txBody>
       </p:sp>
     </p:spTree>
     <p:extLst>
       <p:ext uri="{BB962C8B-B14F-4D97-AF65-F5344CB8AC3E}">
-        <p14:creationId xmlns:p14="http://schemas.microsoft.com/office/powerpoint/2010/main" val="3513811925"/>
+        <p14:creationId xmlns:p14="http://schemas.microsoft.com/office/powerpoint/2010/main" val="436198922"/>
       </p:ext>
     </p:extLst>
   </p:cSld>
@@ -11797,7 +11311,7 @@
         <p:cNvPr id="1" name="">
           <a:extLst>
             <a:ext uri="{FF2B5EF4-FFF2-40B4-BE49-F238E27FC236}">
-              <a16:creationId xmlns:a16="http://schemas.microsoft.com/office/drawing/2014/main" id="{0BD012E6-3538-49C6-893B-A4C7A96951C9}"/>
+              <a16:creationId xmlns:a16="http://schemas.microsoft.com/office/drawing/2014/main" id="{5D4C9217-8C65-5EEE-CDB0-34BF9987679C}"/>
             </a:ext>
           </a:extLst>
         </p:cNvPr>
@@ -11817,7 +11331,7 @@
           <p:cNvPr id="2" name="标题 1">
             <a:extLst>
               <a:ext uri="{FF2B5EF4-FFF2-40B4-BE49-F238E27FC236}">
-                <a16:creationId xmlns:a16="http://schemas.microsoft.com/office/drawing/2014/main" id="{B773D9A9-ADEE-656C-0BE9-C938F7BA0D25}"/>
+                <a16:creationId xmlns:a16="http://schemas.microsoft.com/office/drawing/2014/main" id="{4CEF6739-EB1B-2D28-BF5C-AF11FC5820E1}"/>
               </a:ext>
             </a:extLst>
           </p:cNvPr>
@@ -11835,13 +11349,8 @@
           <a:p>
             <a:r>
               <a:rPr lang="zh-CN" altLang="en-US" sz="4400" dirty="0"/>
-              <a:t>儿童青少年教育关键</a:t>
-            </a:r>
-            <a:r>
-              <a:rPr lang="zh-CN" altLang="en-US" sz="4400"/>
-              <a:t>（十二）</a:t>
-            </a:r>
-            <a:endParaRPr lang="zh-CN" altLang="en-US" sz="4400" dirty="0"/>
+              <a:t>儿童青少年教育关键（二）</a:t>
+            </a:r>
           </a:p>
         </p:txBody>
       </p:sp>
@@ -11850,7 +11359,7 @@
           <p:cNvPr id="3" name="内容占位符 2">
             <a:extLst>
               <a:ext uri="{FF2B5EF4-FFF2-40B4-BE49-F238E27FC236}">
-                <a16:creationId xmlns:a16="http://schemas.microsoft.com/office/drawing/2014/main" id="{ED026127-1329-BAD7-062A-FD21D26E7168}"/>
+                <a16:creationId xmlns:a16="http://schemas.microsoft.com/office/drawing/2014/main" id="{B72E7B50-E775-E8D6-4912-2E2A1725189A}"/>
               </a:ext>
             </a:extLst>
           </p:cNvPr>
@@ -11863,8 +11372,8 @@
         </p:nvSpPr>
         <p:spPr>
           <a:xfrm>
-            <a:off x="521208" y="1957388"/>
-            <a:ext cx="11155680" cy="4729162"/>
+            <a:off x="521208" y="1971675"/>
+            <a:ext cx="11155680" cy="4374261"/>
           </a:xfrm>
         </p:spPr>
         <p:txBody>
@@ -11876,34 +11385,65 @@
             </a:pPr>
             <a:r>
               <a:rPr lang="zh-CN" altLang="en-US" dirty="0"/>
-              <a:t>我们说，为什么孩子越大越不听话。</a:t>
-            </a:r>
-          </a:p>
-          <a:p>
-            <a:pPr marL="0" indent="0">
-              <a:buNone/>
-            </a:pPr>
-            <a:r>
-              <a:rPr lang="zh-CN" altLang="en-US" dirty="0"/>
-              <a:t>其实就是家庭外部环境对孩子的影响，大过于家庭父母对他的影响。</a:t>
-            </a:r>
-          </a:p>
-          <a:p>
-            <a:pPr marL="0" indent="0">
-              <a:buNone/>
-            </a:pPr>
-            <a:r>
-              <a:rPr lang="zh-CN" altLang="en-US" dirty="0"/>
-              <a:t>一个人，他对社会群体的认同，始终是要大大大过父母对他的影响的，这是铁律。</a:t>
-            </a:r>
-          </a:p>
-          <a:p>
-            <a:pPr marL="0" indent="0">
-              <a:buNone/>
-            </a:pPr>
-            <a:r>
-              <a:rPr lang="zh-CN" altLang="en-US" dirty="0"/>
-              <a:t>如果你还看不懂这一点，还在抱着原生家庭那套假冒伪劣，那么你是看不懂，也搞不好孩子的教育问题的。</a:t>
+              <a:t>即便是同卵双胞胎，在分别放到不同的家庭中，最后也会表现出非常相似非常接近的习惯和行为。</a:t>
+            </a:r>
+          </a:p>
+          <a:p>
+            <a:pPr marL="0" indent="0">
+              <a:buNone/>
+            </a:pPr>
+            <a:r>
+              <a:rPr lang="zh-CN" altLang="en-US" dirty="0"/>
+              <a:t>大家可以去网上查资料，这是真实的科学实验，全世界都有报道过。大家也可以去看一本书</a:t>
+            </a:r>
+            <a:r>
+              <a:rPr lang="en-US" altLang="zh-CN" dirty="0"/>
+              <a:t>《</a:t>
+            </a:r>
+            <a:r>
+              <a:rPr lang="zh-CN" altLang="en-US" dirty="0"/>
+              <a:t>基因蓝图</a:t>
+            </a:r>
+            <a:r>
+              <a:rPr lang="en-US" altLang="zh-CN" dirty="0"/>
+              <a:t>》</a:t>
+            </a:r>
+            <a:r>
+              <a:rPr lang="zh-CN" altLang="en-US" dirty="0"/>
+              <a:t>，里面写得非常清楚。</a:t>
+            </a:r>
+          </a:p>
+          <a:p>
+            <a:pPr marL="0" indent="0">
+              <a:buNone/>
+            </a:pPr>
+            <a:r>
+              <a:rPr lang="zh-CN" altLang="en-US" dirty="0"/>
+              <a:t>这里面已经澄清家庭教养方式对孩子来说并不存在决定性。</a:t>
+            </a:r>
+          </a:p>
+          <a:p>
+            <a:pPr marL="0" indent="0">
+              <a:buNone/>
+            </a:pPr>
+            <a:r>
+              <a:rPr lang="zh-CN" altLang="en-US" dirty="0"/>
+              <a:t>前面说的，除了基因影响之外，环境影响主要是指家庭外的社会环境影响。</a:t>
+            </a:r>
+          </a:p>
+          <a:p>
+            <a:pPr marL="0" indent="0">
+              <a:buNone/>
+            </a:pPr>
+            <a:endParaRPr lang="zh-CN" altLang="en-US" dirty="0"/>
+          </a:p>
+          <a:p>
+            <a:pPr marL="0" indent="0">
+              <a:buNone/>
+            </a:pPr>
+            <a:r>
+              <a:rPr lang="zh-CN" altLang="en-US" dirty="0"/>
+              <a:t>（即便是家庭条件的好坏，也不是必然，庞众望）</a:t>
             </a:r>
           </a:p>
           <a:p>
@@ -11917,7 +11457,1121 @@
     </p:spTree>
     <p:extLst>
       <p:ext uri="{BB962C8B-B14F-4D97-AF65-F5344CB8AC3E}">
-        <p14:creationId xmlns:p14="http://schemas.microsoft.com/office/powerpoint/2010/main" val="2188646574"/>
+        <p14:creationId xmlns:p14="http://schemas.microsoft.com/office/powerpoint/2010/main" val="2157453960"/>
+      </p:ext>
+    </p:extLst>
+  </p:cSld>
+  <p:clrMapOvr>
+    <a:masterClrMapping/>
+  </p:clrMapOvr>
+</p:sld>
+</file>
+
+<file path=ppt/slides/slide44.xml><?xml version="1.0" encoding="utf-8"?>
+<p:sld xmlns:a="http://schemas.openxmlformats.org/drawingml/2006/main" xmlns:r="http://schemas.openxmlformats.org/officeDocument/2006/relationships" xmlns:p="http://schemas.openxmlformats.org/presentationml/2006/main">
+  <p:cSld>
+    <p:spTree>
+      <p:nvGrpSpPr>
+        <p:cNvPr id="1" name="">
+          <a:extLst>
+            <a:ext uri="{FF2B5EF4-FFF2-40B4-BE49-F238E27FC236}">
+              <a16:creationId xmlns:a16="http://schemas.microsoft.com/office/drawing/2014/main" id="{7F961147-9D0F-8A46-5EA7-0D4B9309F2D5}"/>
+            </a:ext>
+          </a:extLst>
+        </p:cNvPr>
+        <p:cNvGrpSpPr/>
+        <p:nvPr/>
+      </p:nvGrpSpPr>
+      <p:grpSpPr>
+        <a:xfrm>
+          <a:off x="0" y="0"/>
+          <a:ext cx="0" cy="0"/>
+          <a:chOff x="0" y="0"/>
+          <a:chExt cx="0" cy="0"/>
+        </a:xfrm>
+      </p:grpSpPr>
+      <p:sp>
+        <p:nvSpPr>
+          <p:cNvPr id="2" name="标题 1">
+            <a:extLst>
+              <a:ext uri="{FF2B5EF4-FFF2-40B4-BE49-F238E27FC236}">
+                <a16:creationId xmlns:a16="http://schemas.microsoft.com/office/drawing/2014/main" id="{8E7AD1D1-61AA-88B9-9D16-D66A1A43CAAE}"/>
+              </a:ext>
+            </a:extLst>
+          </p:cNvPr>
+          <p:cNvSpPr>
+            <a:spLocks noGrp="1"/>
+          </p:cNvSpPr>
+          <p:nvPr>
+            <p:ph type="title"/>
+          </p:nvPr>
+        </p:nvSpPr>
+        <p:spPr/>
+        <p:txBody>
+          <a:bodyPr/>
+          <a:lstStyle/>
+          <a:p>
+            <a:r>
+              <a:rPr lang="zh-CN" altLang="en-US" sz="4400" dirty="0"/>
+              <a:t>儿童青少年教育关键（三）</a:t>
+            </a:r>
+          </a:p>
+        </p:txBody>
+      </p:sp>
+      <p:sp>
+        <p:nvSpPr>
+          <p:cNvPr id="3" name="内容占位符 2">
+            <a:extLst>
+              <a:ext uri="{FF2B5EF4-FFF2-40B4-BE49-F238E27FC236}">
+                <a16:creationId xmlns:a16="http://schemas.microsoft.com/office/drawing/2014/main" id="{8D9A4D9A-A5A3-6676-3199-06DB2DCD4826}"/>
+              </a:ext>
+            </a:extLst>
+          </p:cNvPr>
+          <p:cNvSpPr>
+            <a:spLocks noGrp="1"/>
+          </p:cNvSpPr>
+          <p:nvPr>
+            <p:ph idx="1"/>
+          </p:nvPr>
+        </p:nvSpPr>
+        <p:spPr>
+          <a:xfrm>
+            <a:off x="521208" y="1843087"/>
+            <a:ext cx="11155680" cy="4886325"/>
+          </a:xfrm>
+        </p:spPr>
+        <p:txBody>
+          <a:bodyPr/>
+          <a:lstStyle/>
+          <a:p>
+            <a:pPr marL="0" indent="0">
+              <a:buNone/>
+            </a:pPr>
+            <a:r>
+              <a:rPr lang="zh-CN" altLang="en-US" dirty="0"/>
+              <a:t>**家庭的历史变迁**</a:t>
+            </a:r>
+            <a:endParaRPr lang="en-US" altLang="zh-CN" dirty="0"/>
+          </a:p>
+          <a:p>
+            <a:pPr marL="0" indent="0">
+              <a:buNone/>
+            </a:pPr>
+            <a:endParaRPr lang="zh-CN" altLang="en-US" dirty="0"/>
+          </a:p>
+          <a:p>
+            <a:pPr marL="0" indent="0">
+              <a:buNone/>
+            </a:pPr>
+            <a:r>
+              <a:rPr lang="zh-CN" altLang="en-US" dirty="0"/>
+              <a:t>在农耕时代，我们是生活在一个什么环境中的呢？</a:t>
+            </a:r>
+          </a:p>
+          <a:p>
+            <a:pPr marL="0" indent="0">
+              <a:buNone/>
+            </a:pPr>
+            <a:r>
+              <a:rPr lang="zh-CN" altLang="en-US" dirty="0"/>
+              <a:t>七大姑八大姨，汉语中有非常多的亲戚的称呼，就说明我们生活在一个大的家族体系中。</a:t>
+            </a:r>
+          </a:p>
+          <a:p>
+            <a:pPr marL="0" indent="0">
+              <a:buNone/>
+            </a:pPr>
+            <a:r>
+              <a:rPr lang="zh-CN" altLang="en-US" dirty="0"/>
+              <a:t>即便你家的亲戚不多，大家也生活在一个村里，八竿子打不着的远房亲戚多少也有几个。</a:t>
+            </a:r>
+          </a:p>
+          <a:p>
+            <a:pPr marL="0" indent="0">
+              <a:buNone/>
+            </a:pPr>
+            <a:r>
+              <a:rPr lang="zh-CN" altLang="en-US" dirty="0"/>
+              <a:t>这种家族式的群居生活，是源自农业耕作需要，因为人多力量大嘛！</a:t>
+            </a:r>
+          </a:p>
+          <a:p>
+            <a:pPr marL="0" indent="0">
+              <a:buNone/>
+            </a:pPr>
+            <a:r>
+              <a:rPr lang="zh-CN" altLang="en-US" dirty="0"/>
+              <a:t>大家都团结在一起，除此之外，还有祖坟、祠堂、家谱等等。</a:t>
+            </a:r>
+            <a:endParaRPr lang="en-US" altLang="zh-CN" dirty="0"/>
+          </a:p>
+          <a:p>
+            <a:pPr marL="0" indent="0">
+              <a:buNone/>
+            </a:pPr>
+            <a:r>
+              <a:rPr lang="zh-CN" altLang="en-US" dirty="0"/>
+              <a:t>范仲淹创立的家族田地制度以“范氏义庄”。</a:t>
+            </a:r>
+          </a:p>
+          <a:p>
+            <a:pPr marL="0" indent="0">
+              <a:buNone/>
+            </a:pPr>
+            <a:r>
+              <a:rPr lang="zh-CN" altLang="en-US" dirty="0"/>
+              <a:t>以前的孩子们，就是在这样的环境中成长起来的。</a:t>
+            </a:r>
+          </a:p>
+          <a:p>
+            <a:pPr marL="0" indent="0">
+              <a:buNone/>
+            </a:pPr>
+            <a:endParaRPr lang="zh-CN" altLang="en-US" dirty="0"/>
+          </a:p>
+          <a:p>
+            <a:pPr marL="0" indent="0">
+              <a:buNone/>
+            </a:pPr>
+            <a:endParaRPr lang="zh-CN" altLang="en-US" dirty="0"/>
+          </a:p>
+        </p:txBody>
+      </p:sp>
+    </p:spTree>
+    <p:extLst>
+      <p:ext uri="{BB962C8B-B14F-4D97-AF65-F5344CB8AC3E}">
+        <p14:creationId xmlns:p14="http://schemas.microsoft.com/office/powerpoint/2010/main" val="2357775213"/>
+      </p:ext>
+    </p:extLst>
+  </p:cSld>
+  <p:clrMapOvr>
+    <a:masterClrMapping/>
+  </p:clrMapOvr>
+</p:sld>
+</file>
+
+<file path=ppt/slides/slide45.xml><?xml version="1.0" encoding="utf-8"?>
+<p:sld xmlns:a="http://schemas.openxmlformats.org/drawingml/2006/main" xmlns:r="http://schemas.openxmlformats.org/officeDocument/2006/relationships" xmlns:p="http://schemas.openxmlformats.org/presentationml/2006/main">
+  <p:cSld>
+    <p:spTree>
+      <p:nvGrpSpPr>
+        <p:cNvPr id="1" name="">
+          <a:extLst>
+            <a:ext uri="{FF2B5EF4-FFF2-40B4-BE49-F238E27FC236}">
+              <a16:creationId xmlns:a16="http://schemas.microsoft.com/office/drawing/2014/main" id="{CD70C410-38A1-B7E4-9198-8B09CE81B00A}"/>
+            </a:ext>
+          </a:extLst>
+        </p:cNvPr>
+        <p:cNvGrpSpPr/>
+        <p:nvPr/>
+      </p:nvGrpSpPr>
+      <p:grpSpPr>
+        <a:xfrm>
+          <a:off x="0" y="0"/>
+          <a:ext cx="0" cy="0"/>
+          <a:chOff x="0" y="0"/>
+          <a:chExt cx="0" cy="0"/>
+        </a:xfrm>
+      </p:grpSpPr>
+      <p:sp>
+        <p:nvSpPr>
+          <p:cNvPr id="2" name="标题 1">
+            <a:extLst>
+              <a:ext uri="{FF2B5EF4-FFF2-40B4-BE49-F238E27FC236}">
+                <a16:creationId xmlns:a16="http://schemas.microsoft.com/office/drawing/2014/main" id="{E94D2359-2C55-8EEF-49AD-C9715B861A86}"/>
+              </a:ext>
+            </a:extLst>
+          </p:cNvPr>
+          <p:cNvSpPr>
+            <a:spLocks noGrp="1"/>
+          </p:cNvSpPr>
+          <p:nvPr>
+            <p:ph type="title"/>
+          </p:nvPr>
+        </p:nvSpPr>
+        <p:spPr/>
+        <p:txBody>
+          <a:bodyPr/>
+          <a:lstStyle/>
+          <a:p>
+            <a:r>
+              <a:rPr lang="zh-CN" altLang="en-US" sz="4400" dirty="0"/>
+              <a:t>儿童青少年教育关键（四）</a:t>
+            </a:r>
+          </a:p>
+        </p:txBody>
+      </p:sp>
+      <p:sp>
+        <p:nvSpPr>
+          <p:cNvPr id="3" name="内容占位符 2">
+            <a:extLst>
+              <a:ext uri="{FF2B5EF4-FFF2-40B4-BE49-F238E27FC236}">
+                <a16:creationId xmlns:a16="http://schemas.microsoft.com/office/drawing/2014/main" id="{6F99F286-7A05-FEBB-BF1F-3C56AB3856E9}"/>
+              </a:ext>
+            </a:extLst>
+          </p:cNvPr>
+          <p:cNvSpPr>
+            <a:spLocks noGrp="1"/>
+          </p:cNvSpPr>
+          <p:nvPr>
+            <p:ph idx="1"/>
+          </p:nvPr>
+        </p:nvSpPr>
+        <p:spPr>
+          <a:xfrm>
+            <a:off x="521208" y="1843087"/>
+            <a:ext cx="11155680" cy="4886325"/>
+          </a:xfrm>
+        </p:spPr>
+        <p:txBody>
+          <a:bodyPr/>
+          <a:lstStyle/>
+          <a:p>
+            <a:pPr marL="0" indent="0">
+              <a:buNone/>
+            </a:pPr>
+            <a:r>
+              <a:rPr lang="zh-CN" altLang="en-US" dirty="0"/>
+              <a:t>好，接下来到了上个世纪</a:t>
+            </a:r>
+            <a:r>
+              <a:rPr lang="en-US" altLang="zh-CN" dirty="0"/>
+              <a:t>80</a:t>
+            </a:r>
+            <a:r>
+              <a:rPr lang="zh-CN" altLang="en-US" dirty="0"/>
+              <a:t>年代之前。</a:t>
+            </a:r>
+          </a:p>
+          <a:p>
+            <a:pPr marL="0" indent="0">
+              <a:buNone/>
+            </a:pPr>
+            <a:r>
+              <a:rPr lang="zh-CN" altLang="en-US" dirty="0"/>
+              <a:t>当时的生活环境是怎么样的呢？</a:t>
+            </a:r>
+          </a:p>
+          <a:p>
+            <a:pPr marL="0" indent="0">
+              <a:buNone/>
+            </a:pPr>
+            <a:r>
+              <a:rPr lang="zh-CN" altLang="en-US" dirty="0"/>
+              <a:t>首先想到的是，家属院，厂办学校，厂办医院，厂办食堂。</a:t>
+            </a:r>
+          </a:p>
+          <a:p>
+            <a:pPr marL="0" indent="0">
+              <a:buNone/>
+            </a:pPr>
+            <a:r>
+              <a:rPr lang="zh-CN" altLang="en-US" dirty="0"/>
+              <a:t>大家都生活在一个集体中。什么都是公家的，自己也是公家的人。</a:t>
+            </a:r>
+          </a:p>
+          <a:p>
+            <a:pPr marL="0" indent="0">
+              <a:buNone/>
+            </a:pPr>
+            <a:r>
+              <a:rPr lang="zh-CN" altLang="en-US" dirty="0"/>
+              <a:t>所以说那一辈子爱占小便宜，其实并不是品行不好，而是他们习惯了生活在公家这种环境中。</a:t>
+            </a:r>
+          </a:p>
+          <a:p>
+            <a:pPr marL="0" indent="0">
+              <a:buNone/>
+            </a:pPr>
+            <a:r>
+              <a:rPr lang="zh-CN" altLang="en-US" dirty="0"/>
+              <a:t>谁会说，拿自已家里的东西还不好意思的呢？</a:t>
+            </a:r>
+          </a:p>
+          <a:p>
+            <a:pPr marL="0" indent="0">
+              <a:buNone/>
+            </a:pPr>
+            <a:r>
+              <a:rPr lang="zh-CN" altLang="en-US" dirty="0"/>
+              <a:t>这是那时候养成的习惯，因为就没有个人私人的概念。</a:t>
+            </a:r>
+          </a:p>
+          <a:p>
+            <a:pPr marL="0" indent="0">
+              <a:buNone/>
+            </a:pPr>
+            <a:r>
+              <a:rPr lang="zh-CN" altLang="en-US" dirty="0"/>
+              <a:t>当时的孩子们，就生活在这样的环境中，长辈们可能都是同事或领导，小伙伴们可能都是周围差不多都是一个单位组织的孩子。</a:t>
+            </a:r>
+          </a:p>
+          <a:p>
+            <a:pPr marL="0" indent="0">
+              <a:buNone/>
+            </a:pPr>
+            <a:endParaRPr lang="zh-CN" altLang="en-US" dirty="0"/>
+          </a:p>
+          <a:p>
+            <a:pPr marL="0" indent="0">
+              <a:buNone/>
+            </a:pPr>
+            <a:endParaRPr lang="zh-CN" altLang="en-US" dirty="0"/>
+          </a:p>
+        </p:txBody>
+      </p:sp>
+    </p:spTree>
+    <p:extLst>
+      <p:ext uri="{BB962C8B-B14F-4D97-AF65-F5344CB8AC3E}">
+        <p14:creationId xmlns:p14="http://schemas.microsoft.com/office/powerpoint/2010/main" val="4041955554"/>
+      </p:ext>
+    </p:extLst>
+  </p:cSld>
+  <p:clrMapOvr>
+    <a:masterClrMapping/>
+  </p:clrMapOvr>
+</p:sld>
+</file>
+
+<file path=ppt/slides/slide46.xml><?xml version="1.0" encoding="utf-8"?>
+<p:sld xmlns:a="http://schemas.openxmlformats.org/drawingml/2006/main" xmlns:r="http://schemas.openxmlformats.org/officeDocument/2006/relationships" xmlns:p="http://schemas.openxmlformats.org/presentationml/2006/main">
+  <p:cSld>
+    <p:spTree>
+      <p:nvGrpSpPr>
+        <p:cNvPr id="1" name="">
+          <a:extLst>
+            <a:ext uri="{FF2B5EF4-FFF2-40B4-BE49-F238E27FC236}">
+              <a16:creationId xmlns:a16="http://schemas.microsoft.com/office/drawing/2014/main" id="{1F5DC398-1315-DF2D-35EE-E5511A187F91}"/>
+            </a:ext>
+          </a:extLst>
+        </p:cNvPr>
+        <p:cNvGrpSpPr/>
+        <p:nvPr/>
+      </p:nvGrpSpPr>
+      <p:grpSpPr>
+        <a:xfrm>
+          <a:off x="0" y="0"/>
+          <a:ext cx="0" cy="0"/>
+          <a:chOff x="0" y="0"/>
+          <a:chExt cx="0" cy="0"/>
+        </a:xfrm>
+      </p:grpSpPr>
+      <p:sp>
+        <p:nvSpPr>
+          <p:cNvPr id="2" name="标题 1">
+            <a:extLst>
+              <a:ext uri="{FF2B5EF4-FFF2-40B4-BE49-F238E27FC236}">
+                <a16:creationId xmlns:a16="http://schemas.microsoft.com/office/drawing/2014/main" id="{4D8CBE0A-855C-EC55-9A69-37DDAC0C2AD5}"/>
+              </a:ext>
+            </a:extLst>
+          </p:cNvPr>
+          <p:cNvSpPr>
+            <a:spLocks noGrp="1"/>
+          </p:cNvSpPr>
+          <p:nvPr>
+            <p:ph type="title"/>
+          </p:nvPr>
+        </p:nvSpPr>
+        <p:spPr/>
+        <p:txBody>
+          <a:bodyPr/>
+          <a:lstStyle/>
+          <a:p>
+            <a:r>
+              <a:rPr lang="zh-CN" altLang="en-US" sz="4400" dirty="0"/>
+              <a:t>儿童青少年教育关键（五）</a:t>
+            </a:r>
+          </a:p>
+        </p:txBody>
+      </p:sp>
+      <p:sp>
+        <p:nvSpPr>
+          <p:cNvPr id="3" name="内容占位符 2">
+            <a:extLst>
+              <a:ext uri="{FF2B5EF4-FFF2-40B4-BE49-F238E27FC236}">
+                <a16:creationId xmlns:a16="http://schemas.microsoft.com/office/drawing/2014/main" id="{027E65FB-183F-1676-8591-2EEC11A7BED8}"/>
+              </a:ext>
+            </a:extLst>
+          </p:cNvPr>
+          <p:cNvSpPr>
+            <a:spLocks noGrp="1"/>
+          </p:cNvSpPr>
+          <p:nvPr>
+            <p:ph idx="1"/>
+          </p:nvPr>
+        </p:nvSpPr>
+        <p:spPr>
+          <a:xfrm>
+            <a:off x="521208" y="1843087"/>
+            <a:ext cx="11155680" cy="4886325"/>
+          </a:xfrm>
+        </p:spPr>
+        <p:txBody>
+          <a:bodyPr/>
+          <a:lstStyle/>
+          <a:p>
+            <a:pPr marL="0" indent="0">
+              <a:buNone/>
+            </a:pPr>
+            <a:r>
+              <a:rPr lang="zh-CN" altLang="en-US" dirty="0"/>
+              <a:t>好，现在到了</a:t>
+            </a:r>
+            <a:r>
+              <a:rPr lang="en-US" altLang="zh-CN" dirty="0"/>
+              <a:t>80</a:t>
+            </a:r>
+            <a:r>
+              <a:rPr lang="zh-CN" altLang="en-US" dirty="0"/>
+              <a:t>、</a:t>
+            </a:r>
+            <a:r>
+              <a:rPr lang="en-US" altLang="zh-CN" dirty="0"/>
+              <a:t>90</a:t>
+            </a:r>
+            <a:r>
+              <a:rPr lang="zh-CN" altLang="en-US" dirty="0"/>
+              <a:t>年代。</a:t>
+            </a:r>
+            <a:endParaRPr lang="en-US" altLang="zh-CN" dirty="0"/>
+          </a:p>
+          <a:p>
+            <a:pPr marL="0" indent="0">
+              <a:buNone/>
+            </a:pPr>
+            <a:endParaRPr lang="en-US" altLang="zh-CN" dirty="0"/>
+          </a:p>
+          <a:p>
+            <a:pPr marL="0" indent="0">
+              <a:buNone/>
+            </a:pPr>
+            <a:r>
+              <a:rPr lang="en-US" altLang="zh-CN" dirty="0"/>
+              <a:t>72</a:t>
+            </a:r>
+            <a:r>
+              <a:rPr lang="zh-CN" altLang="en-US" dirty="0"/>
+              <a:t>年尼克松访华，</a:t>
+            </a:r>
+            <a:r>
+              <a:rPr lang="en-US" altLang="zh-CN" dirty="0"/>
+              <a:t>79</a:t>
+            </a:r>
+            <a:r>
+              <a:rPr lang="zh-CN" altLang="en-US" dirty="0"/>
+              <a:t>年中美正式建交。中美蜜月期，关系好得跟穿一条裤子似的。</a:t>
+            </a:r>
+          </a:p>
+          <a:p>
+            <a:pPr marL="0" indent="0">
+              <a:buNone/>
+            </a:pPr>
+            <a:r>
+              <a:rPr lang="zh-CN" altLang="en-US" dirty="0"/>
+              <a:t>好到什么程度呢？</a:t>
+            </a:r>
+            <a:endParaRPr lang="en-US" altLang="zh-CN" dirty="0"/>
+          </a:p>
+          <a:p>
+            <a:pPr marL="0" indent="0">
+              <a:buNone/>
+            </a:pPr>
+            <a:r>
+              <a:rPr lang="zh-CN" altLang="en-US" dirty="0"/>
+              <a:t>据说美国把当时最好的武器都开放售卖给了中国。当然，它是为了联合中国去对付苏联。当时的越南一看情况有变，你个浓眉大眼的中国也叛变西方帝国主义了，就开始挑事。邓公当时说，小朋友不听话，就要打屁股，于是就和美国打了招呼，说我要开始教训小朋友了。于是越战爆发，时间点就是</a:t>
+            </a:r>
+            <a:r>
+              <a:rPr lang="en-US" altLang="zh-CN" dirty="0"/>
+              <a:t>80</a:t>
+            </a:r>
+            <a:r>
+              <a:rPr lang="zh-CN" altLang="en-US" dirty="0"/>
+              <a:t>年代。当然这些都是政治话题，我们不多说。</a:t>
+            </a:r>
+            <a:endParaRPr lang="en-US" altLang="zh-CN" dirty="0"/>
+          </a:p>
+          <a:p>
+            <a:pPr marL="0" indent="0">
+              <a:buNone/>
+            </a:pPr>
+            <a:endParaRPr lang="zh-CN" altLang="en-US" dirty="0"/>
+          </a:p>
+          <a:p>
+            <a:pPr marL="0" indent="0">
+              <a:buNone/>
+            </a:pPr>
+            <a:endParaRPr lang="zh-CN" altLang="en-US" dirty="0"/>
+          </a:p>
+        </p:txBody>
+      </p:sp>
+    </p:spTree>
+    <p:extLst>
+      <p:ext uri="{BB962C8B-B14F-4D97-AF65-F5344CB8AC3E}">
+        <p14:creationId xmlns:p14="http://schemas.microsoft.com/office/powerpoint/2010/main" val="1969550488"/>
+      </p:ext>
+    </p:extLst>
+  </p:cSld>
+  <p:clrMapOvr>
+    <a:masterClrMapping/>
+  </p:clrMapOvr>
+</p:sld>
+</file>
+
+<file path=ppt/slides/slide47.xml><?xml version="1.0" encoding="utf-8"?>
+<p:sld xmlns:a="http://schemas.openxmlformats.org/drawingml/2006/main" xmlns:r="http://schemas.openxmlformats.org/officeDocument/2006/relationships" xmlns:p="http://schemas.openxmlformats.org/presentationml/2006/main">
+  <p:cSld>
+    <p:spTree>
+      <p:nvGrpSpPr>
+        <p:cNvPr id="1" name="">
+          <a:extLst>
+            <a:ext uri="{FF2B5EF4-FFF2-40B4-BE49-F238E27FC236}">
+              <a16:creationId xmlns:a16="http://schemas.microsoft.com/office/drawing/2014/main" id="{4A8F644A-34BB-DEE4-DE22-0176104705BE}"/>
+            </a:ext>
+          </a:extLst>
+        </p:cNvPr>
+        <p:cNvGrpSpPr/>
+        <p:nvPr/>
+      </p:nvGrpSpPr>
+      <p:grpSpPr>
+        <a:xfrm>
+          <a:off x="0" y="0"/>
+          <a:ext cx="0" cy="0"/>
+          <a:chOff x="0" y="0"/>
+          <a:chExt cx="0" cy="0"/>
+        </a:xfrm>
+      </p:grpSpPr>
+      <p:sp>
+        <p:nvSpPr>
+          <p:cNvPr id="2" name="标题 1">
+            <a:extLst>
+              <a:ext uri="{FF2B5EF4-FFF2-40B4-BE49-F238E27FC236}">
+                <a16:creationId xmlns:a16="http://schemas.microsoft.com/office/drawing/2014/main" id="{8972653F-979B-1CF5-187E-30A7E17A0A56}"/>
+              </a:ext>
+            </a:extLst>
+          </p:cNvPr>
+          <p:cNvSpPr>
+            <a:spLocks noGrp="1"/>
+          </p:cNvSpPr>
+          <p:nvPr>
+            <p:ph type="title"/>
+          </p:nvPr>
+        </p:nvSpPr>
+        <p:spPr/>
+        <p:txBody>
+          <a:bodyPr/>
+          <a:lstStyle/>
+          <a:p>
+            <a:r>
+              <a:rPr lang="zh-CN" altLang="en-US" sz="4400" dirty="0"/>
+              <a:t>儿童青少年教育关键（六）</a:t>
+            </a:r>
+          </a:p>
+        </p:txBody>
+      </p:sp>
+      <p:sp>
+        <p:nvSpPr>
+          <p:cNvPr id="3" name="内容占位符 2">
+            <a:extLst>
+              <a:ext uri="{FF2B5EF4-FFF2-40B4-BE49-F238E27FC236}">
+                <a16:creationId xmlns:a16="http://schemas.microsoft.com/office/drawing/2014/main" id="{D0F296AF-BF38-7C2E-537D-5E0A003CEC27}"/>
+              </a:ext>
+            </a:extLst>
+          </p:cNvPr>
+          <p:cNvSpPr>
+            <a:spLocks noGrp="1"/>
+          </p:cNvSpPr>
+          <p:nvPr>
+            <p:ph idx="1"/>
+          </p:nvPr>
+        </p:nvSpPr>
+        <p:spPr>
+          <a:xfrm>
+            <a:off x="521208" y="1843087"/>
+            <a:ext cx="11155680" cy="4886325"/>
+          </a:xfrm>
+        </p:spPr>
+        <p:txBody>
+          <a:bodyPr/>
+          <a:lstStyle/>
+          <a:p>
+            <a:pPr marL="0" indent="0">
+              <a:buNone/>
+            </a:pPr>
+            <a:r>
+              <a:rPr lang="zh-CN" altLang="en-US" dirty="0"/>
+              <a:t>我们只说，中美关系当时是非常好的，美国也用最大的力量帮助中国发展经济。</a:t>
+            </a:r>
+          </a:p>
+          <a:p>
+            <a:pPr marL="0" indent="0">
+              <a:buNone/>
+            </a:pPr>
+            <a:r>
+              <a:rPr lang="zh-CN" altLang="en-US" dirty="0"/>
+              <a:t>于是中国的经济开始飞速发展了，但同时西方的部分思潮也跟着进来了。当时就面临着国有企业转型的问题，大量的国有资产转成了私营。</a:t>
+            </a:r>
+            <a:r>
+              <a:rPr lang="en-US" altLang="zh-CN" dirty="0"/>
+              <a:t>94</a:t>
+            </a:r>
+            <a:r>
+              <a:rPr lang="zh-CN" altLang="en-US" dirty="0"/>
+              <a:t>年国家出台的分税制改革，让地方政府出现了财政上的困难。</a:t>
+            </a:r>
+          </a:p>
+          <a:p>
+            <a:pPr marL="0" indent="0">
+              <a:buNone/>
+            </a:pPr>
+            <a:r>
+              <a:rPr lang="zh-CN" altLang="en-US" dirty="0"/>
+              <a:t>各种状况频频出现，导致了全国性的大下岗。</a:t>
+            </a:r>
+            <a:endParaRPr lang="en-US" altLang="zh-CN" dirty="0"/>
+          </a:p>
+          <a:p>
+            <a:pPr marL="0" indent="0">
+              <a:buNone/>
+            </a:pPr>
+            <a:r>
+              <a:rPr lang="zh-CN" altLang="en-US" dirty="0"/>
+              <a:t>到了</a:t>
+            </a:r>
+            <a:r>
+              <a:rPr lang="en-US" altLang="zh-CN" dirty="0"/>
+              <a:t>90</a:t>
+            </a:r>
+            <a:r>
+              <a:rPr lang="zh-CN" altLang="en-US" dirty="0"/>
+              <a:t>年代末期，已经有很多工人失业。</a:t>
+            </a:r>
+          </a:p>
+          <a:p>
+            <a:pPr marL="0" indent="0">
+              <a:buNone/>
+            </a:pPr>
+            <a:r>
+              <a:rPr lang="zh-CN" altLang="en-US" dirty="0"/>
+              <a:t>失业到什么程度呢？</a:t>
+            </a:r>
+            <a:endParaRPr lang="en-US" altLang="zh-CN" dirty="0"/>
+          </a:p>
+          <a:p>
+            <a:pPr marL="0" indent="0">
+              <a:buNone/>
+            </a:pPr>
+            <a:r>
+              <a:rPr lang="zh-CN" altLang="en-US" dirty="0"/>
+              <a:t>据说广东和四川多了很多洗脚城。</a:t>
+            </a:r>
+          </a:p>
+          <a:p>
+            <a:pPr marL="0" indent="0">
+              <a:buNone/>
+            </a:pPr>
+            <a:endParaRPr lang="zh-CN" altLang="en-US" dirty="0"/>
+          </a:p>
+          <a:p>
+            <a:pPr marL="0" indent="0">
+              <a:buNone/>
+            </a:pPr>
+            <a:endParaRPr lang="zh-CN" altLang="en-US" dirty="0"/>
+          </a:p>
+          <a:p>
+            <a:pPr marL="0" indent="0">
+              <a:buNone/>
+            </a:pPr>
+            <a:endParaRPr lang="zh-CN" altLang="en-US" dirty="0"/>
+          </a:p>
+          <a:p>
+            <a:pPr marL="0" indent="0">
+              <a:buNone/>
+            </a:pPr>
+            <a:endParaRPr lang="zh-CN" altLang="en-US" dirty="0"/>
+          </a:p>
+        </p:txBody>
+      </p:sp>
+    </p:spTree>
+    <p:extLst>
+      <p:ext uri="{BB962C8B-B14F-4D97-AF65-F5344CB8AC3E}">
+        <p14:creationId xmlns:p14="http://schemas.microsoft.com/office/powerpoint/2010/main" val="1284855151"/>
+      </p:ext>
+    </p:extLst>
+  </p:cSld>
+  <p:clrMapOvr>
+    <a:masterClrMapping/>
+  </p:clrMapOvr>
+</p:sld>
+</file>
+
+<file path=ppt/slides/slide48.xml><?xml version="1.0" encoding="utf-8"?>
+<p:sld xmlns:a="http://schemas.openxmlformats.org/drawingml/2006/main" xmlns:r="http://schemas.openxmlformats.org/officeDocument/2006/relationships" xmlns:p="http://schemas.openxmlformats.org/presentationml/2006/main">
+  <p:cSld>
+    <p:spTree>
+      <p:nvGrpSpPr>
+        <p:cNvPr id="1" name="">
+          <a:extLst>
+            <a:ext uri="{FF2B5EF4-FFF2-40B4-BE49-F238E27FC236}">
+              <a16:creationId xmlns:a16="http://schemas.microsoft.com/office/drawing/2014/main" id="{5B94F347-B00B-C510-9BE4-D004D8E7D640}"/>
+            </a:ext>
+          </a:extLst>
+        </p:cNvPr>
+        <p:cNvGrpSpPr/>
+        <p:nvPr/>
+      </p:nvGrpSpPr>
+      <p:grpSpPr>
+        <a:xfrm>
+          <a:off x="0" y="0"/>
+          <a:ext cx="0" cy="0"/>
+          <a:chOff x="0" y="0"/>
+          <a:chExt cx="0" cy="0"/>
+        </a:xfrm>
+      </p:grpSpPr>
+      <p:sp>
+        <p:nvSpPr>
+          <p:cNvPr id="2" name="标题 1">
+            <a:extLst>
+              <a:ext uri="{FF2B5EF4-FFF2-40B4-BE49-F238E27FC236}">
+                <a16:creationId xmlns:a16="http://schemas.microsoft.com/office/drawing/2014/main" id="{3A7ED3D3-73DA-451B-4BDF-C06E73869EF5}"/>
+              </a:ext>
+            </a:extLst>
+          </p:cNvPr>
+          <p:cNvSpPr>
+            <a:spLocks noGrp="1"/>
+          </p:cNvSpPr>
+          <p:nvPr>
+            <p:ph type="title"/>
+          </p:nvPr>
+        </p:nvSpPr>
+        <p:spPr/>
+        <p:txBody>
+          <a:bodyPr/>
+          <a:lstStyle/>
+          <a:p>
+            <a:r>
+              <a:rPr lang="zh-CN" altLang="en-US" sz="4400" dirty="0"/>
+              <a:t>儿童青少年教育关键（七）</a:t>
+            </a:r>
+          </a:p>
+        </p:txBody>
+      </p:sp>
+      <p:sp>
+        <p:nvSpPr>
+          <p:cNvPr id="3" name="内容占位符 2">
+            <a:extLst>
+              <a:ext uri="{FF2B5EF4-FFF2-40B4-BE49-F238E27FC236}">
+                <a16:creationId xmlns:a16="http://schemas.microsoft.com/office/drawing/2014/main" id="{37001C4B-A8DF-D358-0FD4-1D12CA986F8F}"/>
+              </a:ext>
+            </a:extLst>
+          </p:cNvPr>
+          <p:cNvSpPr>
+            <a:spLocks noGrp="1"/>
+          </p:cNvSpPr>
+          <p:nvPr>
+            <p:ph idx="1"/>
+          </p:nvPr>
+        </p:nvSpPr>
+        <p:spPr>
+          <a:xfrm>
+            <a:off x="521208" y="1843087"/>
+            <a:ext cx="11155680" cy="4886325"/>
+          </a:xfrm>
+        </p:spPr>
+        <p:txBody>
+          <a:bodyPr/>
+          <a:lstStyle/>
+          <a:p>
+            <a:pPr marL="0" indent="0">
+              <a:buNone/>
+            </a:pPr>
+            <a:r>
+              <a:rPr lang="zh-CN" altLang="en-US" dirty="0"/>
+              <a:t>当时，在</a:t>
+            </a:r>
+            <a:r>
+              <a:rPr lang="en-US" altLang="zh-CN" dirty="0"/>
+              <a:t>90</a:t>
+            </a:r>
+            <a:r>
+              <a:rPr lang="zh-CN" altLang="en-US" dirty="0"/>
+              <a:t>年代初，大概</a:t>
+            </a:r>
+            <a:r>
+              <a:rPr lang="en-US" altLang="zh-CN" dirty="0"/>
+              <a:t>91</a:t>
+            </a:r>
+            <a:r>
+              <a:rPr lang="zh-CN" altLang="en-US" dirty="0"/>
+              <a:t>年还是</a:t>
+            </a:r>
+            <a:r>
+              <a:rPr lang="en-US" altLang="zh-CN" dirty="0"/>
+              <a:t>92</a:t>
+            </a:r>
+            <a:r>
+              <a:rPr lang="zh-CN" altLang="en-US" dirty="0"/>
+              <a:t>年，曾仕强曾预言中国将来会成为世界第二大经济体，科技水平会超过西方，压根就没人信。</a:t>
+            </a:r>
+            <a:endParaRPr lang="en-US" altLang="zh-CN" dirty="0"/>
+          </a:p>
+          <a:p>
+            <a:pPr marL="0" indent="0">
+              <a:buNone/>
+            </a:pPr>
+            <a:r>
+              <a:rPr lang="zh-CN" altLang="en-US" dirty="0"/>
+              <a:t>直到</a:t>
+            </a:r>
+            <a:r>
+              <a:rPr lang="en-US" altLang="zh-CN" dirty="0"/>
+              <a:t>2000</a:t>
+            </a:r>
+            <a:r>
+              <a:rPr lang="zh-CN" altLang="en-US" dirty="0"/>
+              <a:t>年初，发生了根本性的改变。</a:t>
+            </a:r>
+            <a:endParaRPr lang="en-US" altLang="zh-CN" dirty="0"/>
+          </a:p>
+          <a:p>
+            <a:pPr marL="0" indent="0">
+              <a:buNone/>
+            </a:pPr>
+            <a:r>
+              <a:rPr lang="zh-CN" altLang="en-US" dirty="0"/>
+              <a:t>当时中国加入了</a:t>
+            </a:r>
+            <a:r>
+              <a:rPr lang="en-US" altLang="zh-CN" dirty="0"/>
+              <a:t>WTO</a:t>
+            </a:r>
+            <a:r>
+              <a:rPr lang="zh-CN" altLang="en-US" dirty="0"/>
+              <a:t>，并且还有一个重要因素，就是网络的兴起。</a:t>
+            </a:r>
+            <a:endParaRPr lang="en-US" altLang="zh-CN" dirty="0"/>
+          </a:p>
+          <a:p>
+            <a:pPr marL="0" indent="0">
+              <a:buNone/>
+            </a:pPr>
+            <a:endParaRPr lang="zh-CN" altLang="en-US" dirty="0"/>
+          </a:p>
+          <a:p>
+            <a:pPr marL="0" indent="0">
+              <a:buNone/>
+            </a:pPr>
+            <a:r>
+              <a:rPr lang="zh-CN" altLang="en-US" dirty="0"/>
+              <a:t>大量的农民工进城。进城干什么呢？</a:t>
+            </a:r>
+            <a:endParaRPr lang="en-US" altLang="zh-CN" dirty="0"/>
+          </a:p>
+          <a:p>
+            <a:pPr marL="0" indent="0">
+              <a:buNone/>
+            </a:pPr>
+            <a:r>
+              <a:rPr lang="zh-CN" altLang="en-US" dirty="0"/>
+              <a:t>当然是打工赚钱了！</a:t>
+            </a:r>
+            <a:endParaRPr lang="en-US" altLang="zh-CN" dirty="0"/>
+          </a:p>
+          <a:p>
+            <a:pPr marL="0" indent="0">
+              <a:buNone/>
+            </a:pPr>
+            <a:r>
+              <a:rPr lang="zh-CN" altLang="en-US" dirty="0"/>
+              <a:t>随着房地产开发以及经济的恢复，城市建设起来了，大家的日子也慢慢好起来了。</a:t>
+            </a:r>
+          </a:p>
+          <a:p>
+            <a:pPr marL="0" indent="0">
+              <a:buNone/>
+            </a:pPr>
+            <a:endParaRPr lang="zh-CN" altLang="en-US" dirty="0"/>
+          </a:p>
+          <a:p>
+            <a:pPr marL="0" indent="0">
+              <a:buNone/>
+            </a:pPr>
+            <a:endParaRPr lang="zh-CN" altLang="en-US" dirty="0"/>
+          </a:p>
+          <a:p>
+            <a:pPr marL="0" indent="0">
+              <a:buNone/>
+            </a:pPr>
+            <a:endParaRPr lang="zh-CN" altLang="en-US" dirty="0"/>
+          </a:p>
+          <a:p>
+            <a:pPr marL="0" indent="0">
+              <a:buNone/>
+            </a:pPr>
+            <a:endParaRPr lang="zh-CN" altLang="en-US" dirty="0"/>
+          </a:p>
+        </p:txBody>
+      </p:sp>
+    </p:spTree>
+    <p:extLst>
+      <p:ext uri="{BB962C8B-B14F-4D97-AF65-F5344CB8AC3E}">
+        <p14:creationId xmlns:p14="http://schemas.microsoft.com/office/powerpoint/2010/main" val="3207431065"/>
+      </p:ext>
+    </p:extLst>
+  </p:cSld>
+  <p:clrMapOvr>
+    <a:masterClrMapping/>
+  </p:clrMapOvr>
+</p:sld>
+</file>
+
+<file path=ppt/slides/slide49.xml><?xml version="1.0" encoding="utf-8"?>
+<p:sld xmlns:a="http://schemas.openxmlformats.org/drawingml/2006/main" xmlns:r="http://schemas.openxmlformats.org/officeDocument/2006/relationships" xmlns:p="http://schemas.openxmlformats.org/presentationml/2006/main">
+  <p:cSld>
+    <p:spTree>
+      <p:nvGrpSpPr>
+        <p:cNvPr id="1" name="">
+          <a:extLst>
+            <a:ext uri="{FF2B5EF4-FFF2-40B4-BE49-F238E27FC236}">
+              <a16:creationId xmlns:a16="http://schemas.microsoft.com/office/drawing/2014/main" id="{CA15BC09-F0DD-360B-8A19-9353D5E2214C}"/>
+            </a:ext>
+          </a:extLst>
+        </p:cNvPr>
+        <p:cNvGrpSpPr/>
+        <p:nvPr/>
+      </p:nvGrpSpPr>
+      <p:grpSpPr>
+        <a:xfrm>
+          <a:off x="0" y="0"/>
+          <a:ext cx="0" cy="0"/>
+          <a:chOff x="0" y="0"/>
+          <a:chExt cx="0" cy="0"/>
+        </a:xfrm>
+      </p:grpSpPr>
+      <p:sp>
+        <p:nvSpPr>
+          <p:cNvPr id="2" name="标题 1">
+            <a:extLst>
+              <a:ext uri="{FF2B5EF4-FFF2-40B4-BE49-F238E27FC236}">
+                <a16:creationId xmlns:a16="http://schemas.microsoft.com/office/drawing/2014/main" id="{AEC53166-9D97-5873-B961-106C8E320857}"/>
+              </a:ext>
+            </a:extLst>
+          </p:cNvPr>
+          <p:cNvSpPr>
+            <a:spLocks noGrp="1"/>
+          </p:cNvSpPr>
+          <p:nvPr>
+            <p:ph type="title"/>
+          </p:nvPr>
+        </p:nvSpPr>
+        <p:spPr/>
+        <p:txBody>
+          <a:bodyPr/>
+          <a:lstStyle/>
+          <a:p>
+            <a:r>
+              <a:rPr lang="zh-CN" altLang="en-US" sz="4400" dirty="0"/>
+              <a:t>儿童青少年教育关键（八）</a:t>
+            </a:r>
+          </a:p>
+        </p:txBody>
+      </p:sp>
+      <p:sp>
+        <p:nvSpPr>
+          <p:cNvPr id="3" name="内容占位符 2">
+            <a:extLst>
+              <a:ext uri="{FF2B5EF4-FFF2-40B4-BE49-F238E27FC236}">
+                <a16:creationId xmlns:a16="http://schemas.microsoft.com/office/drawing/2014/main" id="{E3D1B5FE-225D-2F08-596A-5A16C009B26C}"/>
+              </a:ext>
+            </a:extLst>
+          </p:cNvPr>
+          <p:cNvSpPr>
+            <a:spLocks noGrp="1"/>
+          </p:cNvSpPr>
+          <p:nvPr>
+            <p:ph idx="1"/>
+          </p:nvPr>
+        </p:nvSpPr>
+        <p:spPr>
+          <a:xfrm>
+            <a:off x="521208" y="1843087"/>
+            <a:ext cx="11155680" cy="4886325"/>
+          </a:xfrm>
+        </p:spPr>
+        <p:txBody>
+          <a:bodyPr/>
+          <a:lstStyle/>
+          <a:p>
+            <a:pPr marL="0" indent="0">
+              <a:buNone/>
+            </a:pPr>
+            <a:r>
+              <a:rPr lang="zh-CN" altLang="en-US" dirty="0"/>
+              <a:t>好，说了这么说，大家发现没有。 </a:t>
+            </a:r>
+          </a:p>
+          <a:p>
+            <a:pPr marL="0" indent="0">
+              <a:buNone/>
+            </a:pPr>
+            <a:r>
+              <a:rPr lang="zh-CN" altLang="en-US" dirty="0"/>
+              <a:t>孩子们生活的环境发生了怎样的变化呢？</a:t>
+            </a:r>
+          </a:p>
+          <a:p>
+            <a:pPr marL="0" indent="0">
+              <a:buNone/>
+            </a:pPr>
+            <a:r>
+              <a:rPr lang="zh-CN" altLang="en-US" dirty="0"/>
+              <a:t>过去不管是家族式群居生活也好，还是公家国营集体生活也好，都已经不复存在了。</a:t>
+            </a:r>
+          </a:p>
+          <a:p>
+            <a:pPr marL="0" indent="0">
+              <a:buNone/>
+            </a:pPr>
+            <a:r>
+              <a:rPr lang="zh-CN" altLang="en-US" dirty="0"/>
+              <a:t>取而代之的是，孩子们住在钢筋混凝土的楼房里，大量的留守儿童。</a:t>
+            </a:r>
+          </a:p>
+          <a:p>
+            <a:pPr marL="0" indent="0">
+              <a:buNone/>
+            </a:pPr>
+            <a:r>
+              <a:rPr lang="zh-CN" altLang="en-US" dirty="0"/>
+              <a:t>以前的居住环境已经变成了各自独立生活。</a:t>
+            </a:r>
+          </a:p>
+          <a:p>
+            <a:pPr marL="0" indent="0">
+              <a:buNone/>
+            </a:pPr>
+            <a:r>
+              <a:rPr lang="zh-CN" altLang="en-US" dirty="0"/>
+              <a:t>我们如果能够正确看待这段发展历史，就会立刻发现，过去传统的家庭环境早已土崩瓦解。</a:t>
+            </a:r>
+          </a:p>
+          <a:p>
+            <a:pPr marL="0" indent="0">
+              <a:buNone/>
+            </a:pPr>
+            <a:endParaRPr lang="zh-CN" altLang="en-US" dirty="0"/>
+          </a:p>
+          <a:p>
+            <a:pPr marL="0" indent="0">
+              <a:buNone/>
+            </a:pPr>
+            <a:endParaRPr lang="zh-CN" altLang="en-US" dirty="0"/>
+          </a:p>
+        </p:txBody>
+      </p:sp>
+    </p:spTree>
+    <p:extLst>
+      <p:ext uri="{BB962C8B-B14F-4D97-AF65-F5344CB8AC3E}">
+        <p14:creationId xmlns:p14="http://schemas.microsoft.com/office/powerpoint/2010/main" val="348610587"/>
       </p:ext>
     </p:extLst>
   </p:cSld>
@@ -12049,6 +12703,621 @@
     <p:extLst>
       <p:ext uri="{BB962C8B-B14F-4D97-AF65-F5344CB8AC3E}">
         <p14:creationId xmlns:p14="http://schemas.microsoft.com/office/powerpoint/2010/main" val="2779998026"/>
+      </p:ext>
+    </p:extLst>
+  </p:cSld>
+  <p:clrMapOvr>
+    <a:masterClrMapping/>
+  </p:clrMapOvr>
+</p:sld>
+</file>
+
+<file path=ppt/slides/slide50.xml><?xml version="1.0" encoding="utf-8"?>
+<p:sld xmlns:a="http://schemas.openxmlformats.org/drawingml/2006/main" xmlns:r="http://schemas.openxmlformats.org/officeDocument/2006/relationships" xmlns:p="http://schemas.openxmlformats.org/presentationml/2006/main">
+  <p:cSld>
+    <p:spTree>
+      <p:nvGrpSpPr>
+        <p:cNvPr id="1" name="">
+          <a:extLst>
+            <a:ext uri="{FF2B5EF4-FFF2-40B4-BE49-F238E27FC236}">
+              <a16:creationId xmlns:a16="http://schemas.microsoft.com/office/drawing/2014/main" id="{E28670EB-AE95-4D76-8053-420ED30D9633}"/>
+            </a:ext>
+          </a:extLst>
+        </p:cNvPr>
+        <p:cNvGrpSpPr/>
+        <p:nvPr/>
+      </p:nvGrpSpPr>
+      <p:grpSpPr>
+        <a:xfrm>
+          <a:off x="0" y="0"/>
+          <a:ext cx="0" cy="0"/>
+          <a:chOff x="0" y="0"/>
+          <a:chExt cx="0" cy="0"/>
+        </a:xfrm>
+      </p:grpSpPr>
+      <p:sp>
+        <p:nvSpPr>
+          <p:cNvPr id="2" name="标题 1">
+            <a:extLst>
+              <a:ext uri="{FF2B5EF4-FFF2-40B4-BE49-F238E27FC236}">
+                <a16:creationId xmlns:a16="http://schemas.microsoft.com/office/drawing/2014/main" id="{96980155-4F53-E2DE-EDF0-83A1B119E85E}"/>
+              </a:ext>
+            </a:extLst>
+          </p:cNvPr>
+          <p:cNvSpPr>
+            <a:spLocks noGrp="1"/>
+          </p:cNvSpPr>
+          <p:nvPr>
+            <p:ph type="title"/>
+          </p:nvPr>
+        </p:nvSpPr>
+        <p:spPr/>
+        <p:txBody>
+          <a:bodyPr/>
+          <a:lstStyle/>
+          <a:p>
+            <a:r>
+              <a:rPr lang="zh-CN" altLang="en-US" sz="4400" dirty="0"/>
+              <a:t>儿童青少年教育关键（九）</a:t>
+            </a:r>
+          </a:p>
+        </p:txBody>
+      </p:sp>
+      <p:sp>
+        <p:nvSpPr>
+          <p:cNvPr id="3" name="内容占位符 2">
+            <a:extLst>
+              <a:ext uri="{FF2B5EF4-FFF2-40B4-BE49-F238E27FC236}">
+                <a16:creationId xmlns:a16="http://schemas.microsoft.com/office/drawing/2014/main" id="{F114A539-EB63-8B8A-46C7-874A12BBB05E}"/>
+              </a:ext>
+            </a:extLst>
+          </p:cNvPr>
+          <p:cNvSpPr>
+            <a:spLocks noGrp="1"/>
+          </p:cNvSpPr>
+          <p:nvPr>
+            <p:ph idx="1"/>
+          </p:nvPr>
+        </p:nvSpPr>
+        <p:spPr>
+          <a:xfrm>
+            <a:off x="521208" y="1843088"/>
+            <a:ext cx="11155680" cy="4502848"/>
+          </a:xfrm>
+        </p:spPr>
+        <p:txBody>
+          <a:bodyPr/>
+          <a:lstStyle/>
+          <a:p>
+            <a:pPr marL="0" indent="0">
+              <a:buNone/>
+            </a:pPr>
+            <a:r>
+              <a:rPr lang="zh-CN" altLang="en-US" dirty="0"/>
+              <a:t>现在一家三口人，爸爸妈妈孩子。</a:t>
+            </a:r>
+          </a:p>
+          <a:p>
+            <a:pPr marL="0" indent="0">
+              <a:buNone/>
+            </a:pPr>
+            <a:r>
+              <a:rPr lang="zh-CN" altLang="en-US" dirty="0"/>
+              <a:t>开一亮，吃完早饭，爸爸到城东上班，妈妈到城西工作，孩子到城南上学。</a:t>
+            </a:r>
+          </a:p>
+          <a:p>
+            <a:pPr marL="0" indent="0">
+              <a:buNone/>
+            </a:pPr>
+            <a:r>
+              <a:rPr lang="zh-CN" altLang="en-US" dirty="0"/>
+              <a:t>晚上很晚才能回到家。</a:t>
+            </a:r>
+          </a:p>
+          <a:p>
+            <a:pPr marL="0" indent="0">
+              <a:buNone/>
+            </a:pPr>
+            <a:r>
+              <a:rPr lang="zh-CN" altLang="en-US" dirty="0"/>
+              <a:t>现在连一家人在一起吃个晚饭都可能是一件奢侈的事情，更别说要加班，还要补课，还要做其他的事情。</a:t>
+            </a:r>
+          </a:p>
+          <a:p>
+            <a:pPr marL="0" indent="0">
+              <a:buNone/>
+            </a:pPr>
+            <a:r>
+              <a:rPr lang="zh-CN" altLang="en-US" dirty="0"/>
+              <a:t>请问，这是一个家吗？</a:t>
+            </a:r>
+          </a:p>
+          <a:p>
+            <a:pPr marL="0" indent="0">
+              <a:buNone/>
+            </a:pPr>
+            <a:endParaRPr lang="zh-CN" altLang="en-US" dirty="0"/>
+          </a:p>
+          <a:p>
+            <a:pPr marL="0" indent="0">
+              <a:buNone/>
+            </a:pPr>
+            <a:r>
+              <a:rPr lang="zh-CN" altLang="en-US" dirty="0"/>
+              <a:t>关于婚恋纠纷问题的心理咨询，是紧紧排在心理咨询的第二位的，第一位的是儿童青少年心理问题。</a:t>
+            </a:r>
+          </a:p>
+          <a:p>
+            <a:pPr marL="0" indent="0">
+              <a:buNone/>
+            </a:pPr>
+            <a:r>
+              <a:rPr lang="zh-CN" altLang="en-US" dirty="0"/>
+              <a:t>所以你说，为什么会这样？</a:t>
+            </a:r>
+          </a:p>
+          <a:p>
+            <a:pPr marL="0" indent="0">
+              <a:buNone/>
+            </a:pPr>
+            <a:endParaRPr lang="zh-CN" altLang="en-US" dirty="0"/>
+          </a:p>
+          <a:p>
+            <a:pPr marL="0" indent="0">
+              <a:buNone/>
+            </a:pPr>
+            <a:endParaRPr lang="zh-CN" altLang="en-US" dirty="0"/>
+          </a:p>
+          <a:p>
+            <a:pPr marL="0" indent="0">
+              <a:buNone/>
+            </a:pPr>
+            <a:endParaRPr lang="zh-CN" altLang="en-US" dirty="0"/>
+          </a:p>
+          <a:p>
+            <a:pPr marL="0" indent="0">
+              <a:buNone/>
+            </a:pPr>
+            <a:endParaRPr lang="zh-CN" altLang="en-US" dirty="0"/>
+          </a:p>
+        </p:txBody>
+      </p:sp>
+    </p:spTree>
+    <p:extLst>
+      <p:ext uri="{BB962C8B-B14F-4D97-AF65-F5344CB8AC3E}">
+        <p14:creationId xmlns:p14="http://schemas.microsoft.com/office/powerpoint/2010/main" val="4061811091"/>
+      </p:ext>
+    </p:extLst>
+  </p:cSld>
+  <p:clrMapOvr>
+    <a:masterClrMapping/>
+  </p:clrMapOvr>
+</p:sld>
+</file>
+
+<file path=ppt/slides/slide51.xml><?xml version="1.0" encoding="utf-8"?>
+<p:sld xmlns:a="http://schemas.openxmlformats.org/drawingml/2006/main" xmlns:r="http://schemas.openxmlformats.org/officeDocument/2006/relationships" xmlns:p="http://schemas.openxmlformats.org/presentationml/2006/main">
+  <p:cSld>
+    <p:spTree>
+      <p:nvGrpSpPr>
+        <p:cNvPr id="1" name="">
+          <a:extLst>
+            <a:ext uri="{FF2B5EF4-FFF2-40B4-BE49-F238E27FC236}">
+              <a16:creationId xmlns:a16="http://schemas.microsoft.com/office/drawing/2014/main" id="{C9B6A869-2166-1346-B558-3079F7CD1890}"/>
+            </a:ext>
+          </a:extLst>
+        </p:cNvPr>
+        <p:cNvGrpSpPr/>
+        <p:nvPr/>
+      </p:nvGrpSpPr>
+      <p:grpSpPr>
+        <a:xfrm>
+          <a:off x="0" y="0"/>
+          <a:ext cx="0" cy="0"/>
+          <a:chOff x="0" y="0"/>
+          <a:chExt cx="0" cy="0"/>
+        </a:xfrm>
+      </p:grpSpPr>
+      <p:sp>
+        <p:nvSpPr>
+          <p:cNvPr id="2" name="标题 1">
+            <a:extLst>
+              <a:ext uri="{FF2B5EF4-FFF2-40B4-BE49-F238E27FC236}">
+                <a16:creationId xmlns:a16="http://schemas.microsoft.com/office/drawing/2014/main" id="{8C70AF07-937D-7518-BBE6-7A6E9DC4D028}"/>
+              </a:ext>
+            </a:extLst>
+          </p:cNvPr>
+          <p:cNvSpPr>
+            <a:spLocks noGrp="1"/>
+          </p:cNvSpPr>
+          <p:nvPr>
+            <p:ph type="title"/>
+          </p:nvPr>
+        </p:nvSpPr>
+        <p:spPr/>
+        <p:txBody>
+          <a:bodyPr/>
+          <a:lstStyle/>
+          <a:p>
+            <a:r>
+              <a:rPr lang="zh-CN" altLang="en-US" sz="4400" dirty="0"/>
+              <a:t>儿童青少年教育关键（十）</a:t>
+            </a:r>
+          </a:p>
+        </p:txBody>
+      </p:sp>
+      <p:sp>
+        <p:nvSpPr>
+          <p:cNvPr id="3" name="内容占位符 2">
+            <a:extLst>
+              <a:ext uri="{FF2B5EF4-FFF2-40B4-BE49-F238E27FC236}">
+                <a16:creationId xmlns:a16="http://schemas.microsoft.com/office/drawing/2014/main" id="{02761907-C60C-51C7-24C2-BCEE78EB50E1}"/>
+              </a:ext>
+            </a:extLst>
+          </p:cNvPr>
+          <p:cNvSpPr>
+            <a:spLocks noGrp="1"/>
+          </p:cNvSpPr>
+          <p:nvPr>
+            <p:ph idx="1"/>
+          </p:nvPr>
+        </p:nvSpPr>
+        <p:spPr>
+          <a:xfrm>
+            <a:off x="521208" y="1914525"/>
+            <a:ext cx="11155680" cy="4431411"/>
+          </a:xfrm>
+        </p:spPr>
+        <p:txBody>
+          <a:bodyPr/>
+          <a:lstStyle/>
+          <a:p>
+            <a:pPr marL="0" indent="0">
+              <a:buNone/>
+            </a:pPr>
+            <a:r>
+              <a:rPr lang="zh-CN" altLang="en-US" dirty="0"/>
+              <a:t>随着工业文明的发展，资本主义通过解构传统的人的生活方式，导致了人与人之间是一种分裂式的生活方式。</a:t>
+            </a:r>
+          </a:p>
+          <a:p>
+            <a:pPr marL="0" indent="0">
+              <a:buNone/>
+            </a:pPr>
+            <a:r>
+              <a:rPr lang="zh-CN" altLang="en-US" dirty="0"/>
+              <a:t>我们说的家庭，实质并不是过去的那种家庭。</a:t>
+            </a:r>
+          </a:p>
+          <a:p>
+            <a:pPr marL="0" indent="0">
+              <a:buNone/>
+            </a:pPr>
+            <a:r>
+              <a:rPr lang="zh-CN" altLang="en-US" dirty="0"/>
+              <a:t>过去的家庭，也不是我们理解的由父母和孩子这么简单的组成。</a:t>
+            </a:r>
+          </a:p>
+          <a:p>
+            <a:pPr marL="0" indent="0">
+              <a:buNone/>
+            </a:pPr>
+            <a:r>
+              <a:rPr lang="zh-CN" altLang="en-US" dirty="0"/>
+              <a:t>其本质，实际上反而是一种社会环境，即大家族，由很多人组成的。</a:t>
+            </a:r>
+          </a:p>
+          <a:p>
+            <a:pPr marL="0" indent="0">
+              <a:buNone/>
+            </a:pPr>
+            <a:r>
+              <a:rPr lang="zh-CN" altLang="en-US" dirty="0"/>
+              <a:t>现在的家族充其量也就六个人组成，六个人能给孩子带来什么有效的影响呢？</a:t>
+            </a:r>
+          </a:p>
+          <a:p>
+            <a:pPr marL="0" indent="0">
+              <a:buNone/>
+            </a:pPr>
+            <a:endParaRPr lang="zh-CN" altLang="en-US" dirty="0"/>
+          </a:p>
+          <a:p>
+            <a:pPr marL="0" indent="0">
+              <a:buNone/>
+            </a:pPr>
+            <a:endParaRPr lang="zh-CN" altLang="en-US" dirty="0"/>
+          </a:p>
+        </p:txBody>
+      </p:sp>
+    </p:spTree>
+    <p:extLst>
+      <p:ext uri="{BB962C8B-B14F-4D97-AF65-F5344CB8AC3E}">
+        <p14:creationId xmlns:p14="http://schemas.microsoft.com/office/powerpoint/2010/main" val="3307707904"/>
+      </p:ext>
+    </p:extLst>
+  </p:cSld>
+  <p:clrMapOvr>
+    <a:masterClrMapping/>
+  </p:clrMapOvr>
+</p:sld>
+</file>
+
+<file path=ppt/slides/slide52.xml><?xml version="1.0" encoding="utf-8"?>
+<p:sld xmlns:a="http://schemas.openxmlformats.org/drawingml/2006/main" xmlns:r="http://schemas.openxmlformats.org/officeDocument/2006/relationships" xmlns:p="http://schemas.openxmlformats.org/presentationml/2006/main">
+  <p:cSld>
+    <p:spTree>
+      <p:nvGrpSpPr>
+        <p:cNvPr id="1" name="">
+          <a:extLst>
+            <a:ext uri="{FF2B5EF4-FFF2-40B4-BE49-F238E27FC236}">
+              <a16:creationId xmlns:a16="http://schemas.microsoft.com/office/drawing/2014/main" id="{B9041A6C-2FCD-0610-7596-56F7D6A0C160}"/>
+            </a:ext>
+          </a:extLst>
+        </p:cNvPr>
+        <p:cNvGrpSpPr/>
+        <p:nvPr/>
+      </p:nvGrpSpPr>
+      <p:grpSpPr>
+        <a:xfrm>
+          <a:off x="0" y="0"/>
+          <a:ext cx="0" cy="0"/>
+          <a:chOff x="0" y="0"/>
+          <a:chExt cx="0" cy="0"/>
+        </a:xfrm>
+      </p:grpSpPr>
+      <p:sp>
+        <p:nvSpPr>
+          <p:cNvPr id="2" name="标题 1">
+            <a:extLst>
+              <a:ext uri="{FF2B5EF4-FFF2-40B4-BE49-F238E27FC236}">
+                <a16:creationId xmlns:a16="http://schemas.microsoft.com/office/drawing/2014/main" id="{5B7983B1-520A-F982-D467-DDD0837834E9}"/>
+              </a:ext>
+            </a:extLst>
+          </p:cNvPr>
+          <p:cNvSpPr>
+            <a:spLocks noGrp="1"/>
+          </p:cNvSpPr>
+          <p:nvPr>
+            <p:ph type="title"/>
+          </p:nvPr>
+        </p:nvSpPr>
+        <p:spPr/>
+        <p:txBody>
+          <a:bodyPr/>
+          <a:lstStyle/>
+          <a:p>
+            <a:r>
+              <a:rPr lang="zh-CN" altLang="en-US" sz="4400" dirty="0"/>
+              <a:t>儿童青少年教育关键（十一）</a:t>
+            </a:r>
+          </a:p>
+        </p:txBody>
+      </p:sp>
+      <p:sp>
+        <p:nvSpPr>
+          <p:cNvPr id="3" name="内容占位符 2">
+            <a:extLst>
+              <a:ext uri="{FF2B5EF4-FFF2-40B4-BE49-F238E27FC236}">
+                <a16:creationId xmlns:a16="http://schemas.microsoft.com/office/drawing/2014/main" id="{60353229-6282-58C3-B58B-6F1D8827B383}"/>
+              </a:ext>
+            </a:extLst>
+          </p:cNvPr>
+          <p:cNvSpPr>
+            <a:spLocks noGrp="1"/>
+          </p:cNvSpPr>
+          <p:nvPr>
+            <p:ph idx="1"/>
+          </p:nvPr>
+        </p:nvSpPr>
+        <p:spPr>
+          <a:xfrm>
+            <a:off x="521208" y="1957388"/>
+            <a:ext cx="11155680" cy="4729162"/>
+          </a:xfrm>
+        </p:spPr>
+        <p:txBody>
+          <a:bodyPr/>
+          <a:lstStyle/>
+          <a:p>
+            <a:pPr marL="0" indent="0">
+              <a:buNone/>
+            </a:pPr>
+            <a:r>
+              <a:rPr lang="zh-CN" altLang="en-US" dirty="0"/>
+              <a:t>有人说了，我感觉家庭对孩子还是有影响的。</a:t>
+            </a:r>
+          </a:p>
+          <a:p>
+            <a:pPr marL="0" indent="0">
+              <a:buNone/>
+            </a:pPr>
+            <a:r>
+              <a:rPr lang="zh-CN" altLang="en-US" dirty="0"/>
+              <a:t>其实你还是没有理解，孟母三迁，你想想是在说家庭父母对孩子的影响吗？</a:t>
+            </a:r>
+          </a:p>
+          <a:p>
+            <a:pPr marL="0" indent="0">
+              <a:buNone/>
+            </a:pPr>
+            <a:r>
+              <a:rPr lang="zh-CN" altLang="en-US" dirty="0"/>
+              <a:t>那分明是在说环境对孩子的影响。</a:t>
+            </a:r>
+          </a:p>
+          <a:p>
+            <a:pPr marL="0" indent="0">
+              <a:buNone/>
+            </a:pPr>
+            <a:r>
+              <a:rPr lang="zh-CN" altLang="en-US" dirty="0"/>
+              <a:t>过去就是家族这种小社会对孩子的影响。</a:t>
+            </a:r>
+          </a:p>
+          <a:p>
+            <a:pPr marL="0" indent="0">
+              <a:buNone/>
+            </a:pPr>
+            <a:r>
+              <a:rPr lang="zh-CN" altLang="en-US" dirty="0"/>
+              <a:t>所以你就应该知道，什么家风、家教，那是过去那种环境下的东西，现在的小家庭，哪里来的什么家风家教？</a:t>
+            </a:r>
+          </a:p>
+          <a:p>
+            <a:pPr marL="0" indent="0">
+              <a:buNone/>
+            </a:pPr>
+            <a:r>
+              <a:rPr lang="zh-CN" altLang="en-US" dirty="0"/>
+              <a:t>几个人对孩子的影响实在是太有限了。</a:t>
+            </a:r>
+          </a:p>
+        </p:txBody>
+      </p:sp>
+    </p:spTree>
+    <p:extLst>
+      <p:ext uri="{BB962C8B-B14F-4D97-AF65-F5344CB8AC3E}">
+        <p14:creationId xmlns:p14="http://schemas.microsoft.com/office/powerpoint/2010/main" val="3513811925"/>
+      </p:ext>
+    </p:extLst>
+  </p:cSld>
+  <p:clrMapOvr>
+    <a:masterClrMapping/>
+  </p:clrMapOvr>
+</p:sld>
+</file>
+
+<file path=ppt/slides/slide53.xml><?xml version="1.0" encoding="utf-8"?>
+<p:sld xmlns:a="http://schemas.openxmlformats.org/drawingml/2006/main" xmlns:r="http://schemas.openxmlformats.org/officeDocument/2006/relationships" xmlns:p="http://schemas.openxmlformats.org/presentationml/2006/main">
+  <p:cSld>
+    <p:spTree>
+      <p:nvGrpSpPr>
+        <p:cNvPr id="1" name="">
+          <a:extLst>
+            <a:ext uri="{FF2B5EF4-FFF2-40B4-BE49-F238E27FC236}">
+              <a16:creationId xmlns:a16="http://schemas.microsoft.com/office/drawing/2014/main" id="{0BD012E6-3538-49C6-893B-A4C7A96951C9}"/>
+            </a:ext>
+          </a:extLst>
+        </p:cNvPr>
+        <p:cNvGrpSpPr/>
+        <p:nvPr/>
+      </p:nvGrpSpPr>
+      <p:grpSpPr>
+        <a:xfrm>
+          <a:off x="0" y="0"/>
+          <a:ext cx="0" cy="0"/>
+          <a:chOff x="0" y="0"/>
+          <a:chExt cx="0" cy="0"/>
+        </a:xfrm>
+      </p:grpSpPr>
+      <p:sp>
+        <p:nvSpPr>
+          <p:cNvPr id="2" name="标题 1">
+            <a:extLst>
+              <a:ext uri="{FF2B5EF4-FFF2-40B4-BE49-F238E27FC236}">
+                <a16:creationId xmlns:a16="http://schemas.microsoft.com/office/drawing/2014/main" id="{B773D9A9-ADEE-656C-0BE9-C938F7BA0D25}"/>
+              </a:ext>
+            </a:extLst>
+          </p:cNvPr>
+          <p:cNvSpPr>
+            <a:spLocks noGrp="1"/>
+          </p:cNvSpPr>
+          <p:nvPr>
+            <p:ph type="title"/>
+          </p:nvPr>
+        </p:nvSpPr>
+        <p:spPr/>
+        <p:txBody>
+          <a:bodyPr/>
+          <a:lstStyle/>
+          <a:p>
+            <a:r>
+              <a:rPr lang="zh-CN" altLang="en-US" sz="4400" dirty="0"/>
+              <a:t>儿童青少年教育关键</a:t>
+            </a:r>
+            <a:r>
+              <a:rPr lang="zh-CN" altLang="en-US" sz="4400"/>
+              <a:t>（十二）</a:t>
+            </a:r>
+            <a:endParaRPr lang="zh-CN" altLang="en-US" sz="4400" dirty="0"/>
+          </a:p>
+        </p:txBody>
+      </p:sp>
+      <p:sp>
+        <p:nvSpPr>
+          <p:cNvPr id="3" name="内容占位符 2">
+            <a:extLst>
+              <a:ext uri="{FF2B5EF4-FFF2-40B4-BE49-F238E27FC236}">
+                <a16:creationId xmlns:a16="http://schemas.microsoft.com/office/drawing/2014/main" id="{ED026127-1329-BAD7-062A-FD21D26E7168}"/>
+              </a:ext>
+            </a:extLst>
+          </p:cNvPr>
+          <p:cNvSpPr>
+            <a:spLocks noGrp="1"/>
+          </p:cNvSpPr>
+          <p:nvPr>
+            <p:ph idx="1"/>
+          </p:nvPr>
+        </p:nvSpPr>
+        <p:spPr>
+          <a:xfrm>
+            <a:off x="521208" y="1957388"/>
+            <a:ext cx="11155680" cy="4729162"/>
+          </a:xfrm>
+        </p:spPr>
+        <p:txBody>
+          <a:bodyPr/>
+          <a:lstStyle/>
+          <a:p>
+            <a:pPr marL="0" indent="0">
+              <a:buNone/>
+            </a:pPr>
+            <a:r>
+              <a:rPr lang="zh-CN" altLang="en-US" dirty="0"/>
+              <a:t>我们说，为什么孩子越大越不听话。</a:t>
+            </a:r>
+          </a:p>
+          <a:p>
+            <a:pPr marL="0" indent="0">
+              <a:buNone/>
+            </a:pPr>
+            <a:r>
+              <a:rPr lang="zh-CN" altLang="en-US" dirty="0"/>
+              <a:t>其实就是家庭外部环境对孩子的影响，大过于家庭父母对他的影响。</a:t>
+            </a:r>
+          </a:p>
+          <a:p>
+            <a:pPr marL="0" indent="0">
+              <a:buNone/>
+            </a:pPr>
+            <a:r>
+              <a:rPr lang="zh-CN" altLang="en-US" dirty="0"/>
+              <a:t>一个人，他对社会群体的认同，始终是要大大大过父母对他的影响的，这是铁律。</a:t>
+            </a:r>
+          </a:p>
+          <a:p>
+            <a:pPr marL="0" indent="0">
+              <a:buNone/>
+            </a:pPr>
+            <a:r>
+              <a:rPr lang="zh-CN" altLang="en-US" dirty="0"/>
+              <a:t>如果你还看不懂这一点，还在抱着原生家庭那套假冒伪劣，那么你是看不懂，也搞不好孩子的教育问题的。</a:t>
+            </a:r>
+          </a:p>
+          <a:p>
+            <a:pPr marL="0" indent="0">
+              <a:buNone/>
+            </a:pPr>
+            <a:endParaRPr lang="zh-CN" altLang="en-US" dirty="0"/>
+          </a:p>
+        </p:txBody>
+      </p:sp>
+    </p:spTree>
+    <p:extLst>
+      <p:ext uri="{BB962C8B-B14F-4D97-AF65-F5344CB8AC3E}">
+        <p14:creationId xmlns:p14="http://schemas.microsoft.com/office/powerpoint/2010/main" val="2188646574"/>
       </p:ext>
     </p:extLst>
   </p:cSld>
